--- a/tests/corpus/pptx/generated/charts-3d.pptx
+++ b/tests/corpus/pptx/generated/charts-3d.pptx
@@ -22,6 +22,7 @@
     <p:sldId id="270" r:id="rId16"/>
     <p:sldId id="271" r:id="rId17"/>
     <p:sldId id="272" r:id="rId18"/>
+    <p:sldId id="273" r:id="rId19"/>
   </p:sldIdLst>
   <p:sldSz cx="12192000" cy="6858000"/>
   <p:notesSz cx="6858000" cy="9144000"/>
@@ -251,7 +252,7 @@
           </c:val>
           <c:extLst>
             <c:ext xmlns:c16="http://schemas.microsoft.com/office/drawing/2014/chart" uri="{C3380CC4-5D6E-409C-BE32-E72D297353CC}">
-              <c16:uniqueId val="{00000000-5271-4768-AC7F-996304029A21}"/>
+              <c16:uniqueId val="{00000000-1F20-4EB3-88B4-0FCA94695256}"/>
             </c:ext>
           </c:extLst>
         </c:ser>
@@ -323,7 +324,7 @@
           </c:val>
           <c:extLst>
             <c:ext xmlns:c16="http://schemas.microsoft.com/office/drawing/2014/chart" uri="{C3380CC4-5D6E-409C-BE32-E72D297353CC}">
-              <c16:uniqueId val="{00000001-5271-4768-AC7F-996304029A21}"/>
+              <c16:uniqueId val="{00000001-1F20-4EB3-88B4-0FCA94695256}"/>
             </c:ext>
           </c:extLst>
         </c:ser>
@@ -395,7 +396,7 @@
           </c:val>
           <c:extLst>
             <c:ext xmlns:c16="http://schemas.microsoft.com/office/drawing/2014/chart" uri="{C3380CC4-5D6E-409C-BE32-E72D297353CC}">
-              <c16:uniqueId val="{00000002-5271-4768-AC7F-996304029A21}"/>
+              <c16:uniqueId val="{00000002-1F20-4EB3-88B4-0FCA94695256}"/>
             </c:ext>
           </c:extLst>
         </c:ser>
@@ -409,12 +410,12 @@
         </c:dLbls>
         <c:gapWidth val="150"/>
         <c:shape val="box"/>
-        <c:axId val="1304832528"/>
-        <c:axId val="1466078575"/>
+        <c:axId val="1749827295"/>
+        <c:axId val="15003536"/>
         <c:axId val="0"/>
       </c:bar3DChart>
       <c:catAx>
-        <c:axId val="1304832528"/>
+        <c:axId val="1749827295"/>
         <c:scaling>
           <c:orientation val="minMax"/>
         </c:scaling>
@@ -451,7 +452,7 @@
             <a:endParaRPr lang="de-DE"/>
           </a:p>
         </c:txPr>
-        <c:crossAx val="1466078575"/>
+        <c:crossAx val="15003536"/>
         <c:crosses val="autoZero"/>
         <c:auto val="1"/>
         <c:lblAlgn val="ctr"/>
@@ -459,7 +460,7 @@
         <c:noMultiLvlLbl val="0"/>
       </c:catAx>
       <c:valAx>
-        <c:axId val="1466078575"/>
+        <c:axId val="15003536"/>
         <c:scaling>
           <c:orientation val="minMax"/>
         </c:scaling>
@@ -510,7 +511,7 @@
             <a:endParaRPr lang="de-DE"/>
           </a:p>
         </c:txPr>
-        <c:crossAx val="1304832528"/>
+        <c:crossAx val="1749827295"/>
         <c:crosses val="autoZero"/>
         <c:crossBetween val="between"/>
       </c:valAx>
@@ -733,7 +734,7 @@
           </c:val>
           <c:extLst>
             <c:ext xmlns:c16="http://schemas.microsoft.com/office/drawing/2014/chart" uri="{C3380CC4-5D6E-409C-BE32-E72D297353CC}">
-              <c16:uniqueId val="{00000000-FD40-46AF-A587-1778E5E49BB0}"/>
+              <c16:uniqueId val="{00000000-990C-4F05-BABC-62D6F1C0B76E}"/>
             </c:ext>
           </c:extLst>
         </c:ser>
@@ -811,7 +812,7 @@
           </c:val>
           <c:extLst>
             <c:ext xmlns:c16="http://schemas.microsoft.com/office/drawing/2014/chart" uri="{C3380CC4-5D6E-409C-BE32-E72D297353CC}">
-              <c16:uniqueId val="{00000001-FD40-46AF-A587-1778E5E49BB0}"/>
+              <c16:uniqueId val="{00000001-990C-4F05-BABC-62D6F1C0B76E}"/>
             </c:ext>
           </c:extLst>
         </c:ser>
@@ -823,12 +824,12 @@
           <c:showPercent val="0"/>
           <c:showBubbleSize val="0"/>
         </c:dLbls>
-        <c:axId val="1296336864"/>
-        <c:axId val="1466064655"/>
+        <c:axId val="7266480"/>
+        <c:axId val="15032816"/>
         <c:axId val="0"/>
       </c:area3DChart>
       <c:dateAx>
-        <c:axId val="1296336864"/>
+        <c:axId val="7266480"/>
         <c:scaling>
           <c:orientation val="minMax"/>
         </c:scaling>
@@ -871,14 +872,14 @@
             <a:endParaRPr lang="de-DE"/>
           </a:p>
         </c:txPr>
-        <c:crossAx val="1466064655"/>
+        <c:crossAx val="15032816"/>
         <c:crosses val="autoZero"/>
         <c:auto val="1"/>
         <c:lblOffset val="100"/>
         <c:baseTimeUnit val="months"/>
       </c:dateAx>
       <c:valAx>
-        <c:axId val="1466064655"/>
+        <c:axId val="15032816"/>
         <c:scaling>
           <c:orientation val="minMax"/>
         </c:scaling>
@@ -929,7 +930,7 @@
             <a:endParaRPr lang="de-DE"/>
           </a:p>
         </c:txPr>
-        <c:crossAx val="1296336864"/>
+        <c:crossAx val="7266480"/>
         <c:crosses val="autoZero"/>
         <c:crossBetween val="midCat"/>
       </c:valAx>
@@ -1132,7 +1133,7 @@
           <c:smooth val="0"/>
           <c:extLst>
             <c:ext xmlns:c16="http://schemas.microsoft.com/office/drawing/2014/chart" uri="{C3380CC4-5D6E-409C-BE32-E72D297353CC}">
-              <c16:uniqueId val="{00000000-5B3D-42A7-8D18-61F27233B163}"/>
+              <c16:uniqueId val="{00000000-EF3B-4B1E-83A5-9DBD345710E1}"/>
             </c:ext>
           </c:extLst>
         </c:ser>
@@ -1204,7 +1205,7 @@
           <c:smooth val="0"/>
           <c:extLst>
             <c:ext xmlns:c16="http://schemas.microsoft.com/office/drawing/2014/chart" uri="{C3380CC4-5D6E-409C-BE32-E72D297353CC}">
-              <c16:uniqueId val="{00000001-5B3D-42A7-8D18-61F27233B163}"/>
+              <c16:uniqueId val="{00000001-EF3B-4B1E-83A5-9DBD345710E1}"/>
             </c:ext>
           </c:extLst>
         </c:ser>
@@ -1276,7 +1277,7 @@
           <c:smooth val="0"/>
           <c:extLst>
             <c:ext xmlns:c16="http://schemas.microsoft.com/office/drawing/2014/chart" uri="{C3380CC4-5D6E-409C-BE32-E72D297353CC}">
-              <c16:uniqueId val="{00000002-5B3D-42A7-8D18-61F27233B163}"/>
+              <c16:uniqueId val="{00000002-EF3B-4B1E-83A5-9DBD345710E1}"/>
             </c:ext>
           </c:extLst>
         </c:ser>
@@ -1288,12 +1289,12 @@
           <c:showPercent val="0"/>
           <c:showBubbleSize val="0"/>
         </c:dLbls>
-        <c:axId val="796764544"/>
-        <c:axId val="1466058895"/>
-        <c:axId val="1307043200"/>
+        <c:axId val="7275296"/>
+        <c:axId val="15041936"/>
+        <c:axId val="1182785264"/>
       </c:line3DChart>
       <c:catAx>
-        <c:axId val="796764544"/>
+        <c:axId val="7275296"/>
         <c:scaling>
           <c:orientation val="minMax"/>
         </c:scaling>
@@ -1336,7 +1337,7 @@
             <a:endParaRPr lang="de-DE"/>
           </a:p>
         </c:txPr>
-        <c:crossAx val="1466058895"/>
+        <c:crossAx val="15041936"/>
         <c:crosses val="autoZero"/>
         <c:auto val="1"/>
         <c:lblAlgn val="ctr"/>
@@ -1344,7 +1345,7 @@
         <c:noMultiLvlLbl val="0"/>
       </c:catAx>
       <c:valAx>
-        <c:axId val="1466058895"/>
+        <c:axId val="15041936"/>
         <c:scaling>
           <c:orientation val="minMax"/>
         </c:scaling>
@@ -1395,12 +1396,12 @@
             <a:endParaRPr lang="de-DE"/>
           </a:p>
         </c:txPr>
-        <c:crossAx val="796764544"/>
+        <c:crossAx val="7275296"/>
         <c:crosses val="autoZero"/>
         <c:crossBetween val="between"/>
       </c:valAx>
       <c:serAx>
-        <c:axId val="1307043200"/>
+        <c:axId val="1182785264"/>
         <c:scaling>
           <c:orientation val="minMax"/>
         </c:scaling>
@@ -1442,7 +1443,7 @@
             <a:endParaRPr lang="de-DE"/>
           </a:p>
         </c:txPr>
-        <c:crossAx val="1466058895"/>
+        <c:crossAx val="15041936"/>
         <c:crosses val="autoZero"/>
       </c:serAx>
       <c:spPr>
@@ -1640,7 +1641,7 @@
           </c:val>
           <c:extLst>
             <c:ext xmlns:c16="http://schemas.microsoft.com/office/drawing/2014/chart" uri="{C3380CC4-5D6E-409C-BE32-E72D297353CC}">
-              <c16:uniqueId val="{00000000-107D-4FFC-8309-464798BD04D2}"/>
+              <c16:uniqueId val="{00000000-E979-4463-9981-A35C781F6EAE}"/>
             </c:ext>
           </c:extLst>
         </c:ser>
@@ -1709,7 +1710,7 @@
           </c:val>
           <c:extLst>
             <c:ext xmlns:c16="http://schemas.microsoft.com/office/drawing/2014/chart" uri="{C3380CC4-5D6E-409C-BE32-E72D297353CC}">
-              <c16:uniqueId val="{00000001-107D-4FFC-8309-464798BD04D2}"/>
+              <c16:uniqueId val="{00000001-E979-4463-9981-A35C781F6EAE}"/>
             </c:ext>
           </c:extLst>
         </c:ser>
@@ -1778,7 +1779,7 @@
           </c:val>
           <c:extLst>
             <c:ext xmlns:c16="http://schemas.microsoft.com/office/drawing/2014/chart" uri="{C3380CC4-5D6E-409C-BE32-E72D297353CC}">
-              <c16:uniqueId val="{00000002-107D-4FFC-8309-464798BD04D2}"/>
+              <c16:uniqueId val="{00000002-E979-4463-9981-A35C781F6EAE}"/>
             </c:ext>
           </c:extLst>
         </c:ser>
@@ -1970,12 +1971,12 @@
             </c:spPr>
           </c:bandFmt>
         </c:bandFmts>
-        <c:axId val="796768256"/>
-        <c:axId val="1465956175"/>
-        <c:axId val="1307037040"/>
+        <c:axId val="7257520"/>
+        <c:axId val="15039056"/>
+        <c:axId val="1182780784"/>
       </c:surface3DChart>
       <c:catAx>
-        <c:axId val="796768256"/>
+        <c:axId val="7257520"/>
         <c:scaling>
           <c:orientation val="minMax"/>
         </c:scaling>
@@ -2018,7 +2019,7 @@
             <a:endParaRPr lang="de-DE"/>
           </a:p>
         </c:txPr>
-        <c:crossAx val="1465956175"/>
+        <c:crossAx val="15039056"/>
         <c:crosses val="autoZero"/>
         <c:auto val="1"/>
         <c:lblAlgn val="ctr"/>
@@ -2026,7 +2027,7 @@
         <c:noMultiLvlLbl val="0"/>
       </c:catAx>
       <c:valAx>
-        <c:axId val="1465956175"/>
+        <c:axId val="15039056"/>
         <c:scaling>
           <c:orientation val="minMax"/>
         </c:scaling>
@@ -2077,12 +2078,12 @@
             <a:endParaRPr lang="de-DE"/>
           </a:p>
         </c:txPr>
-        <c:crossAx val="796768256"/>
+        <c:crossAx val="7257520"/>
         <c:crosses val="autoZero"/>
         <c:crossBetween val="midCat"/>
       </c:valAx>
       <c:serAx>
-        <c:axId val="1307037040"/>
+        <c:axId val="1182780784"/>
         <c:scaling>
           <c:orientation val="minMax"/>
         </c:scaling>
@@ -2124,7 +2125,7 @@
             <a:endParaRPr lang="de-DE"/>
           </a:p>
         </c:txPr>
-        <c:crossAx val="1465956175"/>
+        <c:crossAx val="15039056"/>
         <c:crosses val="autoZero"/>
       </c:serAx>
       <c:spPr>
@@ -2323,7 +2324,7 @@
           </c:val>
           <c:extLst>
             <c:ext xmlns:c16="http://schemas.microsoft.com/office/drawing/2014/chart" uri="{C3380CC4-5D6E-409C-BE32-E72D297353CC}">
-              <c16:uniqueId val="{00000000-4B41-4D20-B41B-7B9A7CC8062D}"/>
+              <c16:uniqueId val="{00000000-69D2-4901-AD03-444C05B435A4}"/>
             </c:ext>
           </c:extLst>
         </c:ser>
@@ -2393,7 +2394,7 @@
           </c:val>
           <c:extLst>
             <c:ext xmlns:c16="http://schemas.microsoft.com/office/drawing/2014/chart" uri="{C3380CC4-5D6E-409C-BE32-E72D297353CC}">
-              <c16:uniqueId val="{00000001-4B41-4D20-B41B-7B9A7CC8062D}"/>
+              <c16:uniqueId val="{00000001-69D2-4901-AD03-444C05B435A4}"/>
             </c:ext>
           </c:extLst>
         </c:ser>
@@ -2463,7 +2464,7 @@
           </c:val>
           <c:extLst>
             <c:ext xmlns:c16="http://schemas.microsoft.com/office/drawing/2014/chart" uri="{C3380CC4-5D6E-409C-BE32-E72D297353CC}">
-              <c16:uniqueId val="{00000002-4B41-4D20-B41B-7B9A7CC8062D}"/>
+              <c16:uniqueId val="{00000002-69D2-4901-AD03-444C05B435A4}"/>
             </c:ext>
           </c:extLst>
         </c:ser>
@@ -2670,12 +2671,12 @@
             </c:spPr>
           </c:bandFmt>
         </c:bandFmts>
-        <c:axId val="796788208"/>
-        <c:axId val="1465962415"/>
-        <c:axId val="1307037600"/>
+        <c:axId val="34179232"/>
+        <c:axId val="15047696"/>
+        <c:axId val="1182784144"/>
       </c:surface3DChart>
       <c:catAx>
-        <c:axId val="796788208"/>
+        <c:axId val="34179232"/>
         <c:scaling>
           <c:orientation val="minMax"/>
         </c:scaling>
@@ -2718,7 +2719,7 @@
             <a:endParaRPr lang="de-DE"/>
           </a:p>
         </c:txPr>
-        <c:crossAx val="1465962415"/>
+        <c:crossAx val="15047696"/>
         <c:crosses val="autoZero"/>
         <c:auto val="1"/>
         <c:lblAlgn val="ctr"/>
@@ -2726,7 +2727,7 @@
         <c:noMultiLvlLbl val="0"/>
       </c:catAx>
       <c:valAx>
-        <c:axId val="1465962415"/>
+        <c:axId val="15047696"/>
         <c:scaling>
           <c:orientation val="minMax"/>
         </c:scaling>
@@ -2777,12 +2778,12 @@
             <a:endParaRPr lang="de-DE"/>
           </a:p>
         </c:txPr>
-        <c:crossAx val="796788208"/>
+        <c:crossAx val="34179232"/>
         <c:crosses val="autoZero"/>
         <c:crossBetween val="midCat"/>
       </c:valAx>
       <c:serAx>
-        <c:axId val="1307037600"/>
+        <c:axId val="1182784144"/>
         <c:scaling>
           <c:orientation val="minMax"/>
         </c:scaling>
@@ -2824,7 +2825,7 @@
             <a:endParaRPr lang="de-DE"/>
           </a:p>
         </c:txPr>
-        <c:crossAx val="1465962415"/>
+        <c:crossAx val="15047696"/>
         <c:crosses val="autoZero"/>
       </c:serAx>
       <c:spPr>
@@ -3028,7 +3029,7 @@
           </c:val>
           <c:extLst>
             <c:ext xmlns:c16="http://schemas.microsoft.com/office/drawing/2014/chart" uri="{C3380CC4-5D6E-409C-BE32-E72D297353CC}">
-              <c16:uniqueId val="{00000000-4134-42A0-9D4D-FBED65AC09B9}"/>
+              <c16:uniqueId val="{00000000-DD6B-4E39-9748-DDDACE093320}"/>
             </c:ext>
           </c:extLst>
         </c:ser>
@@ -3100,7 +3101,7 @@
           </c:val>
           <c:extLst>
             <c:ext xmlns:c16="http://schemas.microsoft.com/office/drawing/2014/chart" uri="{C3380CC4-5D6E-409C-BE32-E72D297353CC}">
-              <c16:uniqueId val="{00000001-4134-42A0-9D4D-FBED65AC09B9}"/>
+              <c16:uniqueId val="{00000001-DD6B-4E39-9748-DDDACE093320}"/>
             </c:ext>
           </c:extLst>
         </c:ser>
@@ -3172,7 +3173,7 @@
           </c:val>
           <c:extLst>
             <c:ext xmlns:c16="http://schemas.microsoft.com/office/drawing/2014/chart" uri="{C3380CC4-5D6E-409C-BE32-E72D297353CC}">
-              <c16:uniqueId val="{00000002-4134-42A0-9D4D-FBED65AC09B9}"/>
+              <c16:uniqueId val="{00000002-DD6B-4E39-9748-DDDACE093320}"/>
             </c:ext>
           </c:extLst>
         </c:ser>
@@ -3186,12 +3187,12 @@
         </c:dLbls>
         <c:gapWidth val="150"/>
         <c:shape val="cylinder"/>
-        <c:axId val="796786816"/>
-        <c:axId val="1465980175"/>
-        <c:axId val="1307046000"/>
+        <c:axId val="7246384"/>
+        <c:axId val="15048656"/>
+        <c:axId val="1182793104"/>
       </c:bar3DChart>
       <c:catAx>
-        <c:axId val="796786816"/>
+        <c:axId val="7246384"/>
         <c:scaling>
           <c:orientation val="minMax"/>
         </c:scaling>
@@ -3228,7 +3229,7 @@
             <a:endParaRPr lang="de-DE"/>
           </a:p>
         </c:txPr>
-        <c:crossAx val="1465980175"/>
+        <c:crossAx val="15048656"/>
         <c:crosses val="autoZero"/>
         <c:auto val="1"/>
         <c:lblAlgn val="ctr"/>
@@ -3236,7 +3237,7 @@
         <c:noMultiLvlLbl val="0"/>
       </c:catAx>
       <c:valAx>
-        <c:axId val="1465980175"/>
+        <c:axId val="15048656"/>
         <c:scaling>
           <c:orientation val="minMax"/>
         </c:scaling>
@@ -3287,12 +3288,12 @@
             <a:endParaRPr lang="de-DE"/>
           </a:p>
         </c:txPr>
-        <c:crossAx val="796786816"/>
+        <c:crossAx val="7246384"/>
         <c:crosses val="autoZero"/>
         <c:crossBetween val="between"/>
       </c:valAx>
       <c:serAx>
-        <c:axId val="1307046000"/>
+        <c:axId val="1182793104"/>
         <c:scaling>
           <c:orientation val="minMax"/>
         </c:scaling>
@@ -3328,7 +3329,7 @@
             <a:endParaRPr lang="de-DE"/>
           </a:p>
         </c:txPr>
-        <c:crossAx val="1465980175"/>
+        <c:crossAx val="15048656"/>
         <c:crosses val="autoZero"/>
       </c:serAx>
       <c:spPr>
@@ -3532,7 +3533,7 @@
           </c:val>
           <c:extLst>
             <c:ext xmlns:c16="http://schemas.microsoft.com/office/drawing/2014/chart" uri="{C3380CC4-5D6E-409C-BE32-E72D297353CC}">
-              <c16:uniqueId val="{00000000-2ED6-43EF-A87B-F5A3D68125FB}"/>
+              <c16:uniqueId val="{00000000-5F3D-4679-9628-40DBF17F2267}"/>
             </c:ext>
           </c:extLst>
         </c:ser>
@@ -3604,7 +3605,7 @@
           </c:val>
           <c:extLst>
             <c:ext xmlns:c16="http://schemas.microsoft.com/office/drawing/2014/chart" uri="{C3380CC4-5D6E-409C-BE32-E72D297353CC}">
-              <c16:uniqueId val="{00000001-2ED6-43EF-A87B-F5A3D68125FB}"/>
+              <c16:uniqueId val="{00000001-5F3D-4679-9628-40DBF17F2267}"/>
             </c:ext>
           </c:extLst>
         </c:ser>
@@ -3676,7 +3677,7 @@
           </c:val>
           <c:extLst>
             <c:ext xmlns:c16="http://schemas.microsoft.com/office/drawing/2014/chart" uri="{C3380CC4-5D6E-409C-BE32-E72D297353CC}">
-              <c16:uniqueId val="{00000002-2ED6-43EF-A87B-F5A3D68125FB}"/>
+              <c16:uniqueId val="{00000002-5F3D-4679-9628-40DBF17F2267}"/>
             </c:ext>
           </c:extLst>
         </c:ser>
@@ -3690,12 +3691,12 @@
         </c:dLbls>
         <c:gapWidth val="150"/>
         <c:shape val="cone"/>
-        <c:axId val="796777536"/>
-        <c:axId val="1465976815"/>
-        <c:axId val="1307040400"/>
+        <c:axId val="7250560"/>
+        <c:axId val="15050096"/>
+        <c:axId val="1182789184"/>
       </c:bar3DChart>
       <c:catAx>
-        <c:axId val="796777536"/>
+        <c:axId val="7250560"/>
         <c:scaling>
           <c:orientation val="minMax"/>
         </c:scaling>
@@ -3732,7 +3733,7 @@
             <a:endParaRPr lang="de-DE"/>
           </a:p>
         </c:txPr>
-        <c:crossAx val="1465976815"/>
+        <c:crossAx val="15050096"/>
         <c:crosses val="autoZero"/>
         <c:auto val="1"/>
         <c:lblAlgn val="ctr"/>
@@ -3740,7 +3741,7 @@
         <c:noMultiLvlLbl val="0"/>
       </c:catAx>
       <c:valAx>
-        <c:axId val="1465976815"/>
+        <c:axId val="15050096"/>
         <c:scaling>
           <c:orientation val="minMax"/>
         </c:scaling>
@@ -3791,12 +3792,12 @@
             <a:endParaRPr lang="de-DE"/>
           </a:p>
         </c:txPr>
-        <c:crossAx val="796777536"/>
+        <c:crossAx val="7250560"/>
         <c:crosses val="autoZero"/>
         <c:crossBetween val="between"/>
       </c:valAx>
       <c:serAx>
-        <c:axId val="1307040400"/>
+        <c:axId val="1182789184"/>
         <c:scaling>
           <c:orientation val="minMax"/>
         </c:scaling>
@@ -3832,7 +3833,7 @@
             <a:endParaRPr lang="de-DE"/>
           </a:p>
         </c:txPr>
-        <c:crossAx val="1465976815"/>
+        <c:crossAx val="15050096"/>
         <c:crosses val="autoZero"/>
       </c:serAx>
       <c:spPr>
@@ -4036,7 +4037,7 @@
           </c:val>
           <c:extLst>
             <c:ext xmlns:c16="http://schemas.microsoft.com/office/drawing/2014/chart" uri="{C3380CC4-5D6E-409C-BE32-E72D297353CC}">
-              <c16:uniqueId val="{00000000-4377-42BF-8E5A-2299A4B40DFF}"/>
+              <c16:uniqueId val="{00000000-F64E-4A87-8C74-7728D6553501}"/>
             </c:ext>
           </c:extLst>
         </c:ser>
@@ -4108,7 +4109,7 @@
           </c:val>
           <c:extLst>
             <c:ext xmlns:c16="http://schemas.microsoft.com/office/drawing/2014/chart" uri="{C3380CC4-5D6E-409C-BE32-E72D297353CC}">
-              <c16:uniqueId val="{00000001-4377-42BF-8E5A-2299A4B40DFF}"/>
+              <c16:uniqueId val="{00000001-F64E-4A87-8C74-7728D6553501}"/>
             </c:ext>
           </c:extLst>
         </c:ser>
@@ -4180,7 +4181,7 @@
           </c:val>
           <c:extLst>
             <c:ext xmlns:c16="http://schemas.microsoft.com/office/drawing/2014/chart" uri="{C3380CC4-5D6E-409C-BE32-E72D297353CC}">
-              <c16:uniqueId val="{00000002-4377-42BF-8E5A-2299A4B40DFF}"/>
+              <c16:uniqueId val="{00000002-F64E-4A87-8C74-7728D6553501}"/>
             </c:ext>
           </c:extLst>
         </c:ser>
@@ -4194,12 +4195,12 @@
         </c:dLbls>
         <c:gapWidth val="150"/>
         <c:shape val="pyramid"/>
-        <c:axId val="796793776"/>
-        <c:axId val="1465978255"/>
-        <c:axId val="1014991888"/>
+        <c:axId val="34174592"/>
+        <c:axId val="15057776"/>
+        <c:axId val="1182781344"/>
       </c:bar3DChart>
       <c:catAx>
-        <c:axId val="796793776"/>
+        <c:axId val="34174592"/>
         <c:scaling>
           <c:orientation val="minMax"/>
         </c:scaling>
@@ -4236,7 +4237,7 @@
             <a:endParaRPr lang="de-DE"/>
           </a:p>
         </c:txPr>
-        <c:crossAx val="1465978255"/>
+        <c:crossAx val="15057776"/>
         <c:crosses val="autoZero"/>
         <c:auto val="1"/>
         <c:lblAlgn val="ctr"/>
@@ -4244,7 +4245,7 @@
         <c:noMultiLvlLbl val="0"/>
       </c:catAx>
       <c:valAx>
-        <c:axId val="1465978255"/>
+        <c:axId val="15057776"/>
         <c:scaling>
           <c:orientation val="minMax"/>
         </c:scaling>
@@ -4295,12 +4296,12 @@
             <a:endParaRPr lang="de-DE"/>
           </a:p>
         </c:txPr>
-        <c:crossAx val="796793776"/>
+        <c:crossAx val="34174592"/>
         <c:crosses val="autoZero"/>
         <c:crossBetween val="between"/>
       </c:valAx>
       <c:serAx>
-        <c:axId val="1014991888"/>
+        <c:axId val="1182781344"/>
         <c:scaling>
           <c:orientation val="minMax"/>
         </c:scaling>
@@ -4336,7 +4337,7 @@
             <a:endParaRPr lang="de-DE"/>
           </a:p>
         </c:txPr>
-        <c:crossAx val="1465978255"/>
+        <c:crossAx val="15057776"/>
         <c:crosses val="autoZero"/>
       </c:serAx>
       <c:spPr>
@@ -4541,7 +4542,7 @@
           </c:val>
           <c:extLst>
             <c:ext xmlns:c16="http://schemas.microsoft.com/office/drawing/2014/chart" uri="{C3380CC4-5D6E-409C-BE32-E72D297353CC}">
-              <c16:uniqueId val="{00000000-F1FC-44C9-9EC9-56229E90868A}"/>
+              <c16:uniqueId val="{00000000-87F4-4D22-9663-14E2B86B7DD0}"/>
             </c:ext>
           </c:extLst>
         </c:ser>
@@ -4613,7 +4614,7 @@
           </c:val>
           <c:extLst>
             <c:ext xmlns:c16="http://schemas.microsoft.com/office/drawing/2014/chart" uri="{C3380CC4-5D6E-409C-BE32-E72D297353CC}">
-              <c16:uniqueId val="{00000001-F1FC-44C9-9EC9-56229E90868A}"/>
+              <c16:uniqueId val="{00000001-87F4-4D22-9663-14E2B86B7DD0}"/>
             </c:ext>
           </c:extLst>
         </c:ser>
@@ -4685,7 +4686,7 @@
           </c:val>
           <c:extLst>
             <c:ext xmlns:c16="http://schemas.microsoft.com/office/drawing/2014/chart" uri="{C3380CC4-5D6E-409C-BE32-E72D297353CC}">
-              <c16:uniqueId val="{00000002-F1FC-44C9-9EC9-56229E90868A}"/>
+              <c16:uniqueId val="{00000002-87F4-4D22-9663-14E2B86B7DD0}"/>
             </c:ext>
           </c:extLst>
         </c:ser>
@@ -4699,12 +4700,12 @@
         </c:dLbls>
         <c:gapWidth val="150"/>
         <c:shape val="box"/>
-        <c:axId val="1467941903"/>
-        <c:axId val="1465984495"/>
+        <c:axId val="34180624"/>
+        <c:axId val="15055376"/>
         <c:axId val="0"/>
       </c:bar3DChart>
       <c:catAx>
-        <c:axId val="1467941903"/>
+        <c:axId val="34180624"/>
         <c:scaling>
           <c:orientation val="minMax"/>
         </c:scaling>
@@ -4741,7 +4742,7 @@
             <a:endParaRPr lang="de-DE"/>
           </a:p>
         </c:txPr>
-        <c:crossAx val="1465984495"/>
+        <c:crossAx val="15055376"/>
         <c:crosses val="autoZero"/>
         <c:auto val="1"/>
         <c:lblAlgn val="ctr"/>
@@ -4749,7 +4750,7 @@
         <c:noMultiLvlLbl val="0"/>
       </c:catAx>
       <c:valAx>
-        <c:axId val="1465984495"/>
+        <c:axId val="15055376"/>
         <c:scaling>
           <c:orientation val="minMax"/>
         </c:scaling>
@@ -4800,7 +4801,7 @@
             <a:endParaRPr lang="de-DE"/>
           </a:p>
         </c:txPr>
-        <c:crossAx val="1467941903"/>
+        <c:crossAx val="34180624"/>
         <c:crosses val="autoZero"/>
         <c:crossBetween val="between"/>
       </c:valAx>
@@ -5005,7 +5006,7 @@
           </c:val>
           <c:extLst>
             <c:ext xmlns:c16="http://schemas.microsoft.com/office/drawing/2014/chart" uri="{C3380CC4-5D6E-409C-BE32-E72D297353CC}">
-              <c16:uniqueId val="{00000000-BA78-4352-8092-B394C6B8523E}"/>
+              <c16:uniqueId val="{00000000-96A3-467C-B047-70C040E38BB8}"/>
             </c:ext>
           </c:extLst>
         </c:ser>
@@ -5077,7 +5078,7 @@
           </c:val>
           <c:extLst>
             <c:ext xmlns:c16="http://schemas.microsoft.com/office/drawing/2014/chart" uri="{C3380CC4-5D6E-409C-BE32-E72D297353CC}">
-              <c16:uniqueId val="{00000001-BA78-4352-8092-B394C6B8523E}"/>
+              <c16:uniqueId val="{00000001-96A3-467C-B047-70C040E38BB8}"/>
             </c:ext>
           </c:extLst>
         </c:ser>
@@ -5149,7 +5150,7 @@
           </c:val>
           <c:extLst>
             <c:ext xmlns:c16="http://schemas.microsoft.com/office/drawing/2014/chart" uri="{C3380CC4-5D6E-409C-BE32-E72D297353CC}">
-              <c16:uniqueId val="{00000002-BA78-4352-8092-B394C6B8523E}"/>
+              <c16:uniqueId val="{00000002-96A3-467C-B047-70C040E38BB8}"/>
             </c:ext>
           </c:extLst>
         </c:ser>
@@ -5163,12 +5164,12 @@
         </c:dLbls>
         <c:gapWidth val="150"/>
         <c:shape val="box"/>
-        <c:axId val="1467946543"/>
-        <c:axId val="1466024815"/>
-        <c:axId val="1473190927"/>
+        <c:axId val="34186656"/>
+        <c:axId val="15049136"/>
+        <c:axId val="1182792544"/>
       </c:bar3DChart>
       <c:catAx>
-        <c:axId val="1467946543"/>
+        <c:axId val="34186656"/>
         <c:scaling>
           <c:orientation val="minMax"/>
         </c:scaling>
@@ -5205,7 +5206,7 @@
             <a:endParaRPr lang="de-DE"/>
           </a:p>
         </c:txPr>
-        <c:crossAx val="1466024815"/>
+        <c:crossAx val="15049136"/>
         <c:crosses val="autoZero"/>
         <c:auto val="1"/>
         <c:lblAlgn val="ctr"/>
@@ -5213,7 +5214,7 @@
         <c:noMultiLvlLbl val="0"/>
       </c:catAx>
       <c:valAx>
-        <c:axId val="1466024815"/>
+        <c:axId val="15049136"/>
         <c:scaling>
           <c:orientation val="minMax"/>
         </c:scaling>
@@ -5264,12 +5265,12 @@
             <a:endParaRPr lang="de-DE"/>
           </a:p>
         </c:txPr>
-        <c:crossAx val="1467946543"/>
+        <c:crossAx val="34186656"/>
         <c:crosses val="autoZero"/>
         <c:crossBetween val="between"/>
       </c:valAx>
       <c:serAx>
-        <c:axId val="1473190927"/>
+        <c:axId val="1182792544"/>
         <c:scaling>
           <c:orientation val="minMax"/>
         </c:scaling>
@@ -5305,7 +5306,7 @@
             <a:endParaRPr lang="de-DE"/>
           </a:p>
         </c:txPr>
-        <c:crossAx val="1466024815"/>
+        <c:crossAx val="15049136"/>
         <c:crosses val="autoZero"/>
       </c:serAx>
       <c:spPr>
@@ -5576,7 +5577,7 @@
           </c:val>
           <c:extLst>
             <c:ext xmlns:c16="http://schemas.microsoft.com/office/drawing/2014/chart" uri="{C3380CC4-5D6E-409C-BE32-E72D297353CC}">
-              <c16:uniqueId val="{00000000-02DA-4659-82B4-3FE583372D53}"/>
+              <c16:uniqueId val="{00000000-B02D-4C99-AF94-54FB4D97CEB6}"/>
             </c:ext>
           </c:extLst>
         </c:ser>
@@ -5791,7 +5792,7 @@
           </c:val>
           <c:extLst>
             <c:ext xmlns:c16="http://schemas.microsoft.com/office/drawing/2014/chart" uri="{C3380CC4-5D6E-409C-BE32-E72D297353CC}">
-              <c16:uniqueId val="{00000000-F078-4C9B-9B68-D47425EA5238}"/>
+              <c16:uniqueId val="{00000000-B2D9-44EC-84E1-F5D440F08E73}"/>
             </c:ext>
           </c:extLst>
         </c:ser>
@@ -5863,7 +5864,7 @@
           </c:val>
           <c:extLst>
             <c:ext xmlns:c16="http://schemas.microsoft.com/office/drawing/2014/chart" uri="{C3380CC4-5D6E-409C-BE32-E72D297353CC}">
-              <c16:uniqueId val="{00000001-F078-4C9B-9B68-D47425EA5238}"/>
+              <c16:uniqueId val="{00000001-B2D9-44EC-84E1-F5D440F08E73}"/>
             </c:ext>
           </c:extLst>
         </c:ser>
@@ -5935,7 +5936,7 @@
           </c:val>
           <c:extLst>
             <c:ext xmlns:c16="http://schemas.microsoft.com/office/drawing/2014/chart" uri="{C3380CC4-5D6E-409C-BE32-E72D297353CC}">
-              <c16:uniqueId val="{00000002-F078-4C9B-9B68-D47425EA5238}"/>
+              <c16:uniqueId val="{00000002-B2D9-44EC-84E1-F5D440F08E73}"/>
             </c:ext>
           </c:extLst>
         </c:ser>
@@ -5949,12 +5950,12 @@
         </c:dLbls>
         <c:gapWidth val="150"/>
         <c:shape val="box"/>
-        <c:axId val="1471695327"/>
-        <c:axId val="1465950415"/>
+        <c:axId val="37744800"/>
+        <c:axId val="15005936"/>
         <c:axId val="0"/>
       </c:bar3DChart>
       <c:catAx>
-        <c:axId val="1471695327"/>
+        <c:axId val="37744800"/>
         <c:scaling>
           <c:orientation val="minMax"/>
         </c:scaling>
@@ -5991,7 +5992,7 @@
             <a:endParaRPr lang="de-DE"/>
           </a:p>
         </c:txPr>
-        <c:crossAx val="1465950415"/>
+        <c:crossAx val="15005936"/>
         <c:crosses val="autoZero"/>
         <c:auto val="1"/>
         <c:lblAlgn val="ctr"/>
@@ -5999,7 +6000,7 @@
         <c:noMultiLvlLbl val="0"/>
       </c:catAx>
       <c:valAx>
-        <c:axId val="1465950415"/>
+        <c:axId val="15005936"/>
         <c:scaling>
           <c:orientation val="minMax"/>
         </c:scaling>
@@ -6050,7 +6051,7 @@
             <a:endParaRPr lang="de-DE"/>
           </a:p>
         </c:txPr>
-        <c:crossAx val="1471695327"/>
+        <c:crossAx val="37744800"/>
         <c:crosses val="autoZero"/>
         <c:crossBetween val="between"/>
       </c:valAx>
@@ -6095,6 +6096,2192 @@
     </c:legend>
     <c:plotVisOnly val="1"/>
     <c:dispBlanksAs val="gap"/>
+    <c:showDLblsOverMax val="0"/>
+    <c:extLst>
+      <c:ext xmlns:c16r3="http://schemas.microsoft.com/office/drawing/2017/03/chart" uri="{56B9EC1D-385E-4148-901F-78D8002777C0}">
+        <c16r3:dataDisplayOptions16>
+          <c16r3:dispNaAsBlank val="1"/>
+        </c16r3:dataDisplayOptions16>
+      </c:ext>
+    </c:extLst>
+  </c:chart>
+  <c:spPr>
+    <a:noFill/>
+    <a:ln>
+      <a:noFill/>
+    </a:ln>
+    <a:effectLst/>
+  </c:spPr>
+  <c:txPr>
+    <a:bodyPr/>
+    <a:lstStyle/>
+    <a:p>
+      <a:pPr>
+        <a:defRPr/>
+      </a:pPr>
+      <a:endParaRPr lang="de-DE"/>
+    </a:p>
+  </c:txPr>
+  <c:externalData r:id="rId3">
+    <c:autoUpdate val="0"/>
+  </c:externalData>
+</c:chartSpace>
+</file>
+
+<file path=ppt/charts/chart20.xml><?xml version="1.0" encoding="utf-8"?>
+<c:chartSpace xmlns:c="http://schemas.openxmlformats.org/drawingml/2006/chart" xmlns:a="http://schemas.openxmlformats.org/drawingml/2006/main" xmlns:r="http://schemas.openxmlformats.org/officeDocument/2006/relationships" xmlns:c16r2="http://schemas.microsoft.com/office/drawing/2015/06/chart">
+  <c:date1904 val="0"/>
+  <c:lang val="de-DE"/>
+  <c:roundedCorners val="0"/>
+  <mc:AlternateContent xmlns:mc="http://schemas.openxmlformats.org/markup-compatibility/2006">
+    <mc:Choice xmlns:c14="http://schemas.microsoft.com/office/drawing/2007/8/2/chart" Requires="c14">
+      <c14:style val="102"/>
+    </mc:Choice>
+    <mc:Fallback>
+      <c:style val="2"/>
+    </mc:Fallback>
+  </mc:AlternateContent>
+  <c:chart>
+    <c:autoTitleDeleted val="0"/>
+    <c:view3D>
+      <c:rotX val="30"/>
+      <c:rotY val="0"/>
+      <c:depthPercent val="100"/>
+      <c:rAngAx val="0"/>
+    </c:view3D>
+    <c:floor>
+      <c:thickness val="0"/>
+      <c:spPr>
+        <a:noFill/>
+        <a:ln>
+          <a:noFill/>
+        </a:ln>
+        <a:effectLst/>
+        <a:sp3d/>
+      </c:spPr>
+    </c:floor>
+    <c:sideWall>
+      <c:thickness val="0"/>
+      <c:spPr>
+        <a:noFill/>
+        <a:ln>
+          <a:noFill/>
+        </a:ln>
+        <a:effectLst/>
+        <a:sp3d/>
+      </c:spPr>
+    </c:sideWall>
+    <c:backWall>
+      <c:thickness val="0"/>
+      <c:spPr>
+        <a:noFill/>
+        <a:ln>
+          <a:noFill/>
+        </a:ln>
+        <a:effectLst/>
+        <a:sp3d/>
+      </c:spPr>
+    </c:backWall>
+    <c:plotArea>
+      <c:layout/>
+      <c:pie3DChart>
+        <c:varyColors val="1"/>
+        <c:ser>
+          <c:idx val="0"/>
+          <c:order val="0"/>
+          <c:tx>
+            <c:strRef>
+              <c:f>Tabelle1!$B$1</c:f>
+              <c:strCache>
+                <c:ptCount val="1"/>
+                <c:pt idx="0">
+                  <c:v>Verkauf</c:v>
+                </c:pt>
+              </c:strCache>
+            </c:strRef>
+          </c:tx>
+          <c:dPt>
+            <c:idx val="0"/>
+            <c:bubble3D val="0"/>
+            <c:spPr>
+              <a:solidFill>
+                <a:schemeClr val="accent1"/>
+              </a:solidFill>
+              <a:ln w="25400">
+                <a:solidFill>
+                  <a:schemeClr val="lt1"/>
+                </a:solidFill>
+              </a:ln>
+              <a:effectLst/>
+              <a:sp3d contourW="25400">
+                <a:contourClr>
+                  <a:schemeClr val="lt1"/>
+                </a:contourClr>
+              </a:sp3d>
+            </c:spPr>
+          </c:dPt>
+          <c:dPt>
+            <c:idx val="1"/>
+            <c:bubble3D val="0"/>
+            <c:spPr>
+              <a:solidFill>
+                <a:schemeClr val="accent2"/>
+              </a:solidFill>
+              <a:ln w="25400">
+                <a:solidFill>
+                  <a:schemeClr val="lt1"/>
+                </a:solidFill>
+              </a:ln>
+              <a:effectLst/>
+              <a:sp3d contourW="25400">
+                <a:contourClr>
+                  <a:schemeClr val="lt1"/>
+                </a:contourClr>
+              </a:sp3d>
+            </c:spPr>
+          </c:dPt>
+          <c:dPt>
+            <c:idx val="2"/>
+            <c:bubble3D val="0"/>
+            <c:spPr>
+              <a:solidFill>
+                <a:schemeClr val="accent3"/>
+              </a:solidFill>
+              <a:ln w="25400">
+                <a:solidFill>
+                  <a:schemeClr val="lt1"/>
+                </a:solidFill>
+              </a:ln>
+              <a:effectLst/>
+              <a:sp3d contourW="25400">
+                <a:contourClr>
+                  <a:schemeClr val="lt1"/>
+                </a:contourClr>
+              </a:sp3d>
+            </c:spPr>
+          </c:dPt>
+          <c:dPt>
+            <c:idx val="3"/>
+            <c:bubble3D val="0"/>
+            <c:spPr>
+              <a:solidFill>
+                <a:schemeClr val="accent4"/>
+              </a:solidFill>
+              <a:ln w="25400">
+                <a:solidFill>
+                  <a:schemeClr val="lt1"/>
+                </a:solidFill>
+              </a:ln>
+              <a:effectLst/>
+              <a:sp3d contourW="25400">
+                <a:contourClr>
+                  <a:schemeClr val="lt1"/>
+                </a:contourClr>
+              </a:sp3d>
+            </c:spPr>
+          </c:dPt>
+          <c:dLbls>
+            <c:spPr>
+              <a:noFill/>
+              <a:ln>
+                <a:noFill/>
+              </a:ln>
+              <a:effectLst/>
+            </c:spPr>
+            <c:txPr>
+              <a:bodyPr rot="0" spcFirstLastPara="1" vertOverflow="ellipsis" vert="horz" wrap="square" lIns="38100" tIns="19050" rIns="38100" bIns="19050" anchor="ctr" anchorCtr="1">
+                <a:spAutoFit/>
+              </a:bodyPr>
+              <a:lstStyle/>
+              <a:p>
+                <a:pPr>
+                  <a:defRPr sz="1197" b="0" i="0" u="none" strike="noStrike" kern="1200" baseline="0">
+                    <a:solidFill>
+                      <a:schemeClr val="tx1">
+                        <a:lumMod val="75000"/>
+                        <a:lumOff val="25000"/>
+                      </a:schemeClr>
+                    </a:solidFill>
+                    <a:latin typeface="+mn-lt"/>
+                    <a:ea typeface="+mn-ea"/>
+                    <a:cs typeface="+mn-cs"/>
+                  </a:defRPr>
+                </a:pPr>
+                <a:endParaRPr lang="de-DE"/>
+              </a:p>
+            </c:txPr>
+            <c:showLegendKey val="0"/>
+            <c:showVal val="1"/>
+            <c:showCatName val="0"/>
+            <c:showSerName val="0"/>
+            <c:showPercent val="0"/>
+            <c:showBubbleSize val="0"/>
+            <c:showLeaderLines val="1"/>
+            <c:leaderLines>
+              <c:spPr>
+                <a:ln w="9525" cap="flat" cmpd="sng" algn="ctr">
+                  <a:solidFill>
+                    <a:schemeClr val="tx1">
+                      <a:lumMod val="35000"/>
+                      <a:lumOff val="65000"/>
+                    </a:schemeClr>
+                  </a:solidFill>
+                  <a:round/>
+                </a:ln>
+                <a:effectLst/>
+              </c:spPr>
+            </c:leaderLines>
+            <c:extLst>
+              <c:ext xmlns:c15="http://schemas.microsoft.com/office/drawing/2012/chart" uri="{CE6537A1-D6FC-4f65-9D91-7224C49458BB}"/>
+            </c:extLst>
+          </c:dLbls>
+          <c:cat>
+            <c:strRef>
+              <c:f>Tabelle1!$A$2:$A$5</c:f>
+              <c:strCache>
+                <c:ptCount val="4"/>
+                <c:pt idx="0">
+                  <c:v>1. Quartal</c:v>
+                </c:pt>
+                <c:pt idx="1">
+                  <c:v>2. Quartal</c:v>
+                </c:pt>
+                <c:pt idx="2">
+                  <c:v>3. Quartal</c:v>
+                </c:pt>
+                <c:pt idx="3">
+                  <c:v>4. Quartal</c:v>
+                </c:pt>
+              </c:strCache>
+            </c:strRef>
+          </c:cat>
+          <c:val>
+            <c:numRef>
+              <c:f>Tabelle1!$B$2:$B$5</c:f>
+              <c:numCache>
+                <c:formatCode>General</c:formatCode>
+                <c:ptCount val="4"/>
+                <c:pt idx="0">
+                  <c:v>8.1999999999999993</c:v>
+                </c:pt>
+                <c:pt idx="1">
+                  <c:v>3.2</c:v>
+                </c:pt>
+                <c:pt idx="2">
+                  <c:v>1.4</c:v>
+                </c:pt>
+                <c:pt idx="3">
+                  <c:v>1.2</c:v>
+                </c:pt>
+              </c:numCache>
+            </c:numRef>
+          </c:val>
+          <c:extLst>
+            <c:ext xmlns:c16="http://schemas.microsoft.com/office/drawing/2014/chart" uri="{C3380CC4-5D6E-409C-BE32-E72D297353CC}">
+              <c16:uniqueId val="{00000000-69B8-4EC7-80FD-F4F24B446442}"/>
+            </c:ext>
+          </c:extLst>
+        </c:ser>
+        <c:dLbls>
+          <c:showLegendKey val="0"/>
+          <c:showVal val="0"/>
+          <c:showCatName val="0"/>
+          <c:showSerName val="0"/>
+          <c:showPercent val="0"/>
+          <c:showBubbleSize val="0"/>
+          <c:showLeaderLines val="1"/>
+        </c:dLbls>
+      </c:pie3DChart>
+      <c:spPr>
+        <a:noFill/>
+        <a:ln>
+          <a:noFill/>
+        </a:ln>
+        <a:effectLst/>
+      </c:spPr>
+    </c:plotArea>
+    <c:legend>
+      <c:legendPos val="b"/>
+      <c:overlay val="0"/>
+      <c:spPr>
+        <a:noFill/>
+        <a:ln>
+          <a:noFill/>
+        </a:ln>
+        <a:effectLst/>
+      </c:spPr>
+      <c:txPr>
+        <a:bodyPr rot="0" spcFirstLastPara="1" vertOverflow="ellipsis" vert="horz" wrap="square" anchor="ctr" anchorCtr="1"/>
+        <a:lstStyle/>
+        <a:p>
+          <a:pPr>
+            <a:defRPr sz="1197" b="0" i="0" u="none" strike="noStrike" kern="1200" baseline="0">
+              <a:solidFill>
+                <a:schemeClr val="tx1">
+                  <a:lumMod val="65000"/>
+                  <a:lumOff val="35000"/>
+                </a:schemeClr>
+              </a:solidFill>
+              <a:latin typeface="+mn-lt"/>
+              <a:ea typeface="+mn-ea"/>
+              <a:cs typeface="+mn-cs"/>
+            </a:defRPr>
+          </a:pPr>
+          <a:endParaRPr lang="de-DE"/>
+        </a:p>
+      </c:txPr>
+    </c:legend>
+    <c:plotVisOnly val="1"/>
+    <c:dispBlanksAs val="gap"/>
+    <c:showDLblsOverMax val="0"/>
+    <c:extLst>
+      <c:ext xmlns:c16r3="http://schemas.microsoft.com/office/drawing/2017/03/chart" uri="{56B9EC1D-385E-4148-901F-78D8002777C0}">
+        <c16r3:dataDisplayOptions16>
+          <c16r3:dispNaAsBlank val="1"/>
+        </c16r3:dataDisplayOptions16>
+      </c:ext>
+    </c:extLst>
+  </c:chart>
+  <c:spPr>
+    <a:noFill/>
+    <a:ln>
+      <a:noFill/>
+    </a:ln>
+    <a:effectLst/>
+  </c:spPr>
+  <c:txPr>
+    <a:bodyPr/>
+    <a:lstStyle/>
+    <a:p>
+      <a:pPr>
+        <a:defRPr/>
+      </a:pPr>
+      <a:endParaRPr lang="de-DE"/>
+    </a:p>
+  </c:txPr>
+  <c:externalData r:id="rId3">
+    <c:autoUpdate val="0"/>
+  </c:externalData>
+</c:chartSpace>
+</file>
+
+<file path=ppt/charts/chart21.xml><?xml version="1.0" encoding="utf-8"?>
+<c:chartSpace xmlns:c="http://schemas.openxmlformats.org/drawingml/2006/chart" xmlns:a="http://schemas.openxmlformats.org/drawingml/2006/main" xmlns:r="http://schemas.openxmlformats.org/officeDocument/2006/relationships" xmlns:c16r2="http://schemas.microsoft.com/office/drawing/2015/06/chart">
+  <c:date1904 val="0"/>
+  <c:lang val="de-DE"/>
+  <c:roundedCorners val="0"/>
+  <mc:AlternateContent xmlns:mc="http://schemas.openxmlformats.org/markup-compatibility/2006">
+    <mc:Choice xmlns:c14="http://schemas.microsoft.com/office/drawing/2007/8/2/chart" Requires="c14">
+      <c14:style val="102"/>
+    </mc:Choice>
+    <mc:Fallback>
+      <c:style val="2"/>
+    </mc:Fallback>
+  </mc:AlternateContent>
+  <c:chart>
+    <c:autoTitleDeleted val="0"/>
+    <c:view3D>
+      <c:rotX val="15"/>
+      <c:rotY val="20"/>
+      <c:depthPercent val="100"/>
+      <c:rAngAx val="1"/>
+    </c:view3D>
+    <c:floor>
+      <c:thickness val="0"/>
+      <c:spPr>
+        <a:noFill/>
+        <a:ln>
+          <a:noFill/>
+        </a:ln>
+        <a:effectLst/>
+        <a:sp3d/>
+      </c:spPr>
+    </c:floor>
+    <c:sideWall>
+      <c:thickness val="0"/>
+      <c:spPr>
+        <a:noFill/>
+        <a:ln>
+          <a:noFill/>
+        </a:ln>
+        <a:effectLst/>
+        <a:sp3d/>
+      </c:spPr>
+    </c:sideWall>
+    <c:backWall>
+      <c:thickness val="0"/>
+      <c:spPr>
+        <a:noFill/>
+        <a:ln>
+          <a:noFill/>
+        </a:ln>
+        <a:effectLst/>
+        <a:sp3d/>
+      </c:spPr>
+    </c:backWall>
+    <c:plotArea>
+      <c:layout/>
+      <c:bar3DChart>
+        <c:barDir val="col"/>
+        <c:grouping val="clustered"/>
+        <c:varyColors val="0"/>
+        <c:ser>
+          <c:idx val="0"/>
+          <c:order val="0"/>
+          <c:tx>
+            <c:strRef>
+              <c:f>Tabelle1!$B$1</c:f>
+              <c:strCache>
+                <c:ptCount val="1"/>
+                <c:pt idx="0">
+                  <c:v>Datenreihe 1</c:v>
+                </c:pt>
+              </c:strCache>
+            </c:strRef>
+          </c:tx>
+          <c:spPr>
+            <a:solidFill>
+              <a:schemeClr val="accent1"/>
+            </a:solidFill>
+            <a:ln>
+              <a:noFill/>
+            </a:ln>
+            <a:effectLst/>
+            <a:sp3d/>
+          </c:spPr>
+          <c:invertIfNegative val="0"/>
+          <c:dLbls>
+            <c:spPr>
+              <a:noFill/>
+              <a:ln>
+                <a:noFill/>
+              </a:ln>
+              <a:effectLst/>
+            </c:spPr>
+            <c:txPr>
+              <a:bodyPr rot="0" spcFirstLastPara="1" vertOverflow="ellipsis" vert="horz" wrap="square" lIns="38100" tIns="19050" rIns="38100" bIns="19050" anchor="ctr" anchorCtr="1">
+                <a:spAutoFit/>
+              </a:bodyPr>
+              <a:lstStyle/>
+              <a:p>
+                <a:pPr>
+                  <a:defRPr sz="1197" b="0" i="0" u="none" strike="noStrike" kern="1200" baseline="0">
+                    <a:solidFill>
+                      <a:schemeClr val="tx1">
+                        <a:lumMod val="75000"/>
+                        <a:lumOff val="25000"/>
+                      </a:schemeClr>
+                    </a:solidFill>
+                    <a:latin typeface="+mn-lt"/>
+                    <a:ea typeface="+mn-ea"/>
+                    <a:cs typeface="+mn-cs"/>
+                  </a:defRPr>
+                </a:pPr>
+                <a:endParaRPr lang="de-DE"/>
+              </a:p>
+            </c:txPr>
+            <c:showLegendKey val="0"/>
+            <c:showVal val="1"/>
+            <c:showCatName val="0"/>
+            <c:showSerName val="0"/>
+            <c:showPercent val="0"/>
+            <c:showBubbleSize val="0"/>
+            <c:showLeaderLines val="0"/>
+            <c:extLst>
+              <c:ext xmlns:c15="http://schemas.microsoft.com/office/drawing/2012/chart" uri="{CE6537A1-D6FC-4f65-9D91-7224C49458BB}">
+                <c15:showLeaderLines val="1"/>
+                <c15:leaderLines>
+                  <c:spPr>
+                    <a:ln w="9525" cap="flat" cmpd="sng" algn="ctr">
+                      <a:solidFill>
+                        <a:schemeClr val="tx1">
+                          <a:lumMod val="35000"/>
+                          <a:lumOff val="65000"/>
+                        </a:schemeClr>
+                      </a:solidFill>
+                      <a:round/>
+                    </a:ln>
+                    <a:effectLst/>
+                  </c:spPr>
+                </c15:leaderLines>
+              </c:ext>
+            </c:extLst>
+          </c:dLbls>
+          <c:cat>
+            <c:strRef>
+              <c:f>Tabelle1!$A$2:$A$5</c:f>
+              <c:strCache>
+                <c:ptCount val="4"/>
+                <c:pt idx="0">
+                  <c:v>Kategorie 1</c:v>
+                </c:pt>
+                <c:pt idx="1">
+                  <c:v>Kategorie 2</c:v>
+                </c:pt>
+                <c:pt idx="2">
+                  <c:v>Kategorie 3</c:v>
+                </c:pt>
+                <c:pt idx="3">
+                  <c:v>Kategorie 4</c:v>
+                </c:pt>
+              </c:strCache>
+            </c:strRef>
+          </c:cat>
+          <c:val>
+            <c:numRef>
+              <c:f>Tabelle1!$B$2:$B$5</c:f>
+              <c:numCache>
+                <c:formatCode>General</c:formatCode>
+                <c:ptCount val="4"/>
+                <c:pt idx="0">
+                  <c:v>4.3</c:v>
+                </c:pt>
+                <c:pt idx="1">
+                  <c:v>2.5</c:v>
+                </c:pt>
+                <c:pt idx="2">
+                  <c:v>3.5</c:v>
+                </c:pt>
+                <c:pt idx="3">
+                  <c:v>4.5</c:v>
+                </c:pt>
+              </c:numCache>
+            </c:numRef>
+          </c:val>
+          <c:extLst>
+            <c:ext xmlns:c16="http://schemas.microsoft.com/office/drawing/2014/chart" uri="{C3380CC4-5D6E-409C-BE32-E72D297353CC}">
+              <c16:uniqueId val="{00000000-7554-43CF-9829-7A5B5580023E}"/>
+            </c:ext>
+          </c:extLst>
+        </c:ser>
+        <c:ser>
+          <c:idx val="1"/>
+          <c:order val="1"/>
+          <c:tx>
+            <c:strRef>
+              <c:f>Tabelle1!$C$1</c:f>
+              <c:strCache>
+                <c:ptCount val="1"/>
+                <c:pt idx="0">
+                  <c:v>Datenreihe 2</c:v>
+                </c:pt>
+              </c:strCache>
+            </c:strRef>
+          </c:tx>
+          <c:spPr>
+            <a:solidFill>
+              <a:schemeClr val="accent2"/>
+            </a:solidFill>
+            <a:ln>
+              <a:noFill/>
+            </a:ln>
+            <a:effectLst/>
+            <a:sp3d/>
+          </c:spPr>
+          <c:invertIfNegative val="0"/>
+          <c:dLbls>
+            <c:spPr>
+              <a:noFill/>
+              <a:ln>
+                <a:noFill/>
+              </a:ln>
+              <a:effectLst/>
+            </c:spPr>
+            <c:txPr>
+              <a:bodyPr rot="0" spcFirstLastPara="1" vertOverflow="ellipsis" vert="horz" wrap="square" lIns="38100" tIns="19050" rIns="38100" bIns="19050" anchor="ctr" anchorCtr="1">
+                <a:spAutoFit/>
+              </a:bodyPr>
+              <a:lstStyle/>
+              <a:p>
+                <a:pPr>
+                  <a:defRPr sz="1197" b="0" i="0" u="none" strike="noStrike" kern="1200" baseline="0">
+                    <a:solidFill>
+                      <a:schemeClr val="tx1">
+                        <a:lumMod val="75000"/>
+                        <a:lumOff val="25000"/>
+                      </a:schemeClr>
+                    </a:solidFill>
+                    <a:latin typeface="+mn-lt"/>
+                    <a:ea typeface="+mn-ea"/>
+                    <a:cs typeface="+mn-cs"/>
+                  </a:defRPr>
+                </a:pPr>
+                <a:endParaRPr lang="de-DE"/>
+              </a:p>
+            </c:txPr>
+            <c:showLegendKey val="0"/>
+            <c:showVal val="1"/>
+            <c:showCatName val="0"/>
+            <c:showSerName val="0"/>
+            <c:showPercent val="0"/>
+            <c:showBubbleSize val="0"/>
+            <c:showLeaderLines val="0"/>
+            <c:extLst>
+              <c:ext xmlns:c15="http://schemas.microsoft.com/office/drawing/2012/chart" uri="{CE6537A1-D6FC-4f65-9D91-7224C49458BB}">
+                <c15:showLeaderLines val="1"/>
+                <c15:leaderLines>
+                  <c:spPr>
+                    <a:ln w="9525" cap="flat" cmpd="sng" algn="ctr">
+                      <a:solidFill>
+                        <a:schemeClr val="tx1">
+                          <a:lumMod val="35000"/>
+                          <a:lumOff val="65000"/>
+                        </a:schemeClr>
+                      </a:solidFill>
+                      <a:round/>
+                    </a:ln>
+                    <a:effectLst/>
+                  </c:spPr>
+                </c15:leaderLines>
+              </c:ext>
+            </c:extLst>
+          </c:dLbls>
+          <c:cat>
+            <c:strRef>
+              <c:f>Tabelle1!$A$2:$A$5</c:f>
+              <c:strCache>
+                <c:ptCount val="4"/>
+                <c:pt idx="0">
+                  <c:v>Kategorie 1</c:v>
+                </c:pt>
+                <c:pt idx="1">
+                  <c:v>Kategorie 2</c:v>
+                </c:pt>
+                <c:pt idx="2">
+                  <c:v>Kategorie 3</c:v>
+                </c:pt>
+                <c:pt idx="3">
+                  <c:v>Kategorie 4</c:v>
+                </c:pt>
+              </c:strCache>
+            </c:strRef>
+          </c:cat>
+          <c:val>
+            <c:numRef>
+              <c:f>Tabelle1!$C$2:$C$5</c:f>
+              <c:numCache>
+                <c:formatCode>General</c:formatCode>
+                <c:ptCount val="4"/>
+                <c:pt idx="0">
+                  <c:v>2.4</c:v>
+                </c:pt>
+                <c:pt idx="1">
+                  <c:v>4.4000000000000004</c:v>
+                </c:pt>
+                <c:pt idx="2">
+                  <c:v>1.8</c:v>
+                </c:pt>
+                <c:pt idx="3">
+                  <c:v>2.8</c:v>
+                </c:pt>
+              </c:numCache>
+            </c:numRef>
+          </c:val>
+          <c:extLst>
+            <c:ext xmlns:c16="http://schemas.microsoft.com/office/drawing/2014/chart" uri="{C3380CC4-5D6E-409C-BE32-E72D297353CC}">
+              <c16:uniqueId val="{00000001-7554-43CF-9829-7A5B5580023E}"/>
+            </c:ext>
+          </c:extLst>
+        </c:ser>
+        <c:ser>
+          <c:idx val="2"/>
+          <c:order val="2"/>
+          <c:tx>
+            <c:strRef>
+              <c:f>Tabelle1!$D$1</c:f>
+              <c:strCache>
+                <c:ptCount val="1"/>
+                <c:pt idx="0">
+                  <c:v>Datenreihe 3</c:v>
+                </c:pt>
+              </c:strCache>
+            </c:strRef>
+          </c:tx>
+          <c:spPr>
+            <a:solidFill>
+              <a:schemeClr val="accent3"/>
+            </a:solidFill>
+            <a:ln>
+              <a:noFill/>
+            </a:ln>
+            <a:effectLst/>
+            <a:sp3d/>
+          </c:spPr>
+          <c:invertIfNegative val="0"/>
+          <c:dLbls>
+            <c:spPr>
+              <a:noFill/>
+              <a:ln>
+                <a:noFill/>
+              </a:ln>
+              <a:effectLst/>
+            </c:spPr>
+            <c:txPr>
+              <a:bodyPr rot="0" spcFirstLastPara="1" vertOverflow="ellipsis" vert="horz" wrap="square" lIns="38100" tIns="19050" rIns="38100" bIns="19050" anchor="ctr" anchorCtr="1">
+                <a:spAutoFit/>
+              </a:bodyPr>
+              <a:lstStyle/>
+              <a:p>
+                <a:pPr>
+                  <a:defRPr sz="1197" b="0" i="0" u="none" strike="noStrike" kern="1200" baseline="0">
+                    <a:solidFill>
+                      <a:schemeClr val="tx1">
+                        <a:lumMod val="75000"/>
+                        <a:lumOff val="25000"/>
+                      </a:schemeClr>
+                    </a:solidFill>
+                    <a:latin typeface="+mn-lt"/>
+                    <a:ea typeface="+mn-ea"/>
+                    <a:cs typeface="+mn-cs"/>
+                  </a:defRPr>
+                </a:pPr>
+                <a:endParaRPr lang="de-DE"/>
+              </a:p>
+            </c:txPr>
+            <c:showLegendKey val="0"/>
+            <c:showVal val="1"/>
+            <c:showCatName val="0"/>
+            <c:showSerName val="0"/>
+            <c:showPercent val="0"/>
+            <c:showBubbleSize val="0"/>
+            <c:showLeaderLines val="0"/>
+            <c:extLst>
+              <c:ext xmlns:c15="http://schemas.microsoft.com/office/drawing/2012/chart" uri="{CE6537A1-D6FC-4f65-9D91-7224C49458BB}">
+                <c15:showLeaderLines val="1"/>
+                <c15:leaderLines>
+                  <c:spPr>
+                    <a:ln w="9525" cap="flat" cmpd="sng" algn="ctr">
+                      <a:solidFill>
+                        <a:schemeClr val="tx1">
+                          <a:lumMod val="35000"/>
+                          <a:lumOff val="65000"/>
+                        </a:schemeClr>
+                      </a:solidFill>
+                      <a:round/>
+                    </a:ln>
+                    <a:effectLst/>
+                  </c:spPr>
+                </c15:leaderLines>
+              </c:ext>
+            </c:extLst>
+          </c:dLbls>
+          <c:cat>
+            <c:strRef>
+              <c:f>Tabelle1!$A$2:$A$5</c:f>
+              <c:strCache>
+                <c:ptCount val="4"/>
+                <c:pt idx="0">
+                  <c:v>Kategorie 1</c:v>
+                </c:pt>
+                <c:pt idx="1">
+                  <c:v>Kategorie 2</c:v>
+                </c:pt>
+                <c:pt idx="2">
+                  <c:v>Kategorie 3</c:v>
+                </c:pt>
+                <c:pt idx="3">
+                  <c:v>Kategorie 4</c:v>
+                </c:pt>
+              </c:strCache>
+            </c:strRef>
+          </c:cat>
+          <c:val>
+            <c:numRef>
+              <c:f>Tabelle1!$D$2:$D$5</c:f>
+              <c:numCache>
+                <c:formatCode>General</c:formatCode>
+                <c:ptCount val="4"/>
+                <c:pt idx="0">
+                  <c:v>2</c:v>
+                </c:pt>
+                <c:pt idx="1">
+                  <c:v>2</c:v>
+                </c:pt>
+                <c:pt idx="2">
+                  <c:v>3</c:v>
+                </c:pt>
+                <c:pt idx="3">
+                  <c:v>5</c:v>
+                </c:pt>
+              </c:numCache>
+            </c:numRef>
+          </c:val>
+          <c:extLst>
+            <c:ext xmlns:c16="http://schemas.microsoft.com/office/drawing/2014/chart" uri="{C3380CC4-5D6E-409C-BE32-E72D297353CC}">
+              <c16:uniqueId val="{00000002-7554-43CF-9829-7A5B5580023E}"/>
+            </c:ext>
+          </c:extLst>
+        </c:ser>
+        <c:dLbls>
+          <c:showLegendKey val="0"/>
+          <c:showVal val="0"/>
+          <c:showCatName val="0"/>
+          <c:showSerName val="0"/>
+          <c:showPercent val="0"/>
+          <c:showBubbleSize val="0"/>
+        </c:dLbls>
+        <c:gapWidth val="150"/>
+        <c:shape val="box"/>
+        <c:axId val="34183408"/>
+        <c:axId val="15070256"/>
+        <c:axId val="0"/>
+      </c:bar3DChart>
+      <c:catAx>
+        <c:axId val="34183408"/>
+        <c:scaling>
+          <c:orientation val="minMax"/>
+        </c:scaling>
+        <c:delete val="0"/>
+        <c:axPos val="b"/>
+        <c:numFmt formatCode="General" sourceLinked="1"/>
+        <c:majorTickMark val="none"/>
+        <c:minorTickMark val="none"/>
+        <c:tickLblPos val="nextTo"/>
+        <c:spPr>
+          <a:noFill/>
+          <a:ln>
+            <a:noFill/>
+          </a:ln>
+          <a:effectLst/>
+        </c:spPr>
+        <c:txPr>
+          <a:bodyPr rot="-60000000" spcFirstLastPara="1" vertOverflow="ellipsis" vert="horz" wrap="square" anchor="ctr" anchorCtr="1"/>
+          <a:lstStyle/>
+          <a:p>
+            <a:pPr>
+              <a:defRPr sz="1197" b="0" i="0" u="none" strike="noStrike" kern="1200" baseline="0">
+                <a:solidFill>
+                  <a:schemeClr val="tx1">
+                    <a:lumMod val="65000"/>
+                    <a:lumOff val="35000"/>
+                  </a:schemeClr>
+                </a:solidFill>
+                <a:latin typeface="+mn-lt"/>
+                <a:ea typeface="+mn-ea"/>
+                <a:cs typeface="+mn-cs"/>
+              </a:defRPr>
+            </a:pPr>
+            <a:endParaRPr lang="de-DE"/>
+          </a:p>
+        </c:txPr>
+        <c:crossAx val="15070256"/>
+        <c:crosses val="autoZero"/>
+        <c:auto val="1"/>
+        <c:lblAlgn val="ctr"/>
+        <c:lblOffset val="100"/>
+        <c:noMultiLvlLbl val="0"/>
+      </c:catAx>
+      <c:valAx>
+        <c:axId val="15070256"/>
+        <c:scaling>
+          <c:orientation val="minMax"/>
+        </c:scaling>
+        <c:delete val="0"/>
+        <c:axPos val="l"/>
+        <c:majorGridlines>
+          <c:spPr>
+            <a:ln w="9525" cap="flat" cmpd="sng" algn="ctr">
+              <a:solidFill>
+                <a:schemeClr val="tx1">
+                  <a:lumMod val="15000"/>
+                  <a:lumOff val="85000"/>
+                </a:schemeClr>
+              </a:solidFill>
+              <a:round/>
+            </a:ln>
+            <a:effectLst/>
+          </c:spPr>
+        </c:majorGridlines>
+        <c:numFmt formatCode="General" sourceLinked="1"/>
+        <c:majorTickMark val="none"/>
+        <c:minorTickMark val="none"/>
+        <c:tickLblPos val="nextTo"/>
+        <c:spPr>
+          <a:noFill/>
+          <a:ln>
+            <a:noFill/>
+          </a:ln>
+          <a:effectLst/>
+        </c:spPr>
+        <c:txPr>
+          <a:bodyPr rot="-60000000" spcFirstLastPara="1" vertOverflow="ellipsis" vert="horz" wrap="square" anchor="ctr" anchorCtr="1"/>
+          <a:lstStyle/>
+          <a:p>
+            <a:pPr>
+              <a:defRPr sz="1197" b="0" i="0" u="none" strike="noStrike" kern="1200" baseline="0">
+                <a:solidFill>
+                  <a:schemeClr val="tx1">
+                    <a:lumMod val="65000"/>
+                    <a:lumOff val="35000"/>
+                  </a:schemeClr>
+                </a:solidFill>
+                <a:latin typeface="+mn-lt"/>
+                <a:ea typeface="+mn-ea"/>
+                <a:cs typeface="+mn-cs"/>
+              </a:defRPr>
+            </a:pPr>
+            <a:endParaRPr lang="de-DE"/>
+          </a:p>
+        </c:txPr>
+        <c:crossAx val="34183408"/>
+        <c:crosses val="autoZero"/>
+        <c:crossBetween val="between"/>
+      </c:valAx>
+      <c:spPr>
+        <a:noFill/>
+        <a:ln>
+          <a:noFill/>
+        </a:ln>
+        <a:effectLst/>
+      </c:spPr>
+    </c:plotArea>
+    <c:legend>
+      <c:legendPos val="b"/>
+      <c:overlay val="0"/>
+      <c:spPr>
+        <a:noFill/>
+        <a:ln>
+          <a:noFill/>
+        </a:ln>
+        <a:effectLst/>
+      </c:spPr>
+      <c:txPr>
+        <a:bodyPr rot="0" spcFirstLastPara="1" vertOverflow="ellipsis" vert="horz" wrap="square" anchor="ctr" anchorCtr="1"/>
+        <a:lstStyle/>
+        <a:p>
+          <a:pPr>
+            <a:defRPr sz="1197" b="0" i="0" u="none" strike="noStrike" kern="1200" baseline="0">
+              <a:solidFill>
+                <a:schemeClr val="tx1">
+                  <a:lumMod val="65000"/>
+                  <a:lumOff val="35000"/>
+                </a:schemeClr>
+              </a:solidFill>
+              <a:latin typeface="+mn-lt"/>
+              <a:ea typeface="+mn-ea"/>
+              <a:cs typeface="+mn-cs"/>
+            </a:defRPr>
+          </a:pPr>
+          <a:endParaRPr lang="de-DE"/>
+        </a:p>
+      </c:txPr>
+    </c:legend>
+    <c:plotVisOnly val="1"/>
+    <c:dispBlanksAs val="gap"/>
+    <c:showDLblsOverMax val="0"/>
+    <c:extLst>
+      <c:ext xmlns:c16r3="http://schemas.microsoft.com/office/drawing/2017/03/chart" uri="{56B9EC1D-385E-4148-901F-78D8002777C0}">
+        <c16r3:dataDisplayOptions16>
+          <c16r3:dispNaAsBlank val="1"/>
+        </c16r3:dataDisplayOptions16>
+      </c:ext>
+    </c:extLst>
+  </c:chart>
+  <c:spPr>
+    <a:noFill/>
+    <a:ln>
+      <a:noFill/>
+    </a:ln>
+    <a:effectLst/>
+  </c:spPr>
+  <c:txPr>
+    <a:bodyPr/>
+    <a:lstStyle/>
+    <a:p>
+      <a:pPr>
+        <a:defRPr/>
+      </a:pPr>
+      <a:endParaRPr lang="de-DE"/>
+    </a:p>
+  </c:txPr>
+  <c:externalData r:id="rId3">
+    <c:autoUpdate val="0"/>
+  </c:externalData>
+</c:chartSpace>
+</file>
+
+<file path=ppt/charts/chart22.xml><?xml version="1.0" encoding="utf-8"?>
+<c:chartSpace xmlns:c="http://schemas.openxmlformats.org/drawingml/2006/chart" xmlns:a="http://schemas.openxmlformats.org/drawingml/2006/main" xmlns:r="http://schemas.openxmlformats.org/officeDocument/2006/relationships" xmlns:c16r2="http://schemas.microsoft.com/office/drawing/2015/06/chart">
+  <c:date1904 val="0"/>
+  <c:lang val="de-DE"/>
+  <c:roundedCorners val="0"/>
+  <mc:AlternateContent xmlns:mc="http://schemas.openxmlformats.org/markup-compatibility/2006">
+    <mc:Choice xmlns:c14="http://schemas.microsoft.com/office/drawing/2007/8/2/chart" Requires="c14">
+      <c14:style val="102"/>
+    </mc:Choice>
+    <mc:Fallback>
+      <c:style val="2"/>
+    </mc:Fallback>
+  </mc:AlternateContent>
+  <c:chart>
+    <c:autoTitleDeleted val="0"/>
+    <c:view3D>
+      <c:rotX val="15"/>
+      <c:rotY val="20"/>
+      <c:depthPercent val="100"/>
+      <c:rAngAx val="1"/>
+    </c:view3D>
+    <c:floor>
+      <c:thickness val="0"/>
+      <c:spPr>
+        <a:noFill/>
+        <a:ln>
+          <a:noFill/>
+        </a:ln>
+        <a:effectLst/>
+        <a:sp3d/>
+      </c:spPr>
+    </c:floor>
+    <c:sideWall>
+      <c:thickness val="0"/>
+      <c:spPr>
+        <a:noFill/>
+        <a:ln>
+          <a:noFill/>
+        </a:ln>
+        <a:effectLst/>
+        <a:sp3d/>
+      </c:spPr>
+    </c:sideWall>
+    <c:backWall>
+      <c:thickness val="0"/>
+      <c:spPr>
+        <a:noFill/>
+        <a:ln>
+          <a:noFill/>
+        </a:ln>
+        <a:effectLst/>
+        <a:sp3d/>
+      </c:spPr>
+    </c:backWall>
+    <c:plotArea>
+      <c:layout/>
+      <c:bar3DChart>
+        <c:barDir val="bar"/>
+        <c:grouping val="clustered"/>
+        <c:varyColors val="0"/>
+        <c:ser>
+          <c:idx val="0"/>
+          <c:order val="0"/>
+          <c:tx>
+            <c:strRef>
+              <c:f>Tabelle1!$B$1</c:f>
+              <c:strCache>
+                <c:ptCount val="1"/>
+                <c:pt idx="0">
+                  <c:v>Datenreihe 1</c:v>
+                </c:pt>
+              </c:strCache>
+            </c:strRef>
+          </c:tx>
+          <c:spPr>
+            <a:solidFill>
+              <a:schemeClr val="accent1"/>
+            </a:solidFill>
+            <a:ln>
+              <a:noFill/>
+            </a:ln>
+            <a:effectLst/>
+            <a:sp3d/>
+          </c:spPr>
+          <c:invertIfNegative val="0"/>
+          <c:dLbls>
+            <c:spPr>
+              <a:noFill/>
+              <a:ln>
+                <a:noFill/>
+              </a:ln>
+              <a:effectLst/>
+            </c:spPr>
+            <c:txPr>
+              <a:bodyPr rot="0" spcFirstLastPara="1" vertOverflow="ellipsis" vert="horz" wrap="square" lIns="38100" tIns="19050" rIns="38100" bIns="19050" anchor="ctr" anchorCtr="1">
+                <a:spAutoFit/>
+              </a:bodyPr>
+              <a:lstStyle/>
+              <a:p>
+                <a:pPr>
+                  <a:defRPr sz="1197" b="0" i="0" u="none" strike="noStrike" kern="1200" baseline="0">
+                    <a:solidFill>
+                      <a:schemeClr val="tx1">
+                        <a:lumMod val="75000"/>
+                        <a:lumOff val="25000"/>
+                      </a:schemeClr>
+                    </a:solidFill>
+                    <a:latin typeface="+mn-lt"/>
+                    <a:ea typeface="+mn-ea"/>
+                    <a:cs typeface="+mn-cs"/>
+                  </a:defRPr>
+                </a:pPr>
+                <a:endParaRPr lang="de-DE"/>
+              </a:p>
+            </c:txPr>
+            <c:showLegendKey val="0"/>
+            <c:showVal val="1"/>
+            <c:showCatName val="0"/>
+            <c:showSerName val="0"/>
+            <c:showPercent val="0"/>
+            <c:showBubbleSize val="0"/>
+            <c:showLeaderLines val="0"/>
+            <c:extLst>
+              <c:ext xmlns:c15="http://schemas.microsoft.com/office/drawing/2012/chart" uri="{CE6537A1-D6FC-4f65-9D91-7224C49458BB}">
+                <c15:showLeaderLines val="1"/>
+                <c15:leaderLines>
+                  <c:spPr>
+                    <a:ln w="9525" cap="flat" cmpd="sng" algn="ctr">
+                      <a:solidFill>
+                        <a:schemeClr val="tx1">
+                          <a:lumMod val="35000"/>
+                          <a:lumOff val="65000"/>
+                        </a:schemeClr>
+                      </a:solidFill>
+                      <a:round/>
+                    </a:ln>
+                    <a:effectLst/>
+                  </c:spPr>
+                </c15:leaderLines>
+              </c:ext>
+            </c:extLst>
+          </c:dLbls>
+          <c:cat>
+            <c:strRef>
+              <c:f>Tabelle1!$A$2:$A$5</c:f>
+              <c:strCache>
+                <c:ptCount val="4"/>
+                <c:pt idx="0">
+                  <c:v>Kategorie 1</c:v>
+                </c:pt>
+                <c:pt idx="1">
+                  <c:v>Kategorie 2</c:v>
+                </c:pt>
+                <c:pt idx="2">
+                  <c:v>Kategorie 3</c:v>
+                </c:pt>
+                <c:pt idx="3">
+                  <c:v>Kategorie 4</c:v>
+                </c:pt>
+              </c:strCache>
+            </c:strRef>
+          </c:cat>
+          <c:val>
+            <c:numRef>
+              <c:f>Tabelle1!$B$2:$B$5</c:f>
+              <c:numCache>
+                <c:formatCode>General</c:formatCode>
+                <c:ptCount val="4"/>
+                <c:pt idx="0">
+                  <c:v>4.3</c:v>
+                </c:pt>
+                <c:pt idx="1">
+                  <c:v>2.5</c:v>
+                </c:pt>
+                <c:pt idx="2">
+                  <c:v>3.5</c:v>
+                </c:pt>
+                <c:pt idx="3">
+                  <c:v>4.5</c:v>
+                </c:pt>
+              </c:numCache>
+            </c:numRef>
+          </c:val>
+          <c:extLst>
+            <c:ext xmlns:c16="http://schemas.microsoft.com/office/drawing/2014/chart" uri="{C3380CC4-5D6E-409C-BE32-E72D297353CC}">
+              <c16:uniqueId val="{00000000-D8A9-41D3-84D9-335F33CA431A}"/>
+            </c:ext>
+          </c:extLst>
+        </c:ser>
+        <c:ser>
+          <c:idx val="1"/>
+          <c:order val="1"/>
+          <c:tx>
+            <c:strRef>
+              <c:f>Tabelle1!$C$1</c:f>
+              <c:strCache>
+                <c:ptCount val="1"/>
+                <c:pt idx="0">
+                  <c:v>Datenreihe 2</c:v>
+                </c:pt>
+              </c:strCache>
+            </c:strRef>
+          </c:tx>
+          <c:spPr>
+            <a:solidFill>
+              <a:schemeClr val="accent2"/>
+            </a:solidFill>
+            <a:ln>
+              <a:noFill/>
+            </a:ln>
+            <a:effectLst/>
+            <a:sp3d/>
+          </c:spPr>
+          <c:invertIfNegative val="0"/>
+          <c:dLbls>
+            <c:spPr>
+              <a:noFill/>
+              <a:ln>
+                <a:noFill/>
+              </a:ln>
+              <a:effectLst/>
+            </c:spPr>
+            <c:txPr>
+              <a:bodyPr rot="0" spcFirstLastPara="1" vertOverflow="ellipsis" vert="horz" wrap="square" lIns="38100" tIns="19050" rIns="38100" bIns="19050" anchor="ctr" anchorCtr="1">
+                <a:spAutoFit/>
+              </a:bodyPr>
+              <a:lstStyle/>
+              <a:p>
+                <a:pPr>
+                  <a:defRPr sz="1197" b="0" i="0" u="none" strike="noStrike" kern="1200" baseline="0">
+                    <a:solidFill>
+                      <a:schemeClr val="tx1">
+                        <a:lumMod val="75000"/>
+                        <a:lumOff val="25000"/>
+                      </a:schemeClr>
+                    </a:solidFill>
+                    <a:latin typeface="+mn-lt"/>
+                    <a:ea typeface="+mn-ea"/>
+                    <a:cs typeface="+mn-cs"/>
+                  </a:defRPr>
+                </a:pPr>
+                <a:endParaRPr lang="de-DE"/>
+              </a:p>
+            </c:txPr>
+            <c:showLegendKey val="0"/>
+            <c:showVal val="1"/>
+            <c:showCatName val="0"/>
+            <c:showSerName val="0"/>
+            <c:showPercent val="0"/>
+            <c:showBubbleSize val="0"/>
+            <c:showLeaderLines val="0"/>
+            <c:extLst>
+              <c:ext xmlns:c15="http://schemas.microsoft.com/office/drawing/2012/chart" uri="{CE6537A1-D6FC-4f65-9D91-7224C49458BB}">
+                <c15:showLeaderLines val="1"/>
+                <c15:leaderLines>
+                  <c:spPr>
+                    <a:ln w="9525" cap="flat" cmpd="sng" algn="ctr">
+                      <a:solidFill>
+                        <a:schemeClr val="tx1">
+                          <a:lumMod val="35000"/>
+                          <a:lumOff val="65000"/>
+                        </a:schemeClr>
+                      </a:solidFill>
+                      <a:round/>
+                    </a:ln>
+                    <a:effectLst/>
+                  </c:spPr>
+                </c15:leaderLines>
+              </c:ext>
+            </c:extLst>
+          </c:dLbls>
+          <c:cat>
+            <c:strRef>
+              <c:f>Tabelle1!$A$2:$A$5</c:f>
+              <c:strCache>
+                <c:ptCount val="4"/>
+                <c:pt idx="0">
+                  <c:v>Kategorie 1</c:v>
+                </c:pt>
+                <c:pt idx="1">
+                  <c:v>Kategorie 2</c:v>
+                </c:pt>
+                <c:pt idx="2">
+                  <c:v>Kategorie 3</c:v>
+                </c:pt>
+                <c:pt idx="3">
+                  <c:v>Kategorie 4</c:v>
+                </c:pt>
+              </c:strCache>
+            </c:strRef>
+          </c:cat>
+          <c:val>
+            <c:numRef>
+              <c:f>Tabelle1!$C$2:$C$5</c:f>
+              <c:numCache>
+                <c:formatCode>General</c:formatCode>
+                <c:ptCount val="4"/>
+                <c:pt idx="0">
+                  <c:v>2.4</c:v>
+                </c:pt>
+                <c:pt idx="1">
+                  <c:v>4.4000000000000004</c:v>
+                </c:pt>
+                <c:pt idx="2">
+                  <c:v>1.8</c:v>
+                </c:pt>
+                <c:pt idx="3">
+                  <c:v>2.8</c:v>
+                </c:pt>
+              </c:numCache>
+            </c:numRef>
+          </c:val>
+          <c:extLst>
+            <c:ext xmlns:c16="http://schemas.microsoft.com/office/drawing/2014/chart" uri="{C3380CC4-5D6E-409C-BE32-E72D297353CC}">
+              <c16:uniqueId val="{00000001-D8A9-41D3-84D9-335F33CA431A}"/>
+            </c:ext>
+          </c:extLst>
+        </c:ser>
+        <c:ser>
+          <c:idx val="2"/>
+          <c:order val="2"/>
+          <c:tx>
+            <c:strRef>
+              <c:f>Tabelle1!$D$1</c:f>
+              <c:strCache>
+                <c:ptCount val="1"/>
+                <c:pt idx="0">
+                  <c:v>Datenreihe 3</c:v>
+                </c:pt>
+              </c:strCache>
+            </c:strRef>
+          </c:tx>
+          <c:spPr>
+            <a:solidFill>
+              <a:schemeClr val="accent3"/>
+            </a:solidFill>
+            <a:ln>
+              <a:noFill/>
+            </a:ln>
+            <a:effectLst/>
+            <a:sp3d/>
+          </c:spPr>
+          <c:invertIfNegative val="0"/>
+          <c:dLbls>
+            <c:spPr>
+              <a:noFill/>
+              <a:ln>
+                <a:noFill/>
+              </a:ln>
+              <a:effectLst/>
+            </c:spPr>
+            <c:txPr>
+              <a:bodyPr rot="0" spcFirstLastPara="1" vertOverflow="ellipsis" vert="horz" wrap="square" lIns="38100" tIns="19050" rIns="38100" bIns="19050" anchor="ctr" anchorCtr="1">
+                <a:spAutoFit/>
+              </a:bodyPr>
+              <a:lstStyle/>
+              <a:p>
+                <a:pPr>
+                  <a:defRPr sz="1197" b="0" i="0" u="none" strike="noStrike" kern="1200" baseline="0">
+                    <a:solidFill>
+                      <a:schemeClr val="tx1">
+                        <a:lumMod val="75000"/>
+                        <a:lumOff val="25000"/>
+                      </a:schemeClr>
+                    </a:solidFill>
+                    <a:latin typeface="+mn-lt"/>
+                    <a:ea typeface="+mn-ea"/>
+                    <a:cs typeface="+mn-cs"/>
+                  </a:defRPr>
+                </a:pPr>
+                <a:endParaRPr lang="de-DE"/>
+              </a:p>
+            </c:txPr>
+            <c:showLegendKey val="0"/>
+            <c:showVal val="1"/>
+            <c:showCatName val="0"/>
+            <c:showSerName val="0"/>
+            <c:showPercent val="0"/>
+            <c:showBubbleSize val="0"/>
+            <c:showLeaderLines val="0"/>
+            <c:extLst>
+              <c:ext xmlns:c15="http://schemas.microsoft.com/office/drawing/2012/chart" uri="{CE6537A1-D6FC-4f65-9D91-7224C49458BB}">
+                <c15:showLeaderLines val="1"/>
+                <c15:leaderLines>
+                  <c:spPr>
+                    <a:ln w="9525" cap="flat" cmpd="sng" algn="ctr">
+                      <a:solidFill>
+                        <a:schemeClr val="tx1">
+                          <a:lumMod val="35000"/>
+                          <a:lumOff val="65000"/>
+                        </a:schemeClr>
+                      </a:solidFill>
+                      <a:round/>
+                    </a:ln>
+                    <a:effectLst/>
+                  </c:spPr>
+                </c15:leaderLines>
+              </c:ext>
+            </c:extLst>
+          </c:dLbls>
+          <c:cat>
+            <c:strRef>
+              <c:f>Tabelle1!$A$2:$A$5</c:f>
+              <c:strCache>
+                <c:ptCount val="4"/>
+                <c:pt idx="0">
+                  <c:v>Kategorie 1</c:v>
+                </c:pt>
+                <c:pt idx="1">
+                  <c:v>Kategorie 2</c:v>
+                </c:pt>
+                <c:pt idx="2">
+                  <c:v>Kategorie 3</c:v>
+                </c:pt>
+                <c:pt idx="3">
+                  <c:v>Kategorie 4</c:v>
+                </c:pt>
+              </c:strCache>
+            </c:strRef>
+          </c:cat>
+          <c:val>
+            <c:numRef>
+              <c:f>Tabelle1!$D$2:$D$5</c:f>
+              <c:numCache>
+                <c:formatCode>General</c:formatCode>
+                <c:ptCount val="4"/>
+                <c:pt idx="0">
+                  <c:v>2</c:v>
+                </c:pt>
+                <c:pt idx="1">
+                  <c:v>2</c:v>
+                </c:pt>
+                <c:pt idx="2">
+                  <c:v>3</c:v>
+                </c:pt>
+                <c:pt idx="3">
+                  <c:v>5</c:v>
+                </c:pt>
+              </c:numCache>
+            </c:numRef>
+          </c:val>
+          <c:extLst>
+            <c:ext xmlns:c16="http://schemas.microsoft.com/office/drawing/2014/chart" uri="{C3380CC4-5D6E-409C-BE32-E72D297353CC}">
+              <c16:uniqueId val="{00000002-D8A9-41D3-84D9-335F33CA431A}"/>
+            </c:ext>
+          </c:extLst>
+        </c:ser>
+        <c:dLbls>
+          <c:showLegendKey val="0"/>
+          <c:showVal val="0"/>
+          <c:showCatName val="0"/>
+          <c:showSerName val="0"/>
+          <c:showPercent val="0"/>
+          <c:showBubbleSize val="0"/>
+        </c:dLbls>
+        <c:gapWidth val="150"/>
+        <c:shape val="box"/>
+        <c:axId val="34172272"/>
+        <c:axId val="15059696"/>
+        <c:axId val="0"/>
+      </c:bar3DChart>
+      <c:catAx>
+        <c:axId val="34172272"/>
+        <c:scaling>
+          <c:orientation val="minMax"/>
+        </c:scaling>
+        <c:delete val="0"/>
+        <c:axPos val="l"/>
+        <c:numFmt formatCode="General" sourceLinked="1"/>
+        <c:majorTickMark val="none"/>
+        <c:minorTickMark val="none"/>
+        <c:tickLblPos val="nextTo"/>
+        <c:spPr>
+          <a:noFill/>
+          <a:ln>
+            <a:noFill/>
+          </a:ln>
+          <a:effectLst/>
+        </c:spPr>
+        <c:txPr>
+          <a:bodyPr rot="-60000000" spcFirstLastPara="1" vertOverflow="ellipsis" vert="horz" wrap="square" anchor="ctr" anchorCtr="1"/>
+          <a:lstStyle/>
+          <a:p>
+            <a:pPr>
+              <a:defRPr sz="1197" b="0" i="0" u="none" strike="noStrike" kern="1200" baseline="0">
+                <a:solidFill>
+                  <a:schemeClr val="tx1">
+                    <a:lumMod val="65000"/>
+                    <a:lumOff val="35000"/>
+                  </a:schemeClr>
+                </a:solidFill>
+                <a:latin typeface="+mn-lt"/>
+                <a:ea typeface="+mn-ea"/>
+                <a:cs typeface="+mn-cs"/>
+              </a:defRPr>
+            </a:pPr>
+            <a:endParaRPr lang="de-DE"/>
+          </a:p>
+        </c:txPr>
+        <c:crossAx val="15059696"/>
+        <c:crosses val="autoZero"/>
+        <c:auto val="1"/>
+        <c:lblAlgn val="ctr"/>
+        <c:lblOffset val="100"/>
+        <c:noMultiLvlLbl val="0"/>
+      </c:catAx>
+      <c:valAx>
+        <c:axId val="15059696"/>
+        <c:scaling>
+          <c:orientation val="minMax"/>
+        </c:scaling>
+        <c:delete val="0"/>
+        <c:axPos val="b"/>
+        <c:majorGridlines>
+          <c:spPr>
+            <a:ln w="9525" cap="flat" cmpd="sng" algn="ctr">
+              <a:solidFill>
+                <a:schemeClr val="tx1">
+                  <a:lumMod val="15000"/>
+                  <a:lumOff val="85000"/>
+                </a:schemeClr>
+              </a:solidFill>
+              <a:round/>
+            </a:ln>
+            <a:effectLst/>
+          </c:spPr>
+        </c:majorGridlines>
+        <c:numFmt formatCode="General" sourceLinked="1"/>
+        <c:majorTickMark val="none"/>
+        <c:minorTickMark val="none"/>
+        <c:tickLblPos val="nextTo"/>
+        <c:spPr>
+          <a:noFill/>
+          <a:ln>
+            <a:noFill/>
+          </a:ln>
+          <a:effectLst/>
+        </c:spPr>
+        <c:txPr>
+          <a:bodyPr rot="-60000000" spcFirstLastPara="1" vertOverflow="ellipsis" vert="horz" wrap="square" anchor="ctr" anchorCtr="1"/>
+          <a:lstStyle/>
+          <a:p>
+            <a:pPr>
+              <a:defRPr sz="1197" b="0" i="0" u="none" strike="noStrike" kern="1200" baseline="0">
+                <a:solidFill>
+                  <a:schemeClr val="tx1">
+                    <a:lumMod val="65000"/>
+                    <a:lumOff val="35000"/>
+                  </a:schemeClr>
+                </a:solidFill>
+                <a:latin typeface="+mn-lt"/>
+                <a:ea typeface="+mn-ea"/>
+                <a:cs typeface="+mn-cs"/>
+              </a:defRPr>
+            </a:pPr>
+            <a:endParaRPr lang="de-DE"/>
+          </a:p>
+        </c:txPr>
+        <c:crossAx val="34172272"/>
+        <c:crosses val="autoZero"/>
+        <c:crossBetween val="between"/>
+      </c:valAx>
+      <c:spPr>
+        <a:noFill/>
+        <a:ln>
+          <a:noFill/>
+        </a:ln>
+        <a:effectLst/>
+      </c:spPr>
+    </c:plotArea>
+    <c:legend>
+      <c:legendPos val="b"/>
+      <c:overlay val="0"/>
+      <c:spPr>
+        <a:noFill/>
+        <a:ln>
+          <a:noFill/>
+        </a:ln>
+        <a:effectLst/>
+      </c:spPr>
+      <c:txPr>
+        <a:bodyPr rot="0" spcFirstLastPara="1" vertOverflow="ellipsis" vert="horz" wrap="square" anchor="ctr" anchorCtr="1"/>
+        <a:lstStyle/>
+        <a:p>
+          <a:pPr>
+            <a:defRPr sz="1197" b="0" i="0" u="none" strike="noStrike" kern="1200" baseline="0">
+              <a:solidFill>
+                <a:schemeClr val="tx1">
+                  <a:lumMod val="65000"/>
+                  <a:lumOff val="35000"/>
+                </a:schemeClr>
+              </a:solidFill>
+              <a:latin typeface="+mn-lt"/>
+              <a:ea typeface="+mn-ea"/>
+              <a:cs typeface="+mn-cs"/>
+            </a:defRPr>
+          </a:pPr>
+          <a:endParaRPr lang="de-DE"/>
+        </a:p>
+      </c:txPr>
+    </c:legend>
+    <c:plotVisOnly val="1"/>
+    <c:dispBlanksAs val="gap"/>
+    <c:showDLblsOverMax val="0"/>
+    <c:extLst>
+      <c:ext xmlns:c16r3="http://schemas.microsoft.com/office/drawing/2017/03/chart" uri="{56B9EC1D-385E-4148-901F-78D8002777C0}">
+        <c16r3:dataDisplayOptions16>
+          <c16r3:dispNaAsBlank val="1"/>
+        </c16r3:dataDisplayOptions16>
+      </c:ext>
+    </c:extLst>
+  </c:chart>
+  <c:spPr>
+    <a:noFill/>
+    <a:ln>
+      <a:noFill/>
+    </a:ln>
+    <a:effectLst/>
+  </c:spPr>
+  <c:txPr>
+    <a:bodyPr/>
+    <a:lstStyle/>
+    <a:p>
+      <a:pPr>
+        <a:defRPr/>
+      </a:pPr>
+      <a:endParaRPr lang="de-DE"/>
+    </a:p>
+  </c:txPr>
+  <c:externalData r:id="rId3">
+    <c:autoUpdate val="0"/>
+  </c:externalData>
+</c:chartSpace>
+</file>
+
+<file path=ppt/charts/chart23.xml><?xml version="1.0" encoding="utf-8"?>
+<c:chartSpace xmlns:c="http://schemas.openxmlformats.org/drawingml/2006/chart" xmlns:a="http://schemas.openxmlformats.org/drawingml/2006/main" xmlns:r="http://schemas.openxmlformats.org/officeDocument/2006/relationships" xmlns:c16r2="http://schemas.microsoft.com/office/drawing/2015/06/chart">
+  <c:date1904 val="0"/>
+  <c:lang val="de-DE"/>
+  <c:roundedCorners val="0"/>
+  <mc:AlternateContent xmlns:mc="http://schemas.openxmlformats.org/markup-compatibility/2006">
+    <mc:Choice xmlns:c14="http://schemas.microsoft.com/office/drawing/2007/8/2/chart" Requires="c14">
+      <c14:style val="102"/>
+    </mc:Choice>
+    <mc:Fallback>
+      <c:style val="2"/>
+    </mc:Fallback>
+  </mc:AlternateContent>
+  <c:chart>
+    <c:autoTitleDeleted val="0"/>
+    <c:view3D>
+      <c:rotX val="15"/>
+      <c:rotY val="20"/>
+      <c:depthPercent val="100"/>
+      <c:rAngAx val="0"/>
+    </c:view3D>
+    <c:floor>
+      <c:thickness val="0"/>
+      <c:spPr>
+        <a:noFill/>
+        <a:ln w="9525" cap="flat" cmpd="sng" algn="ctr">
+          <a:solidFill>
+            <a:schemeClr val="tx1">
+              <a:lumMod val="15000"/>
+              <a:lumOff val="85000"/>
+            </a:schemeClr>
+          </a:solidFill>
+          <a:round/>
+        </a:ln>
+        <a:effectLst/>
+        <a:sp3d contourW="9525">
+          <a:contourClr>
+            <a:schemeClr val="tx1">
+              <a:lumMod val="15000"/>
+              <a:lumOff val="85000"/>
+            </a:schemeClr>
+          </a:contourClr>
+        </a:sp3d>
+      </c:spPr>
+    </c:floor>
+    <c:sideWall>
+      <c:thickness val="0"/>
+      <c:spPr>
+        <a:noFill/>
+        <a:ln>
+          <a:noFill/>
+        </a:ln>
+        <a:effectLst/>
+        <a:sp3d/>
+      </c:spPr>
+    </c:sideWall>
+    <c:backWall>
+      <c:thickness val="0"/>
+      <c:spPr>
+        <a:noFill/>
+        <a:ln>
+          <a:noFill/>
+        </a:ln>
+        <a:effectLst/>
+        <a:sp3d/>
+      </c:spPr>
+    </c:backWall>
+    <c:plotArea>
+      <c:layout/>
+      <c:area3DChart>
+        <c:grouping val="standard"/>
+        <c:varyColors val="0"/>
+        <c:ser>
+          <c:idx val="0"/>
+          <c:order val="0"/>
+          <c:tx>
+            <c:strRef>
+              <c:f>Tabelle1!$B$1</c:f>
+              <c:strCache>
+                <c:ptCount val="1"/>
+                <c:pt idx="0">
+                  <c:v>Datenreihe 1</c:v>
+                </c:pt>
+              </c:strCache>
+            </c:strRef>
+          </c:tx>
+          <c:spPr>
+            <a:solidFill>
+              <a:schemeClr val="accent1"/>
+            </a:solidFill>
+            <a:ln>
+              <a:noFill/>
+            </a:ln>
+            <a:effectLst/>
+            <a:sp3d/>
+          </c:spPr>
+          <c:dLbls>
+            <c:spPr>
+              <a:noFill/>
+              <a:ln>
+                <a:noFill/>
+              </a:ln>
+              <a:effectLst/>
+            </c:spPr>
+            <c:txPr>
+              <a:bodyPr rot="0" spcFirstLastPara="1" vertOverflow="ellipsis" vert="horz" wrap="square" lIns="38100" tIns="19050" rIns="38100" bIns="19050" anchor="ctr" anchorCtr="1">
+                <a:spAutoFit/>
+              </a:bodyPr>
+              <a:lstStyle/>
+              <a:p>
+                <a:pPr>
+                  <a:defRPr sz="1197" b="0" i="0" u="none" strike="noStrike" kern="1200" baseline="0">
+                    <a:solidFill>
+                      <a:schemeClr val="tx1">
+                        <a:lumMod val="75000"/>
+                        <a:lumOff val="25000"/>
+                      </a:schemeClr>
+                    </a:solidFill>
+                    <a:latin typeface="+mn-lt"/>
+                    <a:ea typeface="+mn-ea"/>
+                    <a:cs typeface="+mn-cs"/>
+                  </a:defRPr>
+                </a:pPr>
+                <a:endParaRPr lang="de-DE"/>
+              </a:p>
+            </c:txPr>
+            <c:showLegendKey val="0"/>
+            <c:showVal val="1"/>
+            <c:showCatName val="0"/>
+            <c:showSerName val="0"/>
+            <c:showPercent val="0"/>
+            <c:showBubbleSize val="0"/>
+            <c:showLeaderLines val="0"/>
+            <c:extLst>
+              <c:ext xmlns:c15="http://schemas.microsoft.com/office/drawing/2012/chart" uri="{CE6537A1-D6FC-4f65-9D91-7224C49458BB}">
+                <c15:showLeaderLines val="1"/>
+                <c15:leaderLines>
+                  <c:spPr>
+                    <a:ln w="9525" cap="flat" cmpd="sng" algn="ctr">
+                      <a:solidFill>
+                        <a:schemeClr val="tx1">
+                          <a:lumMod val="35000"/>
+                          <a:lumOff val="65000"/>
+                        </a:schemeClr>
+                      </a:solidFill>
+                      <a:round/>
+                    </a:ln>
+                    <a:effectLst/>
+                  </c:spPr>
+                </c15:leaderLines>
+              </c:ext>
+            </c:extLst>
+          </c:dLbls>
+          <c:cat>
+            <c:numRef>
+              <c:f>Tabelle1!$A$2:$A$6</c:f>
+              <c:numCache>
+                <c:formatCode>m/d/yyyy</c:formatCode>
+                <c:ptCount val="5"/>
+                <c:pt idx="0">
+                  <c:v>37377</c:v>
+                </c:pt>
+                <c:pt idx="1">
+                  <c:v>37408</c:v>
+                </c:pt>
+                <c:pt idx="2">
+                  <c:v>37438</c:v>
+                </c:pt>
+                <c:pt idx="3">
+                  <c:v>37469</c:v>
+                </c:pt>
+                <c:pt idx="4">
+                  <c:v>37500</c:v>
+                </c:pt>
+              </c:numCache>
+            </c:numRef>
+          </c:cat>
+          <c:val>
+            <c:numRef>
+              <c:f>Tabelle1!$B$2:$B$6</c:f>
+              <c:numCache>
+                <c:formatCode>General</c:formatCode>
+                <c:ptCount val="5"/>
+                <c:pt idx="0">
+                  <c:v>32</c:v>
+                </c:pt>
+                <c:pt idx="1">
+                  <c:v>32</c:v>
+                </c:pt>
+                <c:pt idx="2">
+                  <c:v>28</c:v>
+                </c:pt>
+                <c:pt idx="3">
+                  <c:v>12</c:v>
+                </c:pt>
+                <c:pt idx="4">
+                  <c:v>15</c:v>
+                </c:pt>
+              </c:numCache>
+            </c:numRef>
+          </c:val>
+          <c:extLst>
+            <c:ext xmlns:c16="http://schemas.microsoft.com/office/drawing/2014/chart" uri="{C3380CC4-5D6E-409C-BE32-E72D297353CC}">
+              <c16:uniqueId val="{00000000-11ED-41A7-A1FF-65A1F156F5B0}"/>
+            </c:ext>
+          </c:extLst>
+        </c:ser>
+        <c:ser>
+          <c:idx val="1"/>
+          <c:order val="1"/>
+          <c:tx>
+            <c:strRef>
+              <c:f>Tabelle1!$C$1</c:f>
+              <c:strCache>
+                <c:ptCount val="1"/>
+                <c:pt idx="0">
+                  <c:v>Datenreihe 2</c:v>
+                </c:pt>
+              </c:strCache>
+            </c:strRef>
+          </c:tx>
+          <c:spPr>
+            <a:solidFill>
+              <a:schemeClr val="accent2"/>
+            </a:solidFill>
+            <a:ln>
+              <a:noFill/>
+            </a:ln>
+            <a:effectLst/>
+            <a:sp3d/>
+          </c:spPr>
+          <c:dLbls>
+            <c:spPr>
+              <a:noFill/>
+              <a:ln>
+                <a:noFill/>
+              </a:ln>
+              <a:effectLst/>
+            </c:spPr>
+            <c:txPr>
+              <a:bodyPr rot="0" spcFirstLastPara="1" vertOverflow="ellipsis" vert="horz" wrap="square" lIns="38100" tIns="19050" rIns="38100" bIns="19050" anchor="ctr" anchorCtr="1">
+                <a:spAutoFit/>
+              </a:bodyPr>
+              <a:lstStyle/>
+              <a:p>
+                <a:pPr>
+                  <a:defRPr sz="1197" b="0" i="0" u="none" strike="noStrike" kern="1200" baseline="0">
+                    <a:solidFill>
+                      <a:schemeClr val="tx1">
+                        <a:lumMod val="75000"/>
+                        <a:lumOff val="25000"/>
+                      </a:schemeClr>
+                    </a:solidFill>
+                    <a:latin typeface="+mn-lt"/>
+                    <a:ea typeface="+mn-ea"/>
+                    <a:cs typeface="+mn-cs"/>
+                  </a:defRPr>
+                </a:pPr>
+                <a:endParaRPr lang="de-DE"/>
+              </a:p>
+            </c:txPr>
+            <c:showLegendKey val="0"/>
+            <c:showVal val="1"/>
+            <c:showCatName val="0"/>
+            <c:showSerName val="0"/>
+            <c:showPercent val="0"/>
+            <c:showBubbleSize val="0"/>
+            <c:showLeaderLines val="0"/>
+            <c:extLst>
+              <c:ext xmlns:c15="http://schemas.microsoft.com/office/drawing/2012/chart" uri="{CE6537A1-D6FC-4f65-9D91-7224C49458BB}">
+                <c15:showLeaderLines val="1"/>
+                <c15:leaderLines>
+                  <c:spPr>
+                    <a:ln w="9525" cap="flat" cmpd="sng" algn="ctr">
+                      <a:solidFill>
+                        <a:schemeClr val="tx1">
+                          <a:lumMod val="35000"/>
+                          <a:lumOff val="65000"/>
+                        </a:schemeClr>
+                      </a:solidFill>
+                      <a:round/>
+                    </a:ln>
+                    <a:effectLst/>
+                  </c:spPr>
+                </c15:leaderLines>
+              </c:ext>
+            </c:extLst>
+          </c:dLbls>
+          <c:cat>
+            <c:numRef>
+              <c:f>Tabelle1!$A$2:$A$6</c:f>
+              <c:numCache>
+                <c:formatCode>m/d/yyyy</c:formatCode>
+                <c:ptCount val="5"/>
+                <c:pt idx="0">
+                  <c:v>37377</c:v>
+                </c:pt>
+                <c:pt idx="1">
+                  <c:v>37408</c:v>
+                </c:pt>
+                <c:pt idx="2">
+                  <c:v>37438</c:v>
+                </c:pt>
+                <c:pt idx="3">
+                  <c:v>37469</c:v>
+                </c:pt>
+                <c:pt idx="4">
+                  <c:v>37500</c:v>
+                </c:pt>
+              </c:numCache>
+            </c:numRef>
+          </c:cat>
+          <c:val>
+            <c:numRef>
+              <c:f>Tabelle1!$C$2:$C$6</c:f>
+              <c:numCache>
+                <c:formatCode>General</c:formatCode>
+                <c:ptCount val="5"/>
+                <c:pt idx="0">
+                  <c:v>12</c:v>
+                </c:pt>
+                <c:pt idx="1">
+                  <c:v>12</c:v>
+                </c:pt>
+                <c:pt idx="2">
+                  <c:v>12</c:v>
+                </c:pt>
+                <c:pt idx="3">
+                  <c:v>21</c:v>
+                </c:pt>
+                <c:pt idx="4">
+                  <c:v>28</c:v>
+                </c:pt>
+              </c:numCache>
+            </c:numRef>
+          </c:val>
+          <c:extLst>
+            <c:ext xmlns:c16="http://schemas.microsoft.com/office/drawing/2014/chart" uri="{C3380CC4-5D6E-409C-BE32-E72D297353CC}">
+              <c16:uniqueId val="{00000001-11ED-41A7-A1FF-65A1F156F5B0}"/>
+            </c:ext>
+          </c:extLst>
+        </c:ser>
+        <c:dLbls>
+          <c:showLegendKey val="0"/>
+          <c:showVal val="0"/>
+          <c:showCatName val="0"/>
+          <c:showSerName val="0"/>
+          <c:showPercent val="0"/>
+          <c:showBubbleSize val="0"/>
+        </c:dLbls>
+        <c:axId val="13242032"/>
+        <c:axId val="15071216"/>
+        <c:axId val="1182791984"/>
+      </c:area3DChart>
+      <c:dateAx>
+        <c:axId val="13242032"/>
+        <c:scaling>
+          <c:orientation val="minMax"/>
+        </c:scaling>
+        <c:delete val="0"/>
+        <c:axPos val="b"/>
+        <c:numFmt formatCode="m/d/yyyy" sourceLinked="1"/>
+        <c:majorTickMark val="out"/>
+        <c:minorTickMark val="none"/>
+        <c:tickLblPos val="nextTo"/>
+        <c:spPr>
+          <a:noFill/>
+          <a:ln w="9525" cap="flat" cmpd="sng" algn="ctr">
+            <a:solidFill>
+              <a:schemeClr val="tx1">
+                <a:lumMod val="15000"/>
+                <a:lumOff val="85000"/>
+              </a:schemeClr>
+            </a:solidFill>
+            <a:round/>
+          </a:ln>
+          <a:effectLst/>
+        </c:spPr>
+        <c:txPr>
+          <a:bodyPr rot="-60000000" spcFirstLastPara="1" vertOverflow="ellipsis" vert="horz" wrap="square" anchor="ctr" anchorCtr="1"/>
+          <a:lstStyle/>
+          <a:p>
+            <a:pPr>
+              <a:defRPr sz="1197" b="0" i="0" u="none" strike="noStrike" kern="1200" baseline="0">
+                <a:solidFill>
+                  <a:schemeClr val="tx1">
+                    <a:lumMod val="65000"/>
+                    <a:lumOff val="35000"/>
+                  </a:schemeClr>
+                </a:solidFill>
+                <a:latin typeface="+mn-lt"/>
+                <a:ea typeface="+mn-ea"/>
+                <a:cs typeface="+mn-cs"/>
+              </a:defRPr>
+            </a:pPr>
+            <a:endParaRPr lang="de-DE"/>
+          </a:p>
+        </c:txPr>
+        <c:crossAx val="15071216"/>
+        <c:crosses val="autoZero"/>
+        <c:auto val="1"/>
+        <c:lblOffset val="100"/>
+        <c:baseTimeUnit val="months"/>
+      </c:dateAx>
+      <c:valAx>
+        <c:axId val="15071216"/>
+        <c:scaling>
+          <c:orientation val="minMax"/>
+        </c:scaling>
+        <c:delete val="0"/>
+        <c:axPos val="l"/>
+        <c:majorGridlines>
+          <c:spPr>
+            <a:ln w="9525" cap="flat" cmpd="sng" algn="ctr">
+              <a:solidFill>
+                <a:schemeClr val="tx1">
+                  <a:lumMod val="15000"/>
+                  <a:lumOff val="85000"/>
+                </a:schemeClr>
+              </a:solidFill>
+              <a:round/>
+            </a:ln>
+            <a:effectLst/>
+          </c:spPr>
+        </c:majorGridlines>
+        <c:numFmt formatCode="General" sourceLinked="1"/>
+        <c:majorTickMark val="none"/>
+        <c:minorTickMark val="none"/>
+        <c:tickLblPos val="nextTo"/>
+        <c:spPr>
+          <a:noFill/>
+          <a:ln>
+            <a:noFill/>
+          </a:ln>
+          <a:effectLst/>
+        </c:spPr>
+        <c:txPr>
+          <a:bodyPr rot="-60000000" spcFirstLastPara="1" vertOverflow="ellipsis" vert="horz" wrap="square" anchor="ctr" anchorCtr="1"/>
+          <a:lstStyle/>
+          <a:p>
+            <a:pPr>
+              <a:defRPr sz="1197" b="0" i="0" u="none" strike="noStrike" kern="1200" baseline="0">
+                <a:solidFill>
+                  <a:schemeClr val="tx1">
+                    <a:lumMod val="65000"/>
+                    <a:lumOff val="35000"/>
+                  </a:schemeClr>
+                </a:solidFill>
+                <a:latin typeface="+mn-lt"/>
+                <a:ea typeface="+mn-ea"/>
+                <a:cs typeface="+mn-cs"/>
+              </a:defRPr>
+            </a:pPr>
+            <a:endParaRPr lang="de-DE"/>
+          </a:p>
+        </c:txPr>
+        <c:crossAx val="13242032"/>
+        <c:crosses val="autoZero"/>
+        <c:crossBetween val="midCat"/>
+      </c:valAx>
+      <c:serAx>
+        <c:axId val="1182791984"/>
+        <c:scaling>
+          <c:orientation val="minMax"/>
+        </c:scaling>
+        <c:delete val="0"/>
+        <c:axPos val="b"/>
+        <c:majorTickMark val="out"/>
+        <c:minorTickMark val="none"/>
+        <c:tickLblPos val="nextTo"/>
+        <c:spPr>
+          <a:noFill/>
+          <a:ln w="9525" cap="flat" cmpd="sng" algn="ctr">
+            <a:solidFill>
+              <a:schemeClr val="tx1">
+                <a:lumMod val="15000"/>
+                <a:lumOff val="85000"/>
+              </a:schemeClr>
+            </a:solidFill>
+            <a:round/>
+          </a:ln>
+          <a:effectLst/>
+        </c:spPr>
+        <c:txPr>
+          <a:bodyPr rot="-60000000" spcFirstLastPara="1" vertOverflow="ellipsis" vert="horz" wrap="square" anchor="ctr" anchorCtr="1"/>
+          <a:lstStyle/>
+          <a:p>
+            <a:pPr>
+              <a:defRPr sz="1197" b="0" i="0" u="none" strike="noStrike" kern="1200" baseline="0">
+                <a:solidFill>
+                  <a:schemeClr val="tx1">
+                    <a:lumMod val="65000"/>
+                    <a:lumOff val="35000"/>
+                  </a:schemeClr>
+                </a:solidFill>
+                <a:latin typeface="+mn-lt"/>
+                <a:ea typeface="+mn-ea"/>
+                <a:cs typeface="+mn-cs"/>
+              </a:defRPr>
+            </a:pPr>
+            <a:endParaRPr lang="de-DE"/>
+          </a:p>
+        </c:txPr>
+        <c:crossAx val="15071216"/>
+        <c:crosses val="autoZero"/>
+      </c:serAx>
+      <c:spPr>
+        <a:noFill/>
+        <a:ln>
+          <a:noFill/>
+        </a:ln>
+        <a:effectLst/>
+      </c:spPr>
+    </c:plotArea>
+    <c:legend>
+      <c:legendPos val="b"/>
+      <c:overlay val="0"/>
+      <c:spPr>
+        <a:noFill/>
+        <a:ln>
+          <a:noFill/>
+        </a:ln>
+        <a:effectLst/>
+      </c:spPr>
+      <c:txPr>
+        <a:bodyPr rot="0" spcFirstLastPara="1" vertOverflow="ellipsis" vert="horz" wrap="square" anchor="ctr" anchorCtr="1"/>
+        <a:lstStyle/>
+        <a:p>
+          <a:pPr>
+            <a:defRPr sz="1197" b="0" i="0" u="none" strike="noStrike" kern="1200" baseline="0">
+              <a:solidFill>
+                <a:schemeClr val="tx1">
+                  <a:lumMod val="65000"/>
+                  <a:lumOff val="35000"/>
+                </a:schemeClr>
+              </a:solidFill>
+              <a:latin typeface="+mn-lt"/>
+              <a:ea typeface="+mn-ea"/>
+              <a:cs typeface="+mn-cs"/>
+            </a:defRPr>
+          </a:pPr>
+          <a:endParaRPr lang="de-DE"/>
+        </a:p>
+      </c:txPr>
+    </c:legend>
+    <c:plotVisOnly val="1"/>
+    <c:dispBlanksAs val="zero"/>
     <c:showDLblsOverMax val="0"/>
     <c:extLst>
       <c:ext xmlns:c16r3="http://schemas.microsoft.com/office/drawing/2017/03/chart" uri="{56B9EC1D-385E-4148-901F-78D8002777C0}">
@@ -6255,7 +8442,7 @@
           </c:val>
           <c:extLst>
             <c:ext xmlns:c16="http://schemas.microsoft.com/office/drawing/2014/chart" uri="{C3380CC4-5D6E-409C-BE32-E72D297353CC}">
-              <c16:uniqueId val="{00000000-E234-4975-9A48-FB779427741B}"/>
+              <c16:uniqueId val="{00000000-507A-414B-AC90-A026F29C43F3}"/>
             </c:ext>
           </c:extLst>
         </c:ser>
@@ -6327,7 +8514,7 @@
           </c:val>
           <c:extLst>
             <c:ext xmlns:c16="http://schemas.microsoft.com/office/drawing/2014/chart" uri="{C3380CC4-5D6E-409C-BE32-E72D297353CC}">
-              <c16:uniqueId val="{00000001-E234-4975-9A48-FB779427741B}"/>
+              <c16:uniqueId val="{00000001-507A-414B-AC90-A026F29C43F3}"/>
             </c:ext>
           </c:extLst>
         </c:ser>
@@ -6399,7 +8586,7 @@
           </c:val>
           <c:extLst>
             <c:ext xmlns:c16="http://schemas.microsoft.com/office/drawing/2014/chart" uri="{C3380CC4-5D6E-409C-BE32-E72D297353CC}">
-              <c16:uniqueId val="{00000002-E234-4975-9A48-FB779427741B}"/>
+              <c16:uniqueId val="{00000002-507A-414B-AC90-A026F29C43F3}"/>
             </c:ext>
           </c:extLst>
         </c:ser>
@@ -6413,12 +8600,12 @@
         </c:dLbls>
         <c:gapWidth val="150"/>
         <c:shape val="box"/>
-        <c:axId val="1343651936"/>
-        <c:axId val="1465969615"/>
+        <c:axId val="46132096"/>
+        <c:axId val="15002096"/>
         <c:axId val="0"/>
       </c:bar3DChart>
       <c:catAx>
-        <c:axId val="1343651936"/>
+        <c:axId val="46132096"/>
         <c:scaling>
           <c:orientation val="minMax"/>
         </c:scaling>
@@ -6455,7 +8642,7 @@
             <a:endParaRPr lang="de-DE"/>
           </a:p>
         </c:txPr>
-        <c:crossAx val="1465969615"/>
+        <c:crossAx val="15002096"/>
         <c:crosses val="autoZero"/>
         <c:auto val="1"/>
         <c:lblAlgn val="ctr"/>
@@ -6463,7 +8650,7 @@
         <c:noMultiLvlLbl val="0"/>
       </c:catAx>
       <c:valAx>
-        <c:axId val="1465969615"/>
+        <c:axId val="15002096"/>
         <c:scaling>
           <c:orientation val="minMax"/>
         </c:scaling>
@@ -6514,7 +8701,7 @@
             <a:endParaRPr lang="de-DE"/>
           </a:p>
         </c:txPr>
-        <c:crossAx val="1343651936"/>
+        <c:crossAx val="46132096"/>
         <c:crosses val="autoZero"/>
         <c:crossBetween val="between"/>
       </c:valAx>
@@ -6719,7 +8906,7 @@
           </c:val>
           <c:extLst>
             <c:ext xmlns:c16="http://schemas.microsoft.com/office/drawing/2014/chart" uri="{C3380CC4-5D6E-409C-BE32-E72D297353CC}">
-              <c16:uniqueId val="{00000000-938A-4B23-A086-B11F3E2C1FE9}"/>
+              <c16:uniqueId val="{00000000-3641-407F-9455-F86A2A0FCA3F}"/>
             </c:ext>
           </c:extLst>
         </c:ser>
@@ -6791,7 +8978,7 @@
           </c:val>
           <c:extLst>
             <c:ext xmlns:c16="http://schemas.microsoft.com/office/drawing/2014/chart" uri="{C3380CC4-5D6E-409C-BE32-E72D297353CC}">
-              <c16:uniqueId val="{00000001-938A-4B23-A086-B11F3E2C1FE9}"/>
+              <c16:uniqueId val="{00000001-3641-407F-9455-F86A2A0FCA3F}"/>
             </c:ext>
           </c:extLst>
         </c:ser>
@@ -6863,7 +9050,7 @@
           </c:val>
           <c:extLst>
             <c:ext xmlns:c16="http://schemas.microsoft.com/office/drawing/2014/chart" uri="{C3380CC4-5D6E-409C-BE32-E72D297353CC}">
-              <c16:uniqueId val="{00000002-938A-4B23-A086-B11F3E2C1FE9}"/>
+              <c16:uniqueId val="{00000002-3641-407F-9455-F86A2A0FCA3F}"/>
             </c:ext>
           </c:extLst>
         </c:ser>
@@ -6877,12 +9064,12 @@
         </c:dLbls>
         <c:gapWidth val="150"/>
         <c:shape val="box"/>
-        <c:axId val="1343654720"/>
-        <c:axId val="1465995535"/>
-        <c:axId val="1307042640"/>
+        <c:axId val="41649696"/>
+        <c:axId val="15004016"/>
+        <c:axId val="15200160"/>
       </c:bar3DChart>
       <c:catAx>
-        <c:axId val="1343654720"/>
+        <c:axId val="41649696"/>
         <c:scaling>
           <c:orientation val="minMax"/>
         </c:scaling>
@@ -6919,7 +9106,7 @@
             <a:endParaRPr lang="de-DE"/>
           </a:p>
         </c:txPr>
-        <c:crossAx val="1465995535"/>
+        <c:crossAx val="15004016"/>
         <c:crosses val="autoZero"/>
         <c:auto val="1"/>
         <c:lblAlgn val="ctr"/>
@@ -6927,7 +9114,7 @@
         <c:noMultiLvlLbl val="0"/>
       </c:catAx>
       <c:valAx>
-        <c:axId val="1465995535"/>
+        <c:axId val="15004016"/>
         <c:scaling>
           <c:orientation val="minMax"/>
         </c:scaling>
@@ -6978,12 +9165,12 @@
             <a:endParaRPr lang="de-DE"/>
           </a:p>
         </c:txPr>
-        <c:crossAx val="1343654720"/>
+        <c:crossAx val="41649696"/>
         <c:crosses val="autoZero"/>
         <c:crossBetween val="between"/>
       </c:valAx>
       <c:serAx>
-        <c:axId val="1307042640"/>
+        <c:axId val="15200160"/>
         <c:scaling>
           <c:orientation val="minMax"/>
         </c:scaling>
@@ -7019,7 +9206,7 @@
             <a:endParaRPr lang="de-DE"/>
           </a:p>
         </c:txPr>
-        <c:crossAx val="1465995535"/>
+        <c:crossAx val="15004016"/>
         <c:crosses val="autoZero"/>
       </c:serAx>
       <c:spPr>
@@ -7223,7 +9410,7 @@
           </c:val>
           <c:extLst>
             <c:ext xmlns:c16="http://schemas.microsoft.com/office/drawing/2014/chart" uri="{C3380CC4-5D6E-409C-BE32-E72D297353CC}">
-              <c16:uniqueId val="{00000000-5EF2-4C6F-AF84-2FFE8EA418C0}"/>
+              <c16:uniqueId val="{00000000-7614-465C-86AA-14C231F52753}"/>
             </c:ext>
           </c:extLst>
         </c:ser>
@@ -7295,7 +9482,7 @@
           </c:val>
           <c:extLst>
             <c:ext xmlns:c16="http://schemas.microsoft.com/office/drawing/2014/chart" uri="{C3380CC4-5D6E-409C-BE32-E72D297353CC}">
-              <c16:uniqueId val="{00000001-5EF2-4C6F-AF84-2FFE8EA418C0}"/>
+              <c16:uniqueId val="{00000001-7614-465C-86AA-14C231F52753}"/>
             </c:ext>
           </c:extLst>
         </c:ser>
@@ -7367,7 +9554,7 @@
           </c:val>
           <c:extLst>
             <c:ext xmlns:c16="http://schemas.microsoft.com/office/drawing/2014/chart" uri="{C3380CC4-5D6E-409C-BE32-E72D297353CC}">
-              <c16:uniqueId val="{00000002-5EF2-4C6F-AF84-2FFE8EA418C0}"/>
+              <c16:uniqueId val="{00000002-7614-465C-86AA-14C231F52753}"/>
             </c:ext>
           </c:extLst>
         </c:ser>
@@ -7381,12 +9568,12 @@
         </c:dLbls>
         <c:gapWidth val="150"/>
         <c:shape val="box"/>
-        <c:axId val="1343667248"/>
-        <c:axId val="1465987855"/>
+        <c:axId val="41658512"/>
+        <c:axId val="15011696"/>
         <c:axId val="0"/>
       </c:bar3DChart>
       <c:catAx>
-        <c:axId val="1343667248"/>
+        <c:axId val="41658512"/>
         <c:scaling>
           <c:orientation val="minMax"/>
         </c:scaling>
@@ -7423,7 +9610,7 @@
             <a:endParaRPr lang="de-DE"/>
           </a:p>
         </c:txPr>
-        <c:crossAx val="1465987855"/>
+        <c:crossAx val="15011696"/>
         <c:crosses val="autoZero"/>
         <c:auto val="1"/>
         <c:lblAlgn val="ctr"/>
@@ -7431,7 +9618,7 @@
         <c:noMultiLvlLbl val="0"/>
       </c:catAx>
       <c:valAx>
-        <c:axId val="1465987855"/>
+        <c:axId val="15011696"/>
         <c:scaling>
           <c:orientation val="minMax"/>
         </c:scaling>
@@ -7482,7 +9669,7 @@
             <a:endParaRPr lang="de-DE"/>
           </a:p>
         </c:txPr>
-        <c:crossAx val="1343667248"/>
+        <c:crossAx val="41658512"/>
         <c:crosses val="autoZero"/>
         <c:crossBetween val="between"/>
       </c:valAx>
@@ -7687,7 +9874,7 @@
           </c:val>
           <c:extLst>
             <c:ext xmlns:c16="http://schemas.microsoft.com/office/drawing/2014/chart" uri="{C3380CC4-5D6E-409C-BE32-E72D297353CC}">
-              <c16:uniqueId val="{00000000-EF01-4F6D-9FDB-B79860DBE9D9}"/>
+              <c16:uniqueId val="{00000000-DF82-4670-980B-4F38D822C27F}"/>
             </c:ext>
           </c:extLst>
         </c:ser>
@@ -7759,7 +9946,7 @@
           </c:val>
           <c:extLst>
             <c:ext xmlns:c16="http://schemas.microsoft.com/office/drawing/2014/chart" uri="{C3380CC4-5D6E-409C-BE32-E72D297353CC}">
-              <c16:uniqueId val="{00000001-EF01-4F6D-9FDB-B79860DBE9D9}"/>
+              <c16:uniqueId val="{00000001-DF82-4670-980B-4F38D822C27F}"/>
             </c:ext>
           </c:extLst>
         </c:ser>
@@ -7831,7 +10018,7 @@
           </c:val>
           <c:extLst>
             <c:ext xmlns:c16="http://schemas.microsoft.com/office/drawing/2014/chart" uri="{C3380CC4-5D6E-409C-BE32-E72D297353CC}">
-              <c16:uniqueId val="{00000002-EF01-4F6D-9FDB-B79860DBE9D9}"/>
+              <c16:uniqueId val="{00000002-DF82-4670-980B-4F38D822C27F}"/>
             </c:ext>
           </c:extLst>
         </c:ser>
@@ -7845,12 +10032,12 @@
         </c:dLbls>
         <c:gapWidth val="150"/>
         <c:shape val="box"/>
-        <c:axId val="1471686975"/>
-        <c:axId val="1466032495"/>
+        <c:axId val="41649232"/>
+        <c:axId val="15005456"/>
         <c:axId val="0"/>
       </c:bar3DChart>
       <c:catAx>
-        <c:axId val="1471686975"/>
+        <c:axId val="41649232"/>
         <c:scaling>
           <c:orientation val="minMax"/>
         </c:scaling>
@@ -7887,7 +10074,7 @@
             <a:endParaRPr lang="de-DE"/>
           </a:p>
         </c:txPr>
-        <c:crossAx val="1466032495"/>
+        <c:crossAx val="15005456"/>
         <c:crosses val="autoZero"/>
         <c:auto val="1"/>
         <c:lblAlgn val="ctr"/>
@@ -7895,7 +10082,7 @@
         <c:noMultiLvlLbl val="0"/>
       </c:catAx>
       <c:valAx>
-        <c:axId val="1466032495"/>
+        <c:axId val="15005456"/>
         <c:scaling>
           <c:orientation val="minMax"/>
         </c:scaling>
@@ -7946,7 +10133,7 @@
             <a:endParaRPr lang="de-DE"/>
           </a:p>
         </c:txPr>
-        <c:crossAx val="1471686975"/>
+        <c:crossAx val="41649232"/>
         <c:crosses val="autoZero"/>
         <c:crossBetween val="between"/>
       </c:valAx>
@@ -8218,7 +10405,7 @@
           </c:val>
           <c:extLst>
             <c:ext xmlns:c16="http://schemas.microsoft.com/office/drawing/2014/chart" uri="{C3380CC4-5D6E-409C-BE32-E72D297353CC}">
-              <c16:uniqueId val="{00000000-5554-4299-A77E-A07009D57B6B}"/>
+              <c16:uniqueId val="{00000000-8C0E-4287-B780-FA1B109FD535}"/>
             </c:ext>
           </c:extLst>
         </c:ser>
@@ -8501,7 +10688,7 @@
           </c:val>
           <c:extLst>
             <c:ext xmlns:c16="http://schemas.microsoft.com/office/drawing/2014/chart" uri="{C3380CC4-5D6E-409C-BE32-E72D297353CC}">
-              <c16:uniqueId val="{00000000-7734-4E0F-AD5A-0A54AFEDEF35}"/>
+              <c16:uniqueId val="{00000000-4CFB-4A41-8FE6-0397FEA62C67}"/>
             </c:ext>
           </c:extLst>
         </c:ser>
@@ -8734,7 +10921,7 @@
           </c:val>
           <c:extLst>
             <c:ext xmlns:c16="http://schemas.microsoft.com/office/drawing/2014/chart" uri="{C3380CC4-5D6E-409C-BE32-E72D297353CC}">
-              <c16:uniqueId val="{00000000-58A0-4DD8-8F0C-E4123E686647}"/>
+              <c16:uniqueId val="{00000000-5B5A-4182-A2F9-200D1B65039E}"/>
             </c:ext>
           </c:extLst>
         </c:ser>
@@ -8812,7 +10999,7 @@
           </c:val>
           <c:extLst>
             <c:ext xmlns:c16="http://schemas.microsoft.com/office/drawing/2014/chart" uri="{C3380CC4-5D6E-409C-BE32-E72D297353CC}">
-              <c16:uniqueId val="{00000001-58A0-4DD8-8F0C-E4123E686647}"/>
+              <c16:uniqueId val="{00000001-5B5A-4182-A2F9-200D1B65039E}"/>
             </c:ext>
           </c:extLst>
         </c:ser>
@@ -8824,12 +11011,12 @@
           <c:showPercent val="0"/>
           <c:showBubbleSize val="0"/>
         </c:dLbls>
-        <c:axId val="1471679551"/>
-        <c:axId val="1466057935"/>
-        <c:axId val="1307038720"/>
+        <c:axId val="11490768"/>
+        <c:axId val="15029936"/>
+        <c:axId val="1182787504"/>
       </c:area3DChart>
       <c:dateAx>
-        <c:axId val="1471679551"/>
+        <c:axId val="11490768"/>
         <c:scaling>
           <c:orientation val="minMax"/>
         </c:scaling>
@@ -8872,14 +11059,14 @@
             <a:endParaRPr lang="de-DE"/>
           </a:p>
         </c:txPr>
-        <c:crossAx val="1466057935"/>
+        <c:crossAx val="15029936"/>
         <c:crosses val="autoZero"/>
         <c:auto val="1"/>
         <c:lblOffset val="100"/>
         <c:baseTimeUnit val="months"/>
       </c:dateAx>
       <c:valAx>
-        <c:axId val="1466057935"/>
+        <c:axId val="15029936"/>
         <c:scaling>
           <c:orientation val="minMax"/>
         </c:scaling>
@@ -8930,12 +11117,12 @@
             <a:endParaRPr lang="de-DE"/>
           </a:p>
         </c:txPr>
-        <c:crossAx val="1471679551"/>
+        <c:crossAx val="11490768"/>
         <c:crosses val="autoZero"/>
         <c:crossBetween val="midCat"/>
       </c:valAx>
       <c:serAx>
-        <c:axId val="1307038720"/>
+        <c:axId val="1182787504"/>
         <c:scaling>
           <c:orientation val="minMax"/>
         </c:scaling>
@@ -8977,7 +11164,7 @@
             <a:endParaRPr lang="de-DE"/>
           </a:p>
         </c:txPr>
-        <c:crossAx val="1466057935"/>
+        <c:crossAx val="15029936"/>
         <c:crosses val="autoZero"/>
       </c:serAx>
       <c:spPr>
@@ -9413,7 +11600,167 @@
 </cs:colorStyle>
 </file>
 
+<file path=ppt/charts/colors18.xml><?xml version="1.0" encoding="utf-8"?>
+<cs:colorStyle xmlns:cs="http://schemas.microsoft.com/office/drawing/2012/chartStyle" xmlns:a="http://schemas.openxmlformats.org/drawingml/2006/main" meth="cycle" id="10">
+  <a:schemeClr val="accent1"/>
+  <a:schemeClr val="accent2"/>
+  <a:schemeClr val="accent3"/>
+  <a:schemeClr val="accent4"/>
+  <a:schemeClr val="accent5"/>
+  <a:schemeClr val="accent6"/>
+  <cs:variation/>
+  <cs:variation>
+    <a:lumMod val="60000"/>
+  </cs:variation>
+  <cs:variation>
+    <a:lumMod val="80000"/>
+    <a:lumOff val="20000"/>
+  </cs:variation>
+  <cs:variation>
+    <a:lumMod val="80000"/>
+  </cs:variation>
+  <cs:variation>
+    <a:lumMod val="60000"/>
+    <a:lumOff val="40000"/>
+  </cs:variation>
+  <cs:variation>
+    <a:lumMod val="50000"/>
+  </cs:variation>
+  <cs:variation>
+    <a:lumMod val="70000"/>
+    <a:lumOff val="30000"/>
+  </cs:variation>
+  <cs:variation>
+    <a:lumMod val="70000"/>
+  </cs:variation>
+  <cs:variation>
+    <a:lumMod val="50000"/>
+    <a:lumOff val="50000"/>
+  </cs:variation>
+</cs:colorStyle>
+</file>
+
+<file path=ppt/charts/colors19.xml><?xml version="1.0" encoding="utf-8"?>
+<cs:colorStyle xmlns:cs="http://schemas.microsoft.com/office/drawing/2012/chartStyle" xmlns:a="http://schemas.openxmlformats.org/drawingml/2006/main" meth="cycle" id="10">
+  <a:schemeClr val="accent1"/>
+  <a:schemeClr val="accent2"/>
+  <a:schemeClr val="accent3"/>
+  <a:schemeClr val="accent4"/>
+  <a:schemeClr val="accent5"/>
+  <a:schemeClr val="accent6"/>
+  <cs:variation/>
+  <cs:variation>
+    <a:lumMod val="60000"/>
+  </cs:variation>
+  <cs:variation>
+    <a:lumMod val="80000"/>
+    <a:lumOff val="20000"/>
+  </cs:variation>
+  <cs:variation>
+    <a:lumMod val="80000"/>
+  </cs:variation>
+  <cs:variation>
+    <a:lumMod val="60000"/>
+    <a:lumOff val="40000"/>
+  </cs:variation>
+  <cs:variation>
+    <a:lumMod val="50000"/>
+  </cs:variation>
+  <cs:variation>
+    <a:lumMod val="70000"/>
+    <a:lumOff val="30000"/>
+  </cs:variation>
+  <cs:variation>
+    <a:lumMod val="70000"/>
+  </cs:variation>
+  <cs:variation>
+    <a:lumMod val="50000"/>
+    <a:lumOff val="50000"/>
+  </cs:variation>
+</cs:colorStyle>
+</file>
+
 <file path=ppt/charts/colors2.xml><?xml version="1.0" encoding="utf-8"?>
+<cs:colorStyle xmlns:cs="http://schemas.microsoft.com/office/drawing/2012/chartStyle" xmlns:a="http://schemas.openxmlformats.org/drawingml/2006/main" meth="cycle" id="10">
+  <a:schemeClr val="accent1"/>
+  <a:schemeClr val="accent2"/>
+  <a:schemeClr val="accent3"/>
+  <a:schemeClr val="accent4"/>
+  <a:schemeClr val="accent5"/>
+  <a:schemeClr val="accent6"/>
+  <cs:variation/>
+  <cs:variation>
+    <a:lumMod val="60000"/>
+  </cs:variation>
+  <cs:variation>
+    <a:lumMod val="80000"/>
+    <a:lumOff val="20000"/>
+  </cs:variation>
+  <cs:variation>
+    <a:lumMod val="80000"/>
+  </cs:variation>
+  <cs:variation>
+    <a:lumMod val="60000"/>
+    <a:lumOff val="40000"/>
+  </cs:variation>
+  <cs:variation>
+    <a:lumMod val="50000"/>
+  </cs:variation>
+  <cs:variation>
+    <a:lumMod val="70000"/>
+    <a:lumOff val="30000"/>
+  </cs:variation>
+  <cs:variation>
+    <a:lumMod val="70000"/>
+  </cs:variation>
+  <cs:variation>
+    <a:lumMod val="50000"/>
+    <a:lumOff val="50000"/>
+  </cs:variation>
+</cs:colorStyle>
+</file>
+
+<file path=ppt/charts/colors20.xml><?xml version="1.0" encoding="utf-8"?>
+<cs:colorStyle xmlns:cs="http://schemas.microsoft.com/office/drawing/2012/chartStyle" xmlns:a="http://schemas.openxmlformats.org/drawingml/2006/main" meth="cycle" id="10">
+  <a:schemeClr val="accent1"/>
+  <a:schemeClr val="accent2"/>
+  <a:schemeClr val="accent3"/>
+  <a:schemeClr val="accent4"/>
+  <a:schemeClr val="accent5"/>
+  <a:schemeClr val="accent6"/>
+  <cs:variation/>
+  <cs:variation>
+    <a:lumMod val="60000"/>
+  </cs:variation>
+  <cs:variation>
+    <a:lumMod val="80000"/>
+    <a:lumOff val="20000"/>
+  </cs:variation>
+  <cs:variation>
+    <a:lumMod val="80000"/>
+  </cs:variation>
+  <cs:variation>
+    <a:lumMod val="60000"/>
+    <a:lumOff val="40000"/>
+  </cs:variation>
+  <cs:variation>
+    <a:lumMod val="50000"/>
+  </cs:variation>
+  <cs:variation>
+    <a:lumMod val="70000"/>
+    <a:lumOff val="30000"/>
+  </cs:variation>
+  <cs:variation>
+    <a:lumMod val="70000"/>
+  </cs:variation>
+  <cs:variation>
+    <a:lumMod val="50000"/>
+    <a:lumOff val="50000"/>
+  </cs:variation>
+</cs:colorStyle>
+</file>
+
+<file path=ppt/charts/colors21.xml><?xml version="1.0" encoding="utf-8"?>
 <cs:colorStyle xmlns:cs="http://schemas.microsoft.com/office/drawing/2012/chartStyle" xmlns:a="http://schemas.openxmlformats.org/drawingml/2006/main" meth="cycle" id="10">
   <a:schemeClr val="accent1"/>
   <a:schemeClr val="accent2"/>
@@ -14253,8 +16600,8 @@
 </cs:chartStyle>
 </file>
 
-<file path=ppt/charts/style2.xml><?xml version="1.0" encoding="utf-8"?>
-<cs:chartStyle xmlns:cs="http://schemas.microsoft.com/office/drawing/2012/chartStyle" xmlns:a="http://schemas.openxmlformats.org/drawingml/2006/main" id="286">
+<file path=ppt/charts/style18.xml><?xml version="1.0" encoding="utf-8"?>
+<cs:chartStyle xmlns:cs="http://schemas.microsoft.com/office/drawing/2012/chartStyle" xmlns:a="http://schemas.openxmlformats.org/drawingml/2006/main" id="262">
   <cs:axisTitle>
     <cs:lnRef idx="0"/>
     <cs:fillRef idx="0"/>
@@ -14277,6 +16624,17 @@
         <a:lumOff val="35000"/>
       </a:schemeClr>
     </cs:fontRef>
+    <cs:spPr>
+      <a:ln w="9525" cap="flat" cmpd="sng" algn="ctr">
+        <a:solidFill>
+          <a:schemeClr val="tx1">
+            <a:lumMod val="15000"/>
+            <a:lumOff val="85000"/>
+          </a:schemeClr>
+        </a:solidFill>
+        <a:round/>
+      </a:ln>
+    </cs:spPr>
     <cs:defRPr sz="1197" kern="1200"/>
   </cs:categoryAxis>
   <cs:chartArea mods="allowNoFillOverride allowNoLineOverride">
@@ -14300,7 +16658,7 @@
         <a:round/>
       </a:ln>
     </cs:spPr>
-    <cs:defRPr sz="1330" kern="1200"/>
+    <cs:defRPr sz="1197" kern="1200"/>
   </cs:chartArea>
   <cs:dataLabel>
     <cs:lnRef idx="0"/>
@@ -14351,6 +16709,13 @@
     <cs:fontRef idx="minor">
       <a:schemeClr val="tx1"/>
     </cs:fontRef>
+    <cs:spPr>
+      <a:ln w="19050">
+        <a:solidFill>
+          <a:schemeClr val="lt1"/>
+        </a:solidFill>
+      </a:ln>
+    </cs:spPr>
   </cs:dataPoint>
   <cs:dataPoint3D>
     <cs:lnRef idx="0"/>
@@ -14361,12 +16726,19 @@
     <cs:fontRef idx="minor">
       <a:schemeClr val="tx1"/>
     </cs:fontRef>
+    <cs:spPr>
+      <a:ln w="25400">
+        <a:solidFill>
+          <a:schemeClr val="lt1"/>
+        </a:solidFill>
+      </a:ln>
+    </cs:spPr>
   </cs:dataPoint3D>
   <cs:dataPointLine>
     <cs:lnRef idx="0">
       <cs:styleClr val="auto"/>
     </cs:lnRef>
-    <cs:fillRef idx="1"/>
+    <cs:fillRef idx="0"/>
     <cs:effectRef idx="0"/>
     <cs:fontRef idx="minor">
       <a:schemeClr val="tx1"/>
@@ -14404,7 +16776,7 @@
     <cs:lnRef idx="0">
       <cs:styleClr val="auto"/>
     </cs:lnRef>
-    <cs:fillRef idx="1"/>
+    <cs:fillRef idx="0"/>
     <cs:effectRef idx="0"/>
     <cs:fontRef idx="minor">
       <a:schemeClr val="tx1"/>
@@ -14633,6 +17005,2009 @@
         <a:lumOff val="35000"/>
       </a:schemeClr>
     </cs:fontRef>
+    <cs:defRPr sz="1197" kern="1200"/>
+  </cs:seriesAxis>
+  <cs:seriesLine>
+    <cs:lnRef idx="0"/>
+    <cs:fillRef idx="0"/>
+    <cs:effectRef idx="0"/>
+    <cs:fontRef idx="minor">
+      <a:schemeClr val="tx1"/>
+    </cs:fontRef>
+    <cs:spPr>
+      <a:ln w="9525" cap="flat" cmpd="sng" algn="ctr">
+        <a:solidFill>
+          <a:schemeClr val="tx1">
+            <a:lumMod val="35000"/>
+            <a:lumOff val="65000"/>
+          </a:schemeClr>
+        </a:solidFill>
+        <a:round/>
+      </a:ln>
+    </cs:spPr>
+  </cs:seriesLine>
+  <cs:title>
+    <cs:lnRef idx="0"/>
+    <cs:fillRef idx="0"/>
+    <cs:effectRef idx="0"/>
+    <cs:fontRef idx="minor">
+      <a:schemeClr val="tx1">
+        <a:lumMod val="65000"/>
+        <a:lumOff val="35000"/>
+      </a:schemeClr>
+    </cs:fontRef>
+    <cs:defRPr sz="1862" b="0" kern="1200" spc="0" baseline="0"/>
+  </cs:title>
+  <cs:trendline>
+    <cs:lnRef idx="0">
+      <cs:styleClr val="auto"/>
+    </cs:lnRef>
+    <cs:fillRef idx="0"/>
+    <cs:effectRef idx="0"/>
+    <cs:fontRef idx="minor">
+      <a:schemeClr val="tx1"/>
+    </cs:fontRef>
+    <cs:spPr>
+      <a:ln w="19050" cap="rnd">
+        <a:solidFill>
+          <a:schemeClr val="phClr"/>
+        </a:solidFill>
+        <a:prstDash val="sysDot"/>
+      </a:ln>
+    </cs:spPr>
+  </cs:trendline>
+  <cs:trendlineLabel>
+    <cs:lnRef idx="0"/>
+    <cs:fillRef idx="0"/>
+    <cs:effectRef idx="0"/>
+    <cs:fontRef idx="minor">
+      <a:schemeClr val="tx1">
+        <a:lumMod val="65000"/>
+        <a:lumOff val="35000"/>
+      </a:schemeClr>
+    </cs:fontRef>
+    <cs:defRPr sz="1197" kern="1200"/>
+  </cs:trendlineLabel>
+  <cs:upBar>
+    <cs:lnRef idx="0"/>
+    <cs:fillRef idx="0"/>
+    <cs:effectRef idx="0"/>
+    <cs:fontRef idx="minor">
+      <a:schemeClr val="tx1"/>
+    </cs:fontRef>
+    <cs:spPr>
+      <a:solidFill>
+        <a:schemeClr val="lt1"/>
+      </a:solidFill>
+      <a:ln w="9525" cap="flat" cmpd="sng" algn="ctr">
+        <a:solidFill>
+          <a:schemeClr val="tx1">
+            <a:lumMod val="65000"/>
+            <a:lumOff val="35000"/>
+          </a:schemeClr>
+        </a:solidFill>
+        <a:round/>
+      </a:ln>
+    </cs:spPr>
+  </cs:upBar>
+  <cs:valueAxis>
+    <cs:lnRef idx="0"/>
+    <cs:fillRef idx="0"/>
+    <cs:effectRef idx="0"/>
+    <cs:fontRef idx="minor">
+      <a:schemeClr val="tx1">
+        <a:lumMod val="65000"/>
+        <a:lumOff val="35000"/>
+      </a:schemeClr>
+    </cs:fontRef>
+    <cs:defRPr sz="1197" kern="1200"/>
+  </cs:valueAxis>
+  <cs:wall>
+    <cs:lnRef idx="0"/>
+    <cs:fillRef idx="0"/>
+    <cs:effectRef idx="0"/>
+    <cs:fontRef idx="minor">
+      <a:schemeClr val="tx1"/>
+    </cs:fontRef>
+    <cs:spPr>
+      <a:noFill/>
+      <a:ln>
+        <a:noFill/>
+      </a:ln>
+    </cs:spPr>
+  </cs:wall>
+</cs:chartStyle>
+</file>
+
+<file path=ppt/charts/style19.xml><?xml version="1.0" encoding="utf-8"?>
+<cs:chartStyle xmlns:cs="http://schemas.microsoft.com/office/drawing/2012/chartStyle" xmlns:a="http://schemas.openxmlformats.org/drawingml/2006/main" id="286">
+  <cs:axisTitle>
+    <cs:lnRef idx="0"/>
+    <cs:fillRef idx="0"/>
+    <cs:effectRef idx="0"/>
+    <cs:fontRef idx="minor">
+      <a:schemeClr val="tx1">
+        <a:lumMod val="65000"/>
+        <a:lumOff val="35000"/>
+      </a:schemeClr>
+    </cs:fontRef>
+    <cs:defRPr sz="1330" kern="1200"/>
+  </cs:axisTitle>
+  <cs:categoryAxis>
+    <cs:lnRef idx="0"/>
+    <cs:fillRef idx="0"/>
+    <cs:effectRef idx="0"/>
+    <cs:fontRef idx="minor">
+      <a:schemeClr val="tx1">
+        <a:lumMod val="65000"/>
+        <a:lumOff val="35000"/>
+      </a:schemeClr>
+    </cs:fontRef>
+    <cs:defRPr sz="1197" kern="1200"/>
+  </cs:categoryAxis>
+  <cs:chartArea mods="allowNoFillOverride allowNoLineOverride">
+    <cs:lnRef idx="0"/>
+    <cs:fillRef idx="0"/>
+    <cs:effectRef idx="0"/>
+    <cs:fontRef idx="minor">
+      <a:schemeClr val="tx1"/>
+    </cs:fontRef>
+    <cs:spPr>
+      <a:solidFill>
+        <a:schemeClr val="bg1"/>
+      </a:solidFill>
+      <a:ln w="9525" cap="flat" cmpd="sng" algn="ctr">
+        <a:solidFill>
+          <a:schemeClr val="tx1">
+            <a:lumMod val="15000"/>
+            <a:lumOff val="85000"/>
+          </a:schemeClr>
+        </a:solidFill>
+        <a:round/>
+      </a:ln>
+    </cs:spPr>
+    <cs:defRPr sz="1330" kern="1200"/>
+  </cs:chartArea>
+  <cs:dataLabel>
+    <cs:lnRef idx="0"/>
+    <cs:fillRef idx="0"/>
+    <cs:effectRef idx="0"/>
+    <cs:fontRef idx="minor">
+      <a:schemeClr val="tx1">
+        <a:lumMod val="75000"/>
+        <a:lumOff val="25000"/>
+      </a:schemeClr>
+    </cs:fontRef>
+    <cs:defRPr sz="1197" kern="1200"/>
+  </cs:dataLabel>
+  <cs:dataLabelCallout>
+    <cs:lnRef idx="0"/>
+    <cs:fillRef idx="0"/>
+    <cs:effectRef idx="0"/>
+    <cs:fontRef idx="minor">
+      <a:schemeClr val="dk1">
+        <a:lumMod val="65000"/>
+        <a:lumOff val="35000"/>
+      </a:schemeClr>
+    </cs:fontRef>
+    <cs:spPr>
+      <a:solidFill>
+        <a:schemeClr val="lt1"/>
+      </a:solidFill>
+      <a:ln>
+        <a:solidFill>
+          <a:schemeClr val="dk1">
+            <a:lumMod val="25000"/>
+            <a:lumOff val="75000"/>
+          </a:schemeClr>
+        </a:solidFill>
+      </a:ln>
+    </cs:spPr>
+    <cs:defRPr sz="1197" kern="1200"/>
+    <cs:bodyPr rot="0" spcFirstLastPara="1" vertOverflow="clip" horzOverflow="clip" vert="horz" wrap="square" lIns="36576" tIns="18288" rIns="36576" bIns="18288" anchor="ctr" anchorCtr="1">
+      <a:spAutoFit/>
+    </cs:bodyPr>
+  </cs:dataLabelCallout>
+  <cs:dataPoint>
+    <cs:lnRef idx="0"/>
+    <cs:fillRef idx="1">
+      <cs:styleClr val="auto"/>
+    </cs:fillRef>
+    <cs:effectRef idx="0"/>
+    <cs:fontRef idx="minor">
+      <a:schemeClr val="tx1"/>
+    </cs:fontRef>
+  </cs:dataPoint>
+  <cs:dataPoint3D>
+    <cs:lnRef idx="0"/>
+    <cs:fillRef idx="1">
+      <cs:styleClr val="auto"/>
+    </cs:fillRef>
+    <cs:effectRef idx="0"/>
+    <cs:fontRef idx="minor">
+      <a:schemeClr val="tx1"/>
+    </cs:fontRef>
+  </cs:dataPoint3D>
+  <cs:dataPointLine>
+    <cs:lnRef idx="0">
+      <cs:styleClr val="auto"/>
+    </cs:lnRef>
+    <cs:fillRef idx="1"/>
+    <cs:effectRef idx="0"/>
+    <cs:fontRef idx="minor">
+      <a:schemeClr val="tx1"/>
+    </cs:fontRef>
+    <cs:spPr>
+      <a:ln w="28575" cap="rnd">
+        <a:solidFill>
+          <a:schemeClr val="phClr"/>
+        </a:solidFill>
+        <a:round/>
+      </a:ln>
+    </cs:spPr>
+  </cs:dataPointLine>
+  <cs:dataPointMarker>
+    <cs:lnRef idx="0">
+      <cs:styleClr val="auto"/>
+    </cs:lnRef>
+    <cs:fillRef idx="1">
+      <cs:styleClr val="auto"/>
+    </cs:fillRef>
+    <cs:effectRef idx="0"/>
+    <cs:fontRef idx="minor">
+      <a:schemeClr val="tx1"/>
+    </cs:fontRef>
+    <cs:spPr>
+      <a:ln w="9525">
+        <a:solidFill>
+          <a:schemeClr val="phClr"/>
+        </a:solidFill>
+      </a:ln>
+    </cs:spPr>
+  </cs:dataPointMarker>
+  <cs:dataPointMarkerLayout symbol="circle" size="5"/>
+  <cs:dataPointWireframe>
+    <cs:lnRef idx="0">
+      <cs:styleClr val="auto"/>
+    </cs:lnRef>
+    <cs:fillRef idx="1"/>
+    <cs:effectRef idx="0"/>
+    <cs:fontRef idx="minor">
+      <a:schemeClr val="tx1"/>
+    </cs:fontRef>
+    <cs:spPr>
+      <a:ln w="9525" cap="rnd">
+        <a:solidFill>
+          <a:schemeClr val="phClr"/>
+        </a:solidFill>
+        <a:round/>
+      </a:ln>
+    </cs:spPr>
+  </cs:dataPointWireframe>
+  <cs:dataTable>
+    <cs:lnRef idx="0"/>
+    <cs:fillRef idx="0"/>
+    <cs:effectRef idx="0"/>
+    <cs:fontRef idx="minor">
+      <a:schemeClr val="tx1">
+        <a:lumMod val="65000"/>
+        <a:lumOff val="35000"/>
+      </a:schemeClr>
+    </cs:fontRef>
+    <cs:spPr>
+      <a:noFill/>
+      <a:ln w="9525" cap="flat" cmpd="sng" algn="ctr">
+        <a:solidFill>
+          <a:schemeClr val="tx1">
+            <a:lumMod val="15000"/>
+            <a:lumOff val="85000"/>
+          </a:schemeClr>
+        </a:solidFill>
+        <a:round/>
+      </a:ln>
+    </cs:spPr>
+    <cs:defRPr sz="1197" kern="1200"/>
+  </cs:dataTable>
+  <cs:downBar>
+    <cs:lnRef idx="0"/>
+    <cs:fillRef idx="0"/>
+    <cs:effectRef idx="0"/>
+    <cs:fontRef idx="minor">
+      <a:schemeClr val="tx1"/>
+    </cs:fontRef>
+    <cs:spPr>
+      <a:solidFill>
+        <a:schemeClr val="dk1">
+          <a:lumMod val="75000"/>
+          <a:lumOff val="25000"/>
+        </a:schemeClr>
+      </a:solidFill>
+      <a:ln w="9525" cap="flat" cmpd="sng" algn="ctr">
+        <a:solidFill>
+          <a:schemeClr val="tx1">
+            <a:lumMod val="65000"/>
+            <a:lumOff val="35000"/>
+          </a:schemeClr>
+        </a:solidFill>
+        <a:round/>
+      </a:ln>
+    </cs:spPr>
+  </cs:downBar>
+  <cs:dropLine>
+    <cs:lnRef idx="0"/>
+    <cs:fillRef idx="0"/>
+    <cs:effectRef idx="0"/>
+    <cs:fontRef idx="minor">
+      <a:schemeClr val="tx1"/>
+    </cs:fontRef>
+    <cs:spPr>
+      <a:ln w="9525" cap="flat" cmpd="sng" algn="ctr">
+        <a:solidFill>
+          <a:schemeClr val="tx1">
+            <a:lumMod val="35000"/>
+            <a:lumOff val="65000"/>
+          </a:schemeClr>
+        </a:solidFill>
+        <a:round/>
+      </a:ln>
+    </cs:spPr>
+  </cs:dropLine>
+  <cs:errorBar>
+    <cs:lnRef idx="0"/>
+    <cs:fillRef idx="0"/>
+    <cs:effectRef idx="0"/>
+    <cs:fontRef idx="minor">
+      <a:schemeClr val="tx1"/>
+    </cs:fontRef>
+    <cs:spPr>
+      <a:ln w="9525" cap="flat" cmpd="sng" algn="ctr">
+        <a:solidFill>
+          <a:schemeClr val="tx1">
+            <a:lumMod val="65000"/>
+            <a:lumOff val="35000"/>
+          </a:schemeClr>
+        </a:solidFill>
+        <a:round/>
+      </a:ln>
+    </cs:spPr>
+  </cs:errorBar>
+  <cs:floor>
+    <cs:lnRef idx="0"/>
+    <cs:fillRef idx="0"/>
+    <cs:effectRef idx="0"/>
+    <cs:fontRef idx="minor">
+      <a:schemeClr val="tx1"/>
+    </cs:fontRef>
+    <cs:spPr>
+      <a:noFill/>
+      <a:ln>
+        <a:noFill/>
+      </a:ln>
+    </cs:spPr>
+  </cs:floor>
+  <cs:gridlineMajor>
+    <cs:lnRef idx="0"/>
+    <cs:fillRef idx="0"/>
+    <cs:effectRef idx="0"/>
+    <cs:fontRef idx="minor">
+      <a:schemeClr val="tx1"/>
+    </cs:fontRef>
+    <cs:spPr>
+      <a:ln w="9525" cap="flat" cmpd="sng" algn="ctr">
+        <a:solidFill>
+          <a:schemeClr val="tx1">
+            <a:lumMod val="15000"/>
+            <a:lumOff val="85000"/>
+          </a:schemeClr>
+        </a:solidFill>
+        <a:round/>
+      </a:ln>
+    </cs:spPr>
+  </cs:gridlineMajor>
+  <cs:gridlineMinor>
+    <cs:lnRef idx="0"/>
+    <cs:fillRef idx="0"/>
+    <cs:effectRef idx="0"/>
+    <cs:fontRef idx="minor">
+      <a:schemeClr val="tx1"/>
+    </cs:fontRef>
+    <cs:spPr>
+      <a:ln w="9525" cap="flat" cmpd="sng" algn="ctr">
+        <a:solidFill>
+          <a:schemeClr val="tx1">
+            <a:lumMod val="5000"/>
+            <a:lumOff val="95000"/>
+          </a:schemeClr>
+        </a:solidFill>
+        <a:round/>
+      </a:ln>
+    </cs:spPr>
+  </cs:gridlineMinor>
+  <cs:hiLoLine>
+    <cs:lnRef idx="0"/>
+    <cs:fillRef idx="0"/>
+    <cs:effectRef idx="0"/>
+    <cs:fontRef idx="minor">
+      <a:schemeClr val="tx1"/>
+    </cs:fontRef>
+    <cs:spPr>
+      <a:ln w="9525" cap="flat" cmpd="sng" algn="ctr">
+        <a:solidFill>
+          <a:schemeClr val="tx1">
+            <a:lumMod val="50000"/>
+            <a:lumOff val="50000"/>
+          </a:schemeClr>
+        </a:solidFill>
+        <a:round/>
+      </a:ln>
+    </cs:spPr>
+  </cs:hiLoLine>
+  <cs:leaderLine>
+    <cs:lnRef idx="0"/>
+    <cs:fillRef idx="0"/>
+    <cs:effectRef idx="0"/>
+    <cs:fontRef idx="minor">
+      <a:schemeClr val="tx1"/>
+    </cs:fontRef>
+    <cs:spPr>
+      <a:ln w="9525" cap="flat" cmpd="sng" algn="ctr">
+        <a:solidFill>
+          <a:schemeClr val="tx1">
+            <a:lumMod val="35000"/>
+            <a:lumOff val="65000"/>
+          </a:schemeClr>
+        </a:solidFill>
+        <a:round/>
+      </a:ln>
+    </cs:spPr>
+  </cs:leaderLine>
+  <cs:legend>
+    <cs:lnRef idx="0"/>
+    <cs:fillRef idx="0"/>
+    <cs:effectRef idx="0"/>
+    <cs:fontRef idx="minor">
+      <a:schemeClr val="tx1">
+        <a:lumMod val="65000"/>
+        <a:lumOff val="35000"/>
+      </a:schemeClr>
+    </cs:fontRef>
+    <cs:defRPr sz="1197" kern="1200"/>
+  </cs:legend>
+  <cs:plotArea mods="allowNoFillOverride allowNoLineOverride">
+    <cs:lnRef idx="0"/>
+    <cs:fillRef idx="0"/>
+    <cs:effectRef idx="0"/>
+    <cs:fontRef idx="minor">
+      <a:schemeClr val="tx1"/>
+    </cs:fontRef>
+  </cs:plotArea>
+  <cs:plotArea3D mods="allowNoFillOverride allowNoLineOverride">
+    <cs:lnRef idx="0"/>
+    <cs:fillRef idx="0"/>
+    <cs:effectRef idx="0"/>
+    <cs:fontRef idx="minor">
+      <a:schemeClr val="tx1"/>
+    </cs:fontRef>
+  </cs:plotArea3D>
+  <cs:seriesAxis>
+    <cs:lnRef idx="0"/>
+    <cs:fillRef idx="0"/>
+    <cs:effectRef idx="0"/>
+    <cs:fontRef idx="minor">
+      <a:schemeClr val="tx1">
+        <a:lumMod val="65000"/>
+        <a:lumOff val="35000"/>
+      </a:schemeClr>
+    </cs:fontRef>
+    <cs:defRPr sz="1197" kern="1200"/>
+  </cs:seriesAxis>
+  <cs:seriesLine>
+    <cs:lnRef idx="0"/>
+    <cs:fillRef idx="0"/>
+    <cs:effectRef idx="0"/>
+    <cs:fontRef idx="minor">
+      <a:schemeClr val="tx1"/>
+    </cs:fontRef>
+    <cs:spPr>
+      <a:ln w="9525" cap="flat" cmpd="sng" algn="ctr">
+        <a:solidFill>
+          <a:schemeClr val="tx1">
+            <a:lumMod val="35000"/>
+            <a:lumOff val="65000"/>
+          </a:schemeClr>
+        </a:solidFill>
+        <a:round/>
+      </a:ln>
+    </cs:spPr>
+  </cs:seriesLine>
+  <cs:title>
+    <cs:lnRef idx="0"/>
+    <cs:fillRef idx="0"/>
+    <cs:effectRef idx="0"/>
+    <cs:fontRef idx="minor">
+      <a:schemeClr val="tx1">
+        <a:lumMod val="65000"/>
+        <a:lumOff val="35000"/>
+      </a:schemeClr>
+    </cs:fontRef>
+    <cs:defRPr sz="1862" b="0" kern="1200" spc="0" baseline="0"/>
+  </cs:title>
+  <cs:trendline>
+    <cs:lnRef idx="0">
+      <cs:styleClr val="auto"/>
+    </cs:lnRef>
+    <cs:fillRef idx="0"/>
+    <cs:effectRef idx="0"/>
+    <cs:fontRef idx="minor">
+      <a:schemeClr val="tx1"/>
+    </cs:fontRef>
+    <cs:spPr>
+      <a:ln w="19050" cap="rnd">
+        <a:solidFill>
+          <a:schemeClr val="phClr"/>
+        </a:solidFill>
+        <a:prstDash val="sysDot"/>
+      </a:ln>
+    </cs:spPr>
+  </cs:trendline>
+  <cs:trendlineLabel>
+    <cs:lnRef idx="0"/>
+    <cs:fillRef idx="0"/>
+    <cs:effectRef idx="0"/>
+    <cs:fontRef idx="minor">
+      <a:schemeClr val="tx1">
+        <a:lumMod val="65000"/>
+        <a:lumOff val="35000"/>
+      </a:schemeClr>
+    </cs:fontRef>
+    <cs:defRPr sz="1197" kern="1200"/>
+  </cs:trendlineLabel>
+  <cs:upBar>
+    <cs:lnRef idx="0"/>
+    <cs:fillRef idx="0"/>
+    <cs:effectRef idx="0"/>
+    <cs:fontRef idx="minor">
+      <a:schemeClr val="tx1"/>
+    </cs:fontRef>
+    <cs:spPr>
+      <a:solidFill>
+        <a:schemeClr val="lt1"/>
+      </a:solidFill>
+      <a:ln w="9525" cap="flat" cmpd="sng" algn="ctr">
+        <a:solidFill>
+          <a:schemeClr val="tx1">
+            <a:lumMod val="65000"/>
+            <a:lumOff val="35000"/>
+          </a:schemeClr>
+        </a:solidFill>
+        <a:round/>
+      </a:ln>
+    </cs:spPr>
+  </cs:upBar>
+  <cs:valueAxis>
+    <cs:lnRef idx="0"/>
+    <cs:fillRef idx="0"/>
+    <cs:effectRef idx="0"/>
+    <cs:fontRef idx="minor">
+      <a:schemeClr val="tx1">
+        <a:lumMod val="65000"/>
+        <a:lumOff val="35000"/>
+      </a:schemeClr>
+    </cs:fontRef>
+    <cs:defRPr sz="1197" kern="1200"/>
+  </cs:valueAxis>
+  <cs:wall>
+    <cs:lnRef idx="0"/>
+    <cs:fillRef idx="0"/>
+    <cs:effectRef idx="0"/>
+    <cs:fontRef idx="minor">
+      <a:schemeClr val="tx1"/>
+    </cs:fontRef>
+    <cs:spPr>
+      <a:noFill/>
+      <a:ln>
+        <a:noFill/>
+      </a:ln>
+    </cs:spPr>
+  </cs:wall>
+</cs:chartStyle>
+</file>
+
+<file path=ppt/charts/style2.xml><?xml version="1.0" encoding="utf-8"?>
+<cs:chartStyle xmlns:cs="http://schemas.microsoft.com/office/drawing/2012/chartStyle" xmlns:a="http://schemas.openxmlformats.org/drawingml/2006/main" id="286">
+  <cs:axisTitle>
+    <cs:lnRef idx="0"/>
+    <cs:fillRef idx="0"/>
+    <cs:effectRef idx="0"/>
+    <cs:fontRef idx="minor">
+      <a:schemeClr val="tx1">
+        <a:lumMod val="65000"/>
+        <a:lumOff val="35000"/>
+      </a:schemeClr>
+    </cs:fontRef>
+    <cs:defRPr sz="1330" kern="1200"/>
+  </cs:axisTitle>
+  <cs:categoryAxis>
+    <cs:lnRef idx="0"/>
+    <cs:fillRef idx="0"/>
+    <cs:effectRef idx="0"/>
+    <cs:fontRef idx="minor">
+      <a:schemeClr val="tx1">
+        <a:lumMod val="65000"/>
+        <a:lumOff val="35000"/>
+      </a:schemeClr>
+    </cs:fontRef>
+    <cs:defRPr sz="1197" kern="1200"/>
+  </cs:categoryAxis>
+  <cs:chartArea mods="allowNoFillOverride allowNoLineOverride">
+    <cs:lnRef idx="0"/>
+    <cs:fillRef idx="0"/>
+    <cs:effectRef idx="0"/>
+    <cs:fontRef idx="minor">
+      <a:schemeClr val="tx1"/>
+    </cs:fontRef>
+    <cs:spPr>
+      <a:solidFill>
+        <a:schemeClr val="bg1"/>
+      </a:solidFill>
+      <a:ln w="9525" cap="flat" cmpd="sng" algn="ctr">
+        <a:solidFill>
+          <a:schemeClr val="tx1">
+            <a:lumMod val="15000"/>
+            <a:lumOff val="85000"/>
+          </a:schemeClr>
+        </a:solidFill>
+        <a:round/>
+      </a:ln>
+    </cs:spPr>
+    <cs:defRPr sz="1330" kern="1200"/>
+  </cs:chartArea>
+  <cs:dataLabel>
+    <cs:lnRef idx="0"/>
+    <cs:fillRef idx="0"/>
+    <cs:effectRef idx="0"/>
+    <cs:fontRef idx="minor">
+      <a:schemeClr val="tx1">
+        <a:lumMod val="75000"/>
+        <a:lumOff val="25000"/>
+      </a:schemeClr>
+    </cs:fontRef>
+    <cs:defRPr sz="1197" kern="1200"/>
+  </cs:dataLabel>
+  <cs:dataLabelCallout>
+    <cs:lnRef idx="0"/>
+    <cs:fillRef idx="0"/>
+    <cs:effectRef idx="0"/>
+    <cs:fontRef idx="minor">
+      <a:schemeClr val="dk1">
+        <a:lumMod val="65000"/>
+        <a:lumOff val="35000"/>
+      </a:schemeClr>
+    </cs:fontRef>
+    <cs:spPr>
+      <a:solidFill>
+        <a:schemeClr val="lt1"/>
+      </a:solidFill>
+      <a:ln>
+        <a:solidFill>
+          <a:schemeClr val="dk1">
+            <a:lumMod val="25000"/>
+            <a:lumOff val="75000"/>
+          </a:schemeClr>
+        </a:solidFill>
+      </a:ln>
+    </cs:spPr>
+    <cs:defRPr sz="1197" kern="1200"/>
+    <cs:bodyPr rot="0" spcFirstLastPara="1" vertOverflow="clip" horzOverflow="clip" vert="horz" wrap="square" lIns="36576" tIns="18288" rIns="36576" bIns="18288" anchor="ctr" anchorCtr="1">
+      <a:spAutoFit/>
+    </cs:bodyPr>
+  </cs:dataLabelCallout>
+  <cs:dataPoint>
+    <cs:lnRef idx="0"/>
+    <cs:fillRef idx="1">
+      <cs:styleClr val="auto"/>
+    </cs:fillRef>
+    <cs:effectRef idx="0"/>
+    <cs:fontRef idx="minor">
+      <a:schemeClr val="tx1"/>
+    </cs:fontRef>
+  </cs:dataPoint>
+  <cs:dataPoint3D>
+    <cs:lnRef idx="0"/>
+    <cs:fillRef idx="1">
+      <cs:styleClr val="auto"/>
+    </cs:fillRef>
+    <cs:effectRef idx="0"/>
+    <cs:fontRef idx="minor">
+      <a:schemeClr val="tx1"/>
+    </cs:fontRef>
+  </cs:dataPoint3D>
+  <cs:dataPointLine>
+    <cs:lnRef idx="0">
+      <cs:styleClr val="auto"/>
+    </cs:lnRef>
+    <cs:fillRef idx="1"/>
+    <cs:effectRef idx="0"/>
+    <cs:fontRef idx="minor">
+      <a:schemeClr val="tx1"/>
+    </cs:fontRef>
+    <cs:spPr>
+      <a:ln w="28575" cap="rnd">
+        <a:solidFill>
+          <a:schemeClr val="phClr"/>
+        </a:solidFill>
+        <a:round/>
+      </a:ln>
+    </cs:spPr>
+  </cs:dataPointLine>
+  <cs:dataPointMarker>
+    <cs:lnRef idx="0">
+      <cs:styleClr val="auto"/>
+    </cs:lnRef>
+    <cs:fillRef idx="1">
+      <cs:styleClr val="auto"/>
+    </cs:fillRef>
+    <cs:effectRef idx="0"/>
+    <cs:fontRef idx="minor">
+      <a:schemeClr val="tx1"/>
+    </cs:fontRef>
+    <cs:spPr>
+      <a:ln w="9525">
+        <a:solidFill>
+          <a:schemeClr val="phClr"/>
+        </a:solidFill>
+      </a:ln>
+    </cs:spPr>
+  </cs:dataPointMarker>
+  <cs:dataPointMarkerLayout symbol="circle" size="5"/>
+  <cs:dataPointWireframe>
+    <cs:lnRef idx="0">
+      <cs:styleClr val="auto"/>
+    </cs:lnRef>
+    <cs:fillRef idx="1"/>
+    <cs:effectRef idx="0"/>
+    <cs:fontRef idx="minor">
+      <a:schemeClr val="tx1"/>
+    </cs:fontRef>
+    <cs:spPr>
+      <a:ln w="9525" cap="rnd">
+        <a:solidFill>
+          <a:schemeClr val="phClr"/>
+        </a:solidFill>
+        <a:round/>
+      </a:ln>
+    </cs:spPr>
+  </cs:dataPointWireframe>
+  <cs:dataTable>
+    <cs:lnRef idx="0"/>
+    <cs:fillRef idx="0"/>
+    <cs:effectRef idx="0"/>
+    <cs:fontRef idx="minor">
+      <a:schemeClr val="tx1">
+        <a:lumMod val="65000"/>
+        <a:lumOff val="35000"/>
+      </a:schemeClr>
+    </cs:fontRef>
+    <cs:spPr>
+      <a:noFill/>
+      <a:ln w="9525" cap="flat" cmpd="sng" algn="ctr">
+        <a:solidFill>
+          <a:schemeClr val="tx1">
+            <a:lumMod val="15000"/>
+            <a:lumOff val="85000"/>
+          </a:schemeClr>
+        </a:solidFill>
+        <a:round/>
+      </a:ln>
+    </cs:spPr>
+    <cs:defRPr sz="1197" kern="1200"/>
+  </cs:dataTable>
+  <cs:downBar>
+    <cs:lnRef idx="0"/>
+    <cs:fillRef idx="0"/>
+    <cs:effectRef idx="0"/>
+    <cs:fontRef idx="minor">
+      <a:schemeClr val="tx1"/>
+    </cs:fontRef>
+    <cs:spPr>
+      <a:solidFill>
+        <a:schemeClr val="dk1">
+          <a:lumMod val="75000"/>
+          <a:lumOff val="25000"/>
+        </a:schemeClr>
+      </a:solidFill>
+      <a:ln w="9525" cap="flat" cmpd="sng" algn="ctr">
+        <a:solidFill>
+          <a:schemeClr val="tx1">
+            <a:lumMod val="65000"/>
+            <a:lumOff val="35000"/>
+          </a:schemeClr>
+        </a:solidFill>
+        <a:round/>
+      </a:ln>
+    </cs:spPr>
+  </cs:downBar>
+  <cs:dropLine>
+    <cs:lnRef idx="0"/>
+    <cs:fillRef idx="0"/>
+    <cs:effectRef idx="0"/>
+    <cs:fontRef idx="minor">
+      <a:schemeClr val="tx1"/>
+    </cs:fontRef>
+    <cs:spPr>
+      <a:ln w="9525" cap="flat" cmpd="sng" algn="ctr">
+        <a:solidFill>
+          <a:schemeClr val="tx1">
+            <a:lumMod val="35000"/>
+            <a:lumOff val="65000"/>
+          </a:schemeClr>
+        </a:solidFill>
+        <a:round/>
+      </a:ln>
+    </cs:spPr>
+  </cs:dropLine>
+  <cs:errorBar>
+    <cs:lnRef idx="0"/>
+    <cs:fillRef idx="0"/>
+    <cs:effectRef idx="0"/>
+    <cs:fontRef idx="minor">
+      <a:schemeClr val="tx1"/>
+    </cs:fontRef>
+    <cs:spPr>
+      <a:ln w="9525" cap="flat" cmpd="sng" algn="ctr">
+        <a:solidFill>
+          <a:schemeClr val="tx1">
+            <a:lumMod val="65000"/>
+            <a:lumOff val="35000"/>
+          </a:schemeClr>
+        </a:solidFill>
+        <a:round/>
+      </a:ln>
+    </cs:spPr>
+  </cs:errorBar>
+  <cs:floor>
+    <cs:lnRef idx="0"/>
+    <cs:fillRef idx="0"/>
+    <cs:effectRef idx="0"/>
+    <cs:fontRef idx="minor">
+      <a:schemeClr val="tx1"/>
+    </cs:fontRef>
+    <cs:spPr>
+      <a:noFill/>
+      <a:ln>
+        <a:noFill/>
+      </a:ln>
+    </cs:spPr>
+  </cs:floor>
+  <cs:gridlineMajor>
+    <cs:lnRef idx="0"/>
+    <cs:fillRef idx="0"/>
+    <cs:effectRef idx="0"/>
+    <cs:fontRef idx="minor">
+      <a:schemeClr val="tx1"/>
+    </cs:fontRef>
+    <cs:spPr>
+      <a:ln w="9525" cap="flat" cmpd="sng" algn="ctr">
+        <a:solidFill>
+          <a:schemeClr val="tx1">
+            <a:lumMod val="15000"/>
+            <a:lumOff val="85000"/>
+          </a:schemeClr>
+        </a:solidFill>
+        <a:round/>
+      </a:ln>
+    </cs:spPr>
+  </cs:gridlineMajor>
+  <cs:gridlineMinor>
+    <cs:lnRef idx="0"/>
+    <cs:fillRef idx="0"/>
+    <cs:effectRef idx="0"/>
+    <cs:fontRef idx="minor">
+      <a:schemeClr val="tx1"/>
+    </cs:fontRef>
+    <cs:spPr>
+      <a:ln w="9525" cap="flat" cmpd="sng" algn="ctr">
+        <a:solidFill>
+          <a:schemeClr val="tx1">
+            <a:lumMod val="5000"/>
+            <a:lumOff val="95000"/>
+          </a:schemeClr>
+        </a:solidFill>
+        <a:round/>
+      </a:ln>
+    </cs:spPr>
+  </cs:gridlineMinor>
+  <cs:hiLoLine>
+    <cs:lnRef idx="0"/>
+    <cs:fillRef idx="0"/>
+    <cs:effectRef idx="0"/>
+    <cs:fontRef idx="minor">
+      <a:schemeClr val="tx1"/>
+    </cs:fontRef>
+    <cs:spPr>
+      <a:ln w="9525" cap="flat" cmpd="sng" algn="ctr">
+        <a:solidFill>
+          <a:schemeClr val="tx1">
+            <a:lumMod val="50000"/>
+            <a:lumOff val="50000"/>
+          </a:schemeClr>
+        </a:solidFill>
+        <a:round/>
+      </a:ln>
+    </cs:spPr>
+  </cs:hiLoLine>
+  <cs:leaderLine>
+    <cs:lnRef idx="0"/>
+    <cs:fillRef idx="0"/>
+    <cs:effectRef idx="0"/>
+    <cs:fontRef idx="minor">
+      <a:schemeClr val="tx1"/>
+    </cs:fontRef>
+    <cs:spPr>
+      <a:ln w="9525" cap="flat" cmpd="sng" algn="ctr">
+        <a:solidFill>
+          <a:schemeClr val="tx1">
+            <a:lumMod val="35000"/>
+            <a:lumOff val="65000"/>
+          </a:schemeClr>
+        </a:solidFill>
+        <a:round/>
+      </a:ln>
+    </cs:spPr>
+  </cs:leaderLine>
+  <cs:legend>
+    <cs:lnRef idx="0"/>
+    <cs:fillRef idx="0"/>
+    <cs:effectRef idx="0"/>
+    <cs:fontRef idx="minor">
+      <a:schemeClr val="tx1">
+        <a:lumMod val="65000"/>
+        <a:lumOff val="35000"/>
+      </a:schemeClr>
+    </cs:fontRef>
+    <cs:defRPr sz="1197" kern="1200"/>
+  </cs:legend>
+  <cs:plotArea mods="allowNoFillOverride allowNoLineOverride">
+    <cs:lnRef idx="0"/>
+    <cs:fillRef idx="0"/>
+    <cs:effectRef idx="0"/>
+    <cs:fontRef idx="minor">
+      <a:schemeClr val="tx1"/>
+    </cs:fontRef>
+  </cs:plotArea>
+  <cs:plotArea3D mods="allowNoFillOverride allowNoLineOverride">
+    <cs:lnRef idx="0"/>
+    <cs:fillRef idx="0"/>
+    <cs:effectRef idx="0"/>
+    <cs:fontRef idx="minor">
+      <a:schemeClr val="tx1"/>
+    </cs:fontRef>
+  </cs:plotArea3D>
+  <cs:seriesAxis>
+    <cs:lnRef idx="0"/>
+    <cs:fillRef idx="0"/>
+    <cs:effectRef idx="0"/>
+    <cs:fontRef idx="minor">
+      <a:schemeClr val="tx1">
+        <a:lumMod val="65000"/>
+        <a:lumOff val="35000"/>
+      </a:schemeClr>
+    </cs:fontRef>
+    <cs:defRPr sz="1197" kern="1200"/>
+  </cs:seriesAxis>
+  <cs:seriesLine>
+    <cs:lnRef idx="0"/>
+    <cs:fillRef idx="0"/>
+    <cs:effectRef idx="0"/>
+    <cs:fontRef idx="minor">
+      <a:schemeClr val="tx1"/>
+    </cs:fontRef>
+    <cs:spPr>
+      <a:ln w="9525" cap="flat" cmpd="sng" algn="ctr">
+        <a:solidFill>
+          <a:schemeClr val="tx1">
+            <a:lumMod val="35000"/>
+            <a:lumOff val="65000"/>
+          </a:schemeClr>
+        </a:solidFill>
+        <a:round/>
+      </a:ln>
+    </cs:spPr>
+  </cs:seriesLine>
+  <cs:title>
+    <cs:lnRef idx="0"/>
+    <cs:fillRef idx="0"/>
+    <cs:effectRef idx="0"/>
+    <cs:fontRef idx="minor">
+      <a:schemeClr val="tx1">
+        <a:lumMod val="65000"/>
+        <a:lumOff val="35000"/>
+      </a:schemeClr>
+    </cs:fontRef>
+    <cs:defRPr sz="1862" b="0" kern="1200" spc="0" baseline="0"/>
+  </cs:title>
+  <cs:trendline>
+    <cs:lnRef idx="0">
+      <cs:styleClr val="auto"/>
+    </cs:lnRef>
+    <cs:fillRef idx="0"/>
+    <cs:effectRef idx="0"/>
+    <cs:fontRef idx="minor">
+      <a:schemeClr val="tx1"/>
+    </cs:fontRef>
+    <cs:spPr>
+      <a:ln w="19050" cap="rnd">
+        <a:solidFill>
+          <a:schemeClr val="phClr"/>
+        </a:solidFill>
+        <a:prstDash val="sysDot"/>
+      </a:ln>
+    </cs:spPr>
+  </cs:trendline>
+  <cs:trendlineLabel>
+    <cs:lnRef idx="0"/>
+    <cs:fillRef idx="0"/>
+    <cs:effectRef idx="0"/>
+    <cs:fontRef idx="minor">
+      <a:schemeClr val="tx1">
+        <a:lumMod val="65000"/>
+        <a:lumOff val="35000"/>
+      </a:schemeClr>
+    </cs:fontRef>
+    <cs:defRPr sz="1197" kern="1200"/>
+  </cs:trendlineLabel>
+  <cs:upBar>
+    <cs:lnRef idx="0"/>
+    <cs:fillRef idx="0"/>
+    <cs:effectRef idx="0"/>
+    <cs:fontRef idx="minor">
+      <a:schemeClr val="tx1"/>
+    </cs:fontRef>
+    <cs:spPr>
+      <a:solidFill>
+        <a:schemeClr val="lt1"/>
+      </a:solidFill>
+      <a:ln w="9525" cap="flat" cmpd="sng" algn="ctr">
+        <a:solidFill>
+          <a:schemeClr val="tx1">
+            <a:lumMod val="65000"/>
+            <a:lumOff val="35000"/>
+          </a:schemeClr>
+        </a:solidFill>
+        <a:round/>
+      </a:ln>
+    </cs:spPr>
+  </cs:upBar>
+  <cs:valueAxis>
+    <cs:lnRef idx="0"/>
+    <cs:fillRef idx="0"/>
+    <cs:effectRef idx="0"/>
+    <cs:fontRef idx="minor">
+      <a:schemeClr val="tx1">
+        <a:lumMod val="65000"/>
+        <a:lumOff val="35000"/>
+      </a:schemeClr>
+    </cs:fontRef>
+    <cs:defRPr sz="1197" kern="1200"/>
+  </cs:valueAxis>
+  <cs:wall>
+    <cs:lnRef idx="0"/>
+    <cs:fillRef idx="0"/>
+    <cs:effectRef idx="0"/>
+    <cs:fontRef idx="minor">
+      <a:schemeClr val="tx1"/>
+    </cs:fontRef>
+    <cs:spPr>
+      <a:noFill/>
+      <a:ln>
+        <a:noFill/>
+      </a:ln>
+    </cs:spPr>
+  </cs:wall>
+</cs:chartStyle>
+</file>
+
+<file path=ppt/charts/style20.xml><?xml version="1.0" encoding="utf-8"?>
+<cs:chartStyle xmlns:cs="http://schemas.microsoft.com/office/drawing/2012/chartStyle" xmlns:a="http://schemas.openxmlformats.org/drawingml/2006/main" id="286">
+  <cs:axisTitle>
+    <cs:lnRef idx="0"/>
+    <cs:fillRef idx="0"/>
+    <cs:effectRef idx="0"/>
+    <cs:fontRef idx="minor">
+      <a:schemeClr val="tx1">
+        <a:lumMod val="65000"/>
+        <a:lumOff val="35000"/>
+      </a:schemeClr>
+    </cs:fontRef>
+    <cs:defRPr sz="1330" kern="1200"/>
+  </cs:axisTitle>
+  <cs:categoryAxis>
+    <cs:lnRef idx="0"/>
+    <cs:fillRef idx="0"/>
+    <cs:effectRef idx="0"/>
+    <cs:fontRef idx="minor">
+      <a:schemeClr val="tx1">
+        <a:lumMod val="65000"/>
+        <a:lumOff val="35000"/>
+      </a:schemeClr>
+    </cs:fontRef>
+    <cs:defRPr sz="1197" kern="1200"/>
+  </cs:categoryAxis>
+  <cs:chartArea mods="allowNoFillOverride allowNoLineOverride">
+    <cs:lnRef idx="0"/>
+    <cs:fillRef idx="0"/>
+    <cs:effectRef idx="0"/>
+    <cs:fontRef idx="minor">
+      <a:schemeClr val="tx1"/>
+    </cs:fontRef>
+    <cs:spPr>
+      <a:solidFill>
+        <a:schemeClr val="bg1"/>
+      </a:solidFill>
+      <a:ln w="9525" cap="flat" cmpd="sng" algn="ctr">
+        <a:solidFill>
+          <a:schemeClr val="tx1">
+            <a:lumMod val="15000"/>
+            <a:lumOff val="85000"/>
+          </a:schemeClr>
+        </a:solidFill>
+        <a:round/>
+      </a:ln>
+    </cs:spPr>
+    <cs:defRPr sz="1330" kern="1200"/>
+  </cs:chartArea>
+  <cs:dataLabel>
+    <cs:lnRef idx="0"/>
+    <cs:fillRef idx="0"/>
+    <cs:effectRef idx="0"/>
+    <cs:fontRef idx="minor">
+      <a:schemeClr val="tx1">
+        <a:lumMod val="75000"/>
+        <a:lumOff val="25000"/>
+      </a:schemeClr>
+    </cs:fontRef>
+    <cs:defRPr sz="1197" kern="1200"/>
+  </cs:dataLabel>
+  <cs:dataLabelCallout>
+    <cs:lnRef idx="0"/>
+    <cs:fillRef idx="0"/>
+    <cs:effectRef idx="0"/>
+    <cs:fontRef idx="minor">
+      <a:schemeClr val="dk1">
+        <a:lumMod val="65000"/>
+        <a:lumOff val="35000"/>
+      </a:schemeClr>
+    </cs:fontRef>
+    <cs:spPr>
+      <a:solidFill>
+        <a:schemeClr val="lt1"/>
+      </a:solidFill>
+      <a:ln>
+        <a:solidFill>
+          <a:schemeClr val="dk1">
+            <a:lumMod val="25000"/>
+            <a:lumOff val="75000"/>
+          </a:schemeClr>
+        </a:solidFill>
+      </a:ln>
+    </cs:spPr>
+    <cs:defRPr sz="1197" kern="1200"/>
+    <cs:bodyPr rot="0" spcFirstLastPara="1" vertOverflow="clip" horzOverflow="clip" vert="horz" wrap="square" lIns="36576" tIns="18288" rIns="36576" bIns="18288" anchor="ctr" anchorCtr="1">
+      <a:spAutoFit/>
+    </cs:bodyPr>
+  </cs:dataLabelCallout>
+  <cs:dataPoint>
+    <cs:lnRef idx="0"/>
+    <cs:fillRef idx="1">
+      <cs:styleClr val="auto"/>
+    </cs:fillRef>
+    <cs:effectRef idx="0"/>
+    <cs:fontRef idx="minor">
+      <a:schemeClr val="tx1"/>
+    </cs:fontRef>
+  </cs:dataPoint>
+  <cs:dataPoint3D>
+    <cs:lnRef idx="0"/>
+    <cs:fillRef idx="1">
+      <cs:styleClr val="auto"/>
+    </cs:fillRef>
+    <cs:effectRef idx="0"/>
+    <cs:fontRef idx="minor">
+      <a:schemeClr val="tx1"/>
+    </cs:fontRef>
+  </cs:dataPoint3D>
+  <cs:dataPointLine>
+    <cs:lnRef idx="0">
+      <cs:styleClr val="auto"/>
+    </cs:lnRef>
+    <cs:fillRef idx="1"/>
+    <cs:effectRef idx="0"/>
+    <cs:fontRef idx="minor">
+      <a:schemeClr val="tx1"/>
+    </cs:fontRef>
+    <cs:spPr>
+      <a:ln w="28575" cap="rnd">
+        <a:solidFill>
+          <a:schemeClr val="phClr"/>
+        </a:solidFill>
+        <a:round/>
+      </a:ln>
+    </cs:spPr>
+  </cs:dataPointLine>
+  <cs:dataPointMarker>
+    <cs:lnRef idx="0">
+      <cs:styleClr val="auto"/>
+    </cs:lnRef>
+    <cs:fillRef idx="1">
+      <cs:styleClr val="auto"/>
+    </cs:fillRef>
+    <cs:effectRef idx="0"/>
+    <cs:fontRef idx="minor">
+      <a:schemeClr val="tx1"/>
+    </cs:fontRef>
+    <cs:spPr>
+      <a:ln w="9525">
+        <a:solidFill>
+          <a:schemeClr val="phClr"/>
+        </a:solidFill>
+      </a:ln>
+    </cs:spPr>
+  </cs:dataPointMarker>
+  <cs:dataPointMarkerLayout symbol="circle" size="5"/>
+  <cs:dataPointWireframe>
+    <cs:lnRef idx="0">
+      <cs:styleClr val="auto"/>
+    </cs:lnRef>
+    <cs:fillRef idx="1"/>
+    <cs:effectRef idx="0"/>
+    <cs:fontRef idx="minor">
+      <a:schemeClr val="tx1"/>
+    </cs:fontRef>
+    <cs:spPr>
+      <a:ln w="9525" cap="rnd">
+        <a:solidFill>
+          <a:schemeClr val="phClr"/>
+        </a:solidFill>
+        <a:round/>
+      </a:ln>
+    </cs:spPr>
+  </cs:dataPointWireframe>
+  <cs:dataTable>
+    <cs:lnRef idx="0"/>
+    <cs:fillRef idx="0"/>
+    <cs:effectRef idx="0"/>
+    <cs:fontRef idx="minor">
+      <a:schemeClr val="tx1">
+        <a:lumMod val="65000"/>
+        <a:lumOff val="35000"/>
+      </a:schemeClr>
+    </cs:fontRef>
+    <cs:spPr>
+      <a:noFill/>
+      <a:ln w="9525" cap="flat" cmpd="sng" algn="ctr">
+        <a:solidFill>
+          <a:schemeClr val="tx1">
+            <a:lumMod val="15000"/>
+            <a:lumOff val="85000"/>
+          </a:schemeClr>
+        </a:solidFill>
+        <a:round/>
+      </a:ln>
+    </cs:spPr>
+    <cs:defRPr sz="1197" kern="1200"/>
+  </cs:dataTable>
+  <cs:downBar>
+    <cs:lnRef idx="0"/>
+    <cs:fillRef idx="0"/>
+    <cs:effectRef idx="0"/>
+    <cs:fontRef idx="minor">
+      <a:schemeClr val="tx1"/>
+    </cs:fontRef>
+    <cs:spPr>
+      <a:solidFill>
+        <a:schemeClr val="dk1">
+          <a:lumMod val="75000"/>
+          <a:lumOff val="25000"/>
+        </a:schemeClr>
+      </a:solidFill>
+      <a:ln w="9525" cap="flat" cmpd="sng" algn="ctr">
+        <a:solidFill>
+          <a:schemeClr val="tx1">
+            <a:lumMod val="65000"/>
+            <a:lumOff val="35000"/>
+          </a:schemeClr>
+        </a:solidFill>
+        <a:round/>
+      </a:ln>
+    </cs:spPr>
+  </cs:downBar>
+  <cs:dropLine>
+    <cs:lnRef idx="0"/>
+    <cs:fillRef idx="0"/>
+    <cs:effectRef idx="0"/>
+    <cs:fontRef idx="minor">
+      <a:schemeClr val="tx1"/>
+    </cs:fontRef>
+    <cs:spPr>
+      <a:ln w="9525" cap="flat" cmpd="sng" algn="ctr">
+        <a:solidFill>
+          <a:schemeClr val="tx1">
+            <a:lumMod val="35000"/>
+            <a:lumOff val="65000"/>
+          </a:schemeClr>
+        </a:solidFill>
+        <a:round/>
+      </a:ln>
+    </cs:spPr>
+  </cs:dropLine>
+  <cs:errorBar>
+    <cs:lnRef idx="0"/>
+    <cs:fillRef idx="0"/>
+    <cs:effectRef idx="0"/>
+    <cs:fontRef idx="minor">
+      <a:schemeClr val="tx1"/>
+    </cs:fontRef>
+    <cs:spPr>
+      <a:ln w="9525" cap="flat" cmpd="sng" algn="ctr">
+        <a:solidFill>
+          <a:schemeClr val="tx1">
+            <a:lumMod val="65000"/>
+            <a:lumOff val="35000"/>
+          </a:schemeClr>
+        </a:solidFill>
+        <a:round/>
+      </a:ln>
+    </cs:spPr>
+  </cs:errorBar>
+  <cs:floor>
+    <cs:lnRef idx="0"/>
+    <cs:fillRef idx="0"/>
+    <cs:effectRef idx="0"/>
+    <cs:fontRef idx="minor">
+      <a:schemeClr val="tx1"/>
+    </cs:fontRef>
+    <cs:spPr>
+      <a:noFill/>
+      <a:ln>
+        <a:noFill/>
+      </a:ln>
+    </cs:spPr>
+  </cs:floor>
+  <cs:gridlineMajor>
+    <cs:lnRef idx="0"/>
+    <cs:fillRef idx="0"/>
+    <cs:effectRef idx="0"/>
+    <cs:fontRef idx="minor">
+      <a:schemeClr val="tx1"/>
+    </cs:fontRef>
+    <cs:spPr>
+      <a:ln w="9525" cap="flat" cmpd="sng" algn="ctr">
+        <a:solidFill>
+          <a:schemeClr val="tx1">
+            <a:lumMod val="15000"/>
+            <a:lumOff val="85000"/>
+          </a:schemeClr>
+        </a:solidFill>
+        <a:round/>
+      </a:ln>
+    </cs:spPr>
+  </cs:gridlineMajor>
+  <cs:gridlineMinor>
+    <cs:lnRef idx="0"/>
+    <cs:fillRef idx="0"/>
+    <cs:effectRef idx="0"/>
+    <cs:fontRef idx="minor">
+      <a:schemeClr val="tx1"/>
+    </cs:fontRef>
+    <cs:spPr>
+      <a:ln w="9525" cap="flat" cmpd="sng" algn="ctr">
+        <a:solidFill>
+          <a:schemeClr val="tx1">
+            <a:lumMod val="5000"/>
+            <a:lumOff val="95000"/>
+          </a:schemeClr>
+        </a:solidFill>
+        <a:round/>
+      </a:ln>
+    </cs:spPr>
+  </cs:gridlineMinor>
+  <cs:hiLoLine>
+    <cs:lnRef idx="0"/>
+    <cs:fillRef idx="0"/>
+    <cs:effectRef idx="0"/>
+    <cs:fontRef idx="minor">
+      <a:schemeClr val="tx1"/>
+    </cs:fontRef>
+    <cs:spPr>
+      <a:ln w="9525" cap="flat" cmpd="sng" algn="ctr">
+        <a:solidFill>
+          <a:schemeClr val="tx1">
+            <a:lumMod val="50000"/>
+            <a:lumOff val="50000"/>
+          </a:schemeClr>
+        </a:solidFill>
+        <a:round/>
+      </a:ln>
+    </cs:spPr>
+  </cs:hiLoLine>
+  <cs:leaderLine>
+    <cs:lnRef idx="0"/>
+    <cs:fillRef idx="0"/>
+    <cs:effectRef idx="0"/>
+    <cs:fontRef idx="minor">
+      <a:schemeClr val="tx1"/>
+    </cs:fontRef>
+    <cs:spPr>
+      <a:ln w="9525" cap="flat" cmpd="sng" algn="ctr">
+        <a:solidFill>
+          <a:schemeClr val="tx1">
+            <a:lumMod val="35000"/>
+            <a:lumOff val="65000"/>
+          </a:schemeClr>
+        </a:solidFill>
+        <a:round/>
+      </a:ln>
+    </cs:spPr>
+  </cs:leaderLine>
+  <cs:legend>
+    <cs:lnRef idx="0"/>
+    <cs:fillRef idx="0"/>
+    <cs:effectRef idx="0"/>
+    <cs:fontRef idx="minor">
+      <a:schemeClr val="tx1">
+        <a:lumMod val="65000"/>
+        <a:lumOff val="35000"/>
+      </a:schemeClr>
+    </cs:fontRef>
+    <cs:defRPr sz="1197" kern="1200"/>
+  </cs:legend>
+  <cs:plotArea mods="allowNoFillOverride allowNoLineOverride">
+    <cs:lnRef idx="0"/>
+    <cs:fillRef idx="0"/>
+    <cs:effectRef idx="0"/>
+    <cs:fontRef idx="minor">
+      <a:schemeClr val="tx1"/>
+    </cs:fontRef>
+  </cs:plotArea>
+  <cs:plotArea3D mods="allowNoFillOverride allowNoLineOverride">
+    <cs:lnRef idx="0"/>
+    <cs:fillRef idx="0"/>
+    <cs:effectRef idx="0"/>
+    <cs:fontRef idx="minor">
+      <a:schemeClr val="tx1"/>
+    </cs:fontRef>
+  </cs:plotArea3D>
+  <cs:seriesAxis>
+    <cs:lnRef idx="0"/>
+    <cs:fillRef idx="0"/>
+    <cs:effectRef idx="0"/>
+    <cs:fontRef idx="minor">
+      <a:schemeClr val="tx1">
+        <a:lumMod val="65000"/>
+        <a:lumOff val="35000"/>
+      </a:schemeClr>
+    </cs:fontRef>
+    <cs:defRPr sz="1197" kern="1200"/>
+  </cs:seriesAxis>
+  <cs:seriesLine>
+    <cs:lnRef idx="0"/>
+    <cs:fillRef idx="0"/>
+    <cs:effectRef idx="0"/>
+    <cs:fontRef idx="minor">
+      <a:schemeClr val="tx1"/>
+    </cs:fontRef>
+    <cs:spPr>
+      <a:ln w="9525" cap="flat" cmpd="sng" algn="ctr">
+        <a:solidFill>
+          <a:schemeClr val="tx1">
+            <a:lumMod val="35000"/>
+            <a:lumOff val="65000"/>
+          </a:schemeClr>
+        </a:solidFill>
+        <a:round/>
+      </a:ln>
+    </cs:spPr>
+  </cs:seriesLine>
+  <cs:title>
+    <cs:lnRef idx="0"/>
+    <cs:fillRef idx="0"/>
+    <cs:effectRef idx="0"/>
+    <cs:fontRef idx="minor">
+      <a:schemeClr val="tx1">
+        <a:lumMod val="65000"/>
+        <a:lumOff val="35000"/>
+      </a:schemeClr>
+    </cs:fontRef>
+    <cs:defRPr sz="1862" b="0" kern="1200" spc="0" baseline="0"/>
+  </cs:title>
+  <cs:trendline>
+    <cs:lnRef idx="0">
+      <cs:styleClr val="auto"/>
+    </cs:lnRef>
+    <cs:fillRef idx="0"/>
+    <cs:effectRef idx="0"/>
+    <cs:fontRef idx="minor">
+      <a:schemeClr val="tx1"/>
+    </cs:fontRef>
+    <cs:spPr>
+      <a:ln w="19050" cap="rnd">
+        <a:solidFill>
+          <a:schemeClr val="phClr"/>
+        </a:solidFill>
+        <a:prstDash val="sysDot"/>
+      </a:ln>
+    </cs:spPr>
+  </cs:trendline>
+  <cs:trendlineLabel>
+    <cs:lnRef idx="0"/>
+    <cs:fillRef idx="0"/>
+    <cs:effectRef idx="0"/>
+    <cs:fontRef idx="minor">
+      <a:schemeClr val="tx1">
+        <a:lumMod val="65000"/>
+        <a:lumOff val="35000"/>
+      </a:schemeClr>
+    </cs:fontRef>
+    <cs:defRPr sz="1197" kern="1200"/>
+  </cs:trendlineLabel>
+  <cs:upBar>
+    <cs:lnRef idx="0"/>
+    <cs:fillRef idx="0"/>
+    <cs:effectRef idx="0"/>
+    <cs:fontRef idx="minor">
+      <a:schemeClr val="tx1"/>
+    </cs:fontRef>
+    <cs:spPr>
+      <a:solidFill>
+        <a:schemeClr val="lt1"/>
+      </a:solidFill>
+      <a:ln w="9525" cap="flat" cmpd="sng" algn="ctr">
+        <a:solidFill>
+          <a:schemeClr val="tx1">
+            <a:lumMod val="65000"/>
+            <a:lumOff val="35000"/>
+          </a:schemeClr>
+        </a:solidFill>
+        <a:round/>
+      </a:ln>
+    </cs:spPr>
+  </cs:upBar>
+  <cs:valueAxis>
+    <cs:lnRef idx="0"/>
+    <cs:fillRef idx="0"/>
+    <cs:effectRef idx="0"/>
+    <cs:fontRef idx="minor">
+      <a:schemeClr val="tx1">
+        <a:lumMod val="65000"/>
+        <a:lumOff val="35000"/>
+      </a:schemeClr>
+    </cs:fontRef>
+    <cs:defRPr sz="1197" kern="1200"/>
+  </cs:valueAxis>
+  <cs:wall>
+    <cs:lnRef idx="0"/>
+    <cs:fillRef idx="0"/>
+    <cs:effectRef idx="0"/>
+    <cs:fontRef idx="minor">
+      <a:schemeClr val="tx1"/>
+    </cs:fontRef>
+    <cs:spPr>
+      <a:noFill/>
+      <a:ln>
+        <a:noFill/>
+      </a:ln>
+    </cs:spPr>
+  </cs:wall>
+</cs:chartStyle>
+</file>
+
+<file path=ppt/charts/style21.xml><?xml version="1.0" encoding="utf-8"?>
+<cs:chartStyle xmlns:cs="http://schemas.microsoft.com/office/drawing/2012/chartStyle" xmlns:a="http://schemas.openxmlformats.org/drawingml/2006/main" id="276">
+  <cs:axisTitle>
+    <cs:lnRef idx="0"/>
+    <cs:fillRef idx="0"/>
+    <cs:effectRef idx="0"/>
+    <cs:fontRef idx="minor">
+      <a:schemeClr val="tx1">
+        <a:lumMod val="65000"/>
+        <a:lumOff val="35000"/>
+      </a:schemeClr>
+    </cs:fontRef>
+    <cs:defRPr sz="1330" kern="1200"/>
+  </cs:axisTitle>
+  <cs:categoryAxis>
+    <cs:lnRef idx="0"/>
+    <cs:fillRef idx="0"/>
+    <cs:effectRef idx="0"/>
+    <cs:fontRef idx="minor">
+      <a:schemeClr val="tx1">
+        <a:lumMod val="65000"/>
+        <a:lumOff val="35000"/>
+      </a:schemeClr>
+    </cs:fontRef>
+    <cs:spPr>
+      <a:ln w="9525" cap="flat" cmpd="sng" algn="ctr">
+        <a:solidFill>
+          <a:schemeClr val="tx1">
+            <a:lumMod val="15000"/>
+            <a:lumOff val="85000"/>
+          </a:schemeClr>
+        </a:solidFill>
+        <a:round/>
+      </a:ln>
+    </cs:spPr>
+    <cs:defRPr sz="1197" kern="1200"/>
+  </cs:categoryAxis>
+  <cs:chartArea mods="allowNoFillOverride allowNoLineOverride">
+    <cs:lnRef idx="0"/>
+    <cs:fillRef idx="0"/>
+    <cs:effectRef idx="0"/>
+    <cs:fontRef idx="minor">
+      <a:schemeClr val="tx1"/>
+    </cs:fontRef>
+    <cs:spPr>
+      <a:solidFill>
+        <a:schemeClr val="bg1"/>
+      </a:solidFill>
+      <a:ln w="9525" cap="flat" cmpd="sng" algn="ctr">
+        <a:solidFill>
+          <a:schemeClr val="tx1">
+            <a:lumMod val="15000"/>
+            <a:lumOff val="85000"/>
+          </a:schemeClr>
+        </a:solidFill>
+        <a:round/>
+      </a:ln>
+    </cs:spPr>
+    <cs:defRPr sz="1330" kern="1200"/>
+  </cs:chartArea>
+  <cs:dataLabel>
+    <cs:lnRef idx="0"/>
+    <cs:fillRef idx="0"/>
+    <cs:effectRef idx="0"/>
+    <cs:fontRef idx="minor">
+      <a:schemeClr val="tx1">
+        <a:lumMod val="75000"/>
+        <a:lumOff val="25000"/>
+      </a:schemeClr>
+    </cs:fontRef>
+    <cs:defRPr sz="1197" kern="1200"/>
+  </cs:dataLabel>
+  <cs:dataLabelCallout>
+    <cs:lnRef idx="0"/>
+    <cs:fillRef idx="0"/>
+    <cs:effectRef idx="0"/>
+    <cs:fontRef idx="minor">
+      <a:schemeClr val="dk1">
+        <a:lumMod val="65000"/>
+        <a:lumOff val="35000"/>
+      </a:schemeClr>
+    </cs:fontRef>
+    <cs:spPr>
+      <a:solidFill>
+        <a:schemeClr val="lt1"/>
+      </a:solidFill>
+      <a:ln>
+        <a:solidFill>
+          <a:schemeClr val="dk1">
+            <a:lumMod val="25000"/>
+            <a:lumOff val="75000"/>
+          </a:schemeClr>
+        </a:solidFill>
+      </a:ln>
+    </cs:spPr>
+    <cs:defRPr sz="1197" kern="1200"/>
+    <cs:bodyPr rot="0" spcFirstLastPara="1" vertOverflow="clip" horzOverflow="clip" vert="horz" wrap="square" lIns="36576" tIns="18288" rIns="36576" bIns="18288" anchor="ctr" anchorCtr="1">
+      <a:spAutoFit/>
+    </cs:bodyPr>
+  </cs:dataLabelCallout>
+  <cs:dataPoint>
+    <cs:lnRef idx="0"/>
+    <cs:fillRef idx="1">
+      <cs:styleClr val="auto"/>
+    </cs:fillRef>
+    <cs:effectRef idx="0"/>
+    <cs:fontRef idx="minor">
+      <a:schemeClr val="tx1"/>
+    </cs:fontRef>
+  </cs:dataPoint>
+  <cs:dataPoint3D>
+    <cs:lnRef idx="0"/>
+    <cs:fillRef idx="1">
+      <cs:styleClr val="auto"/>
+    </cs:fillRef>
+    <cs:effectRef idx="0"/>
+    <cs:fontRef idx="minor">
+      <a:schemeClr val="tx1"/>
+    </cs:fontRef>
+  </cs:dataPoint3D>
+  <cs:dataPointLine>
+    <cs:lnRef idx="0">
+      <cs:styleClr val="auto"/>
+    </cs:lnRef>
+    <cs:fillRef idx="1"/>
+    <cs:effectRef idx="0"/>
+    <cs:fontRef idx="minor">
+      <a:schemeClr val="tx1"/>
+    </cs:fontRef>
+    <cs:spPr>
+      <a:ln w="28575" cap="rnd">
+        <a:solidFill>
+          <a:schemeClr val="phClr"/>
+        </a:solidFill>
+        <a:round/>
+      </a:ln>
+    </cs:spPr>
+  </cs:dataPointLine>
+  <cs:dataPointMarker>
+    <cs:lnRef idx="0">
+      <cs:styleClr val="auto"/>
+    </cs:lnRef>
+    <cs:fillRef idx="1">
+      <cs:styleClr val="auto"/>
+    </cs:fillRef>
+    <cs:effectRef idx="0"/>
+    <cs:fontRef idx="minor">
+      <a:schemeClr val="tx1"/>
+    </cs:fontRef>
+    <cs:spPr>
+      <a:ln w="9525">
+        <a:solidFill>
+          <a:schemeClr val="phClr"/>
+        </a:solidFill>
+      </a:ln>
+    </cs:spPr>
+  </cs:dataPointMarker>
+  <cs:dataPointMarkerLayout symbol="circle" size="5"/>
+  <cs:dataPointWireframe>
+    <cs:lnRef idx="0">
+      <cs:styleClr val="auto"/>
+    </cs:lnRef>
+    <cs:fillRef idx="1"/>
+    <cs:effectRef idx="0"/>
+    <cs:fontRef idx="minor">
+      <a:schemeClr val="tx1"/>
+    </cs:fontRef>
+    <cs:spPr>
+      <a:ln w="9525" cap="rnd">
+        <a:solidFill>
+          <a:schemeClr val="phClr"/>
+        </a:solidFill>
+        <a:round/>
+      </a:ln>
+    </cs:spPr>
+  </cs:dataPointWireframe>
+  <cs:dataTable>
+    <cs:lnRef idx="0"/>
+    <cs:fillRef idx="0"/>
+    <cs:effectRef idx="0"/>
+    <cs:fontRef idx="minor">
+      <a:schemeClr val="tx1">
+        <a:lumMod val="65000"/>
+        <a:lumOff val="35000"/>
+      </a:schemeClr>
+    </cs:fontRef>
+    <cs:spPr>
+      <a:noFill/>
+      <a:ln w="9525" cap="flat" cmpd="sng" algn="ctr">
+        <a:solidFill>
+          <a:schemeClr val="tx1">
+            <a:lumMod val="15000"/>
+            <a:lumOff val="85000"/>
+          </a:schemeClr>
+        </a:solidFill>
+        <a:round/>
+      </a:ln>
+    </cs:spPr>
+    <cs:defRPr sz="1197" kern="1200"/>
+  </cs:dataTable>
+  <cs:downBar>
+    <cs:lnRef idx="0"/>
+    <cs:fillRef idx="0"/>
+    <cs:effectRef idx="0"/>
+    <cs:fontRef idx="minor">
+      <a:schemeClr val="tx1"/>
+    </cs:fontRef>
+    <cs:spPr>
+      <a:solidFill>
+        <a:schemeClr val="dk1">
+          <a:lumMod val="75000"/>
+          <a:lumOff val="25000"/>
+        </a:schemeClr>
+      </a:solidFill>
+      <a:ln w="9525" cap="flat" cmpd="sng" algn="ctr">
+        <a:solidFill>
+          <a:schemeClr val="tx1">
+            <a:lumMod val="65000"/>
+            <a:lumOff val="35000"/>
+          </a:schemeClr>
+        </a:solidFill>
+        <a:round/>
+      </a:ln>
+    </cs:spPr>
+  </cs:downBar>
+  <cs:dropLine>
+    <cs:lnRef idx="0"/>
+    <cs:fillRef idx="0"/>
+    <cs:effectRef idx="0"/>
+    <cs:fontRef idx="minor">
+      <a:schemeClr val="tx1"/>
+    </cs:fontRef>
+    <cs:spPr>
+      <a:ln w="9525" cap="flat" cmpd="sng" algn="ctr">
+        <a:solidFill>
+          <a:schemeClr val="tx1">
+            <a:lumMod val="35000"/>
+            <a:lumOff val="65000"/>
+          </a:schemeClr>
+        </a:solidFill>
+        <a:round/>
+      </a:ln>
+    </cs:spPr>
+  </cs:dropLine>
+  <cs:errorBar>
+    <cs:lnRef idx="0"/>
+    <cs:fillRef idx="0"/>
+    <cs:effectRef idx="0"/>
+    <cs:fontRef idx="minor">
+      <a:schemeClr val="tx1"/>
+    </cs:fontRef>
+    <cs:spPr>
+      <a:ln w="9525" cap="flat" cmpd="sng" algn="ctr">
+        <a:solidFill>
+          <a:schemeClr val="tx1">
+            <a:lumMod val="65000"/>
+            <a:lumOff val="35000"/>
+          </a:schemeClr>
+        </a:solidFill>
+        <a:round/>
+      </a:ln>
+    </cs:spPr>
+  </cs:errorBar>
+  <cs:floor>
+    <cs:lnRef idx="0"/>
+    <cs:fillRef idx="0"/>
+    <cs:effectRef idx="0"/>
+    <cs:fontRef idx="minor">
+      <a:schemeClr val="tx1"/>
+    </cs:fontRef>
+    <cs:spPr>
+      <a:ln w="9525" cap="flat" cmpd="sng" algn="ctr">
+        <a:solidFill>
+          <a:schemeClr val="tx1">
+            <a:lumMod val="15000"/>
+            <a:lumOff val="85000"/>
+          </a:schemeClr>
+        </a:solidFill>
+        <a:round/>
+      </a:ln>
+    </cs:spPr>
+  </cs:floor>
+  <cs:gridlineMajor>
+    <cs:lnRef idx="0"/>
+    <cs:fillRef idx="0"/>
+    <cs:effectRef idx="0"/>
+    <cs:fontRef idx="minor">
+      <a:schemeClr val="tx1"/>
+    </cs:fontRef>
+    <cs:spPr>
+      <a:ln w="9525" cap="flat" cmpd="sng" algn="ctr">
+        <a:solidFill>
+          <a:schemeClr val="tx1">
+            <a:lumMod val="15000"/>
+            <a:lumOff val="85000"/>
+          </a:schemeClr>
+        </a:solidFill>
+        <a:round/>
+      </a:ln>
+    </cs:spPr>
+  </cs:gridlineMajor>
+  <cs:gridlineMinor>
+    <cs:lnRef idx="0"/>
+    <cs:fillRef idx="0"/>
+    <cs:effectRef idx="0"/>
+    <cs:fontRef idx="minor">
+      <a:schemeClr val="tx1"/>
+    </cs:fontRef>
+    <cs:spPr>
+      <a:ln w="9525" cap="flat" cmpd="sng" algn="ctr">
+        <a:solidFill>
+          <a:schemeClr val="tx1">
+            <a:lumMod val="5000"/>
+            <a:lumOff val="95000"/>
+          </a:schemeClr>
+        </a:solidFill>
+        <a:round/>
+      </a:ln>
+    </cs:spPr>
+  </cs:gridlineMinor>
+  <cs:hiLoLine>
+    <cs:lnRef idx="0"/>
+    <cs:fillRef idx="0"/>
+    <cs:effectRef idx="0"/>
+    <cs:fontRef idx="minor">
+      <a:schemeClr val="tx1"/>
+    </cs:fontRef>
+    <cs:spPr>
+      <a:ln w="9525" cap="flat" cmpd="sng" algn="ctr">
+        <a:solidFill>
+          <a:schemeClr val="tx1">
+            <a:lumMod val="50000"/>
+            <a:lumOff val="50000"/>
+          </a:schemeClr>
+        </a:solidFill>
+        <a:round/>
+      </a:ln>
+    </cs:spPr>
+  </cs:hiLoLine>
+  <cs:leaderLine>
+    <cs:lnRef idx="0"/>
+    <cs:fillRef idx="0"/>
+    <cs:effectRef idx="0"/>
+    <cs:fontRef idx="minor">
+      <a:schemeClr val="tx1"/>
+    </cs:fontRef>
+    <cs:spPr>
+      <a:ln w="9525" cap="flat" cmpd="sng" algn="ctr">
+        <a:solidFill>
+          <a:schemeClr val="tx1">
+            <a:lumMod val="35000"/>
+            <a:lumOff val="65000"/>
+          </a:schemeClr>
+        </a:solidFill>
+        <a:round/>
+      </a:ln>
+    </cs:spPr>
+  </cs:leaderLine>
+  <cs:legend>
+    <cs:lnRef idx="0"/>
+    <cs:fillRef idx="0"/>
+    <cs:effectRef idx="0"/>
+    <cs:fontRef idx="minor">
+      <a:schemeClr val="tx1">
+        <a:lumMod val="65000"/>
+        <a:lumOff val="35000"/>
+      </a:schemeClr>
+    </cs:fontRef>
+    <cs:defRPr sz="1197" kern="1200"/>
+  </cs:legend>
+  <cs:plotArea mods="allowNoFillOverride allowNoLineOverride">
+    <cs:lnRef idx="0"/>
+    <cs:fillRef idx="0"/>
+    <cs:effectRef idx="0"/>
+    <cs:fontRef idx="minor">
+      <a:schemeClr val="tx1"/>
+    </cs:fontRef>
+  </cs:plotArea>
+  <cs:plotArea3D mods="allowNoFillOverride allowNoLineOverride">
+    <cs:lnRef idx="0"/>
+    <cs:fillRef idx="0"/>
+    <cs:effectRef idx="0"/>
+    <cs:fontRef idx="minor">
+      <a:schemeClr val="tx1"/>
+    </cs:fontRef>
+  </cs:plotArea3D>
+  <cs:seriesAxis>
+    <cs:lnRef idx="0"/>
+    <cs:fillRef idx="0"/>
+    <cs:effectRef idx="0"/>
+    <cs:fontRef idx="minor">
+      <a:schemeClr val="tx1">
+        <a:lumMod val="65000"/>
+        <a:lumOff val="35000"/>
+      </a:schemeClr>
+    </cs:fontRef>
+    <cs:spPr>
+      <a:ln w="9525" cap="flat" cmpd="sng" algn="ctr">
+        <a:solidFill>
+          <a:schemeClr val="tx1">
+            <a:lumMod val="15000"/>
+            <a:lumOff val="85000"/>
+          </a:schemeClr>
+        </a:solidFill>
+        <a:round/>
+      </a:ln>
+    </cs:spPr>
     <cs:defRPr sz="1197" kern="1200"/>
   </cs:seriesAxis>
   <cs:seriesLine>
@@ -18304,7 +22679,7 @@
           <p:cNvPr id="2" name="Titel 1">
             <a:extLst>
               <a:ext uri="{FF2B5EF4-FFF2-40B4-BE49-F238E27FC236}">
-                <a16:creationId xmlns:a16="http://schemas.microsoft.com/office/drawing/2014/main" id="{B4C28FA0-35AE-5890-402E-B7C18DE9E662}"/>
+                <a16:creationId xmlns:a16="http://schemas.microsoft.com/office/drawing/2014/main" id="{B517F22A-532F-B19D-AB4B-CFBB427A5948}"/>
               </a:ext>
             </a:extLst>
           </p:cNvPr>
@@ -18341,7 +22716,7 @@
           <p:cNvPr id="3" name="Untertitel 2">
             <a:extLst>
               <a:ext uri="{FF2B5EF4-FFF2-40B4-BE49-F238E27FC236}">
-                <a16:creationId xmlns:a16="http://schemas.microsoft.com/office/drawing/2014/main" id="{7A06773A-EA48-78CD-A003-7187B7D3356D}"/>
+                <a16:creationId xmlns:a16="http://schemas.microsoft.com/office/drawing/2014/main" id="{6DE81728-2C6F-13FB-8DCD-5507165CFA4F}"/>
               </a:ext>
             </a:extLst>
           </p:cNvPr>
@@ -18411,7 +22786,7 @@
           <p:cNvPr id="4" name="Datumsplatzhalter 3">
             <a:extLst>
               <a:ext uri="{FF2B5EF4-FFF2-40B4-BE49-F238E27FC236}">
-                <a16:creationId xmlns:a16="http://schemas.microsoft.com/office/drawing/2014/main" id="{ABC1D957-F069-50B6-7130-D391DCD438E3}"/>
+                <a16:creationId xmlns:a16="http://schemas.microsoft.com/office/drawing/2014/main" id="{BC8599AE-57E6-6958-387D-2462EAD77AB3}"/>
               </a:ext>
             </a:extLst>
           </p:cNvPr>
@@ -18427,9 +22802,9 @@
           <a:bodyPr/>
           <a:lstStyle/>
           <a:p>
-            <a:fld id="{261859EB-D23C-4616-B420-B67BCB3819AC}" type="datetimeFigureOut">
+            <a:fld id="{A936448D-79D5-487E-97B9-44F7185C8186}" type="datetimeFigureOut">
               <a:rPr lang="de-DE" smtClean="0"/>
-              <a:t>08.10.2026</a:t>
+              <a:t>09.10.2026</a:t>
             </a:fld>
             <a:endParaRPr lang="de-DE"/>
           </a:p>
@@ -18440,7 +22815,7 @@
           <p:cNvPr id="5" name="Fußzeilenplatzhalter 4">
             <a:extLst>
               <a:ext uri="{FF2B5EF4-FFF2-40B4-BE49-F238E27FC236}">
-                <a16:creationId xmlns:a16="http://schemas.microsoft.com/office/drawing/2014/main" id="{3B1EAF96-FCE7-344A-3DB3-B53F4216C47B}"/>
+                <a16:creationId xmlns:a16="http://schemas.microsoft.com/office/drawing/2014/main" id="{8365D957-FF0E-FD31-3B9E-F4F8D5C0251D}"/>
               </a:ext>
             </a:extLst>
           </p:cNvPr>
@@ -18465,7 +22840,7 @@
           <p:cNvPr id="6" name="Foliennummernplatzhalter 5">
             <a:extLst>
               <a:ext uri="{FF2B5EF4-FFF2-40B4-BE49-F238E27FC236}">
-                <a16:creationId xmlns:a16="http://schemas.microsoft.com/office/drawing/2014/main" id="{BB396D6E-F12A-AB2B-44A2-1277B5432B87}"/>
+                <a16:creationId xmlns:a16="http://schemas.microsoft.com/office/drawing/2014/main" id="{E8D66D74-88D8-358B-76C9-2F61E5A06E49}"/>
               </a:ext>
             </a:extLst>
           </p:cNvPr>
@@ -18481,7 +22856,7 @@
           <a:bodyPr/>
           <a:lstStyle/>
           <a:p>
-            <a:fld id="{AF2925FD-2DD3-43DD-8B59-4A314B41F5B3}" type="slidenum">
+            <a:fld id="{FFBDEC81-508D-44D4-90FD-13C7042BF947}" type="slidenum">
               <a:rPr lang="de-DE" smtClean="0"/>
               <a:t>‹Nr.›</a:t>
             </a:fld>
@@ -18492,7 +22867,7 @@
     </p:spTree>
     <p:extLst>
       <p:ext uri="{BB962C8B-B14F-4D97-AF65-F5344CB8AC3E}">
-        <p14:creationId xmlns:p14="http://schemas.microsoft.com/office/powerpoint/2010/main" val="4203632774"/>
+        <p14:creationId xmlns:p14="http://schemas.microsoft.com/office/powerpoint/2010/main" val="910487572"/>
       </p:ext>
     </p:extLst>
   </p:cSld>
@@ -18524,7 +22899,7 @@
           <p:cNvPr id="2" name="Titel 1">
             <a:extLst>
               <a:ext uri="{FF2B5EF4-FFF2-40B4-BE49-F238E27FC236}">
-                <a16:creationId xmlns:a16="http://schemas.microsoft.com/office/drawing/2014/main" id="{B2F64963-FD5D-AA1D-BE52-0F0778DE6137}"/>
+                <a16:creationId xmlns:a16="http://schemas.microsoft.com/office/drawing/2014/main" id="{71649916-5605-3983-60DB-C0EDFCAB889C}"/>
               </a:ext>
             </a:extLst>
           </p:cNvPr>
@@ -18552,7 +22927,7 @@
           <p:cNvPr id="3" name="Vertikaler Textplatzhalter 2">
             <a:extLst>
               <a:ext uri="{FF2B5EF4-FFF2-40B4-BE49-F238E27FC236}">
-                <a16:creationId xmlns:a16="http://schemas.microsoft.com/office/drawing/2014/main" id="{BFE0B98B-AC78-6A19-9FFB-12A1356AED6D}"/>
+                <a16:creationId xmlns:a16="http://schemas.microsoft.com/office/drawing/2014/main" id="{3A85848C-2D96-2E80-4224-3C8FF5FA2284}"/>
               </a:ext>
             </a:extLst>
           </p:cNvPr>
@@ -18609,7 +22984,7 @@
           <p:cNvPr id="4" name="Datumsplatzhalter 3">
             <a:extLst>
               <a:ext uri="{FF2B5EF4-FFF2-40B4-BE49-F238E27FC236}">
-                <a16:creationId xmlns:a16="http://schemas.microsoft.com/office/drawing/2014/main" id="{05A43BD5-6DB2-B7DA-B439-5B2596B17F0B}"/>
+                <a16:creationId xmlns:a16="http://schemas.microsoft.com/office/drawing/2014/main" id="{B68FD9EB-8C33-8F0B-2D6E-A39C2C43A29B}"/>
               </a:ext>
             </a:extLst>
           </p:cNvPr>
@@ -18625,9 +23000,9 @@
           <a:bodyPr/>
           <a:lstStyle/>
           <a:p>
-            <a:fld id="{261859EB-D23C-4616-B420-B67BCB3819AC}" type="datetimeFigureOut">
+            <a:fld id="{A936448D-79D5-487E-97B9-44F7185C8186}" type="datetimeFigureOut">
               <a:rPr lang="de-DE" smtClean="0"/>
-              <a:t>08.10.2026</a:t>
+              <a:t>09.10.2026</a:t>
             </a:fld>
             <a:endParaRPr lang="de-DE"/>
           </a:p>
@@ -18638,7 +23013,7 @@
           <p:cNvPr id="5" name="Fußzeilenplatzhalter 4">
             <a:extLst>
               <a:ext uri="{FF2B5EF4-FFF2-40B4-BE49-F238E27FC236}">
-                <a16:creationId xmlns:a16="http://schemas.microsoft.com/office/drawing/2014/main" id="{C94EA6E3-7391-1CC8-B1D1-45CE2BE2CB2A}"/>
+                <a16:creationId xmlns:a16="http://schemas.microsoft.com/office/drawing/2014/main" id="{867C8AFC-E10F-4188-E19A-3A5C946FEE4A}"/>
               </a:ext>
             </a:extLst>
           </p:cNvPr>
@@ -18663,7 +23038,7 @@
           <p:cNvPr id="6" name="Foliennummernplatzhalter 5">
             <a:extLst>
               <a:ext uri="{FF2B5EF4-FFF2-40B4-BE49-F238E27FC236}">
-                <a16:creationId xmlns:a16="http://schemas.microsoft.com/office/drawing/2014/main" id="{81AC7A70-9AD5-2CBA-3A00-D0E574EB2C21}"/>
+                <a16:creationId xmlns:a16="http://schemas.microsoft.com/office/drawing/2014/main" id="{931AEDAE-F4E6-1240-D156-7FEE94B776F7}"/>
               </a:ext>
             </a:extLst>
           </p:cNvPr>
@@ -18679,7 +23054,7 @@
           <a:bodyPr/>
           <a:lstStyle/>
           <a:p>
-            <a:fld id="{AF2925FD-2DD3-43DD-8B59-4A314B41F5B3}" type="slidenum">
+            <a:fld id="{FFBDEC81-508D-44D4-90FD-13C7042BF947}" type="slidenum">
               <a:rPr lang="de-DE" smtClean="0"/>
               <a:t>‹Nr.›</a:t>
             </a:fld>
@@ -18690,7 +23065,7 @@
     </p:spTree>
     <p:extLst>
       <p:ext uri="{BB962C8B-B14F-4D97-AF65-F5344CB8AC3E}">
-        <p14:creationId xmlns:p14="http://schemas.microsoft.com/office/powerpoint/2010/main" val="895048625"/>
+        <p14:creationId xmlns:p14="http://schemas.microsoft.com/office/powerpoint/2010/main" val="1647402949"/>
       </p:ext>
     </p:extLst>
   </p:cSld>
@@ -18722,7 +23097,7 @@
           <p:cNvPr id="2" name="Vertikaler Titel 1">
             <a:extLst>
               <a:ext uri="{FF2B5EF4-FFF2-40B4-BE49-F238E27FC236}">
-                <a16:creationId xmlns:a16="http://schemas.microsoft.com/office/drawing/2014/main" id="{0F64CF1D-13B2-261E-B545-3E753EA3E553}"/>
+                <a16:creationId xmlns:a16="http://schemas.microsoft.com/office/drawing/2014/main" id="{3ACA544F-57D3-0FD9-A754-5488C676D60F}"/>
               </a:ext>
             </a:extLst>
           </p:cNvPr>
@@ -18755,7 +23130,7 @@
           <p:cNvPr id="3" name="Vertikaler Textplatzhalter 2">
             <a:extLst>
               <a:ext uri="{FF2B5EF4-FFF2-40B4-BE49-F238E27FC236}">
-                <a16:creationId xmlns:a16="http://schemas.microsoft.com/office/drawing/2014/main" id="{9C658748-3CB5-BC20-6FA3-16B77D39D06C}"/>
+                <a16:creationId xmlns:a16="http://schemas.microsoft.com/office/drawing/2014/main" id="{B093ADC9-177D-AF64-FFBC-7BBAEC84EBFC}"/>
               </a:ext>
             </a:extLst>
           </p:cNvPr>
@@ -18817,7 +23192,7 @@
           <p:cNvPr id="4" name="Datumsplatzhalter 3">
             <a:extLst>
               <a:ext uri="{FF2B5EF4-FFF2-40B4-BE49-F238E27FC236}">
-                <a16:creationId xmlns:a16="http://schemas.microsoft.com/office/drawing/2014/main" id="{52F9042E-D384-BD79-3ED7-FF124D9E4AF6}"/>
+                <a16:creationId xmlns:a16="http://schemas.microsoft.com/office/drawing/2014/main" id="{2DDE1B53-55D1-DDD8-9ADC-641CE5265082}"/>
               </a:ext>
             </a:extLst>
           </p:cNvPr>
@@ -18833,9 +23208,9 @@
           <a:bodyPr/>
           <a:lstStyle/>
           <a:p>
-            <a:fld id="{261859EB-D23C-4616-B420-B67BCB3819AC}" type="datetimeFigureOut">
+            <a:fld id="{A936448D-79D5-487E-97B9-44F7185C8186}" type="datetimeFigureOut">
               <a:rPr lang="de-DE" smtClean="0"/>
-              <a:t>08.10.2026</a:t>
+              <a:t>09.10.2026</a:t>
             </a:fld>
             <a:endParaRPr lang="de-DE"/>
           </a:p>
@@ -18846,7 +23221,7 @@
           <p:cNvPr id="5" name="Fußzeilenplatzhalter 4">
             <a:extLst>
               <a:ext uri="{FF2B5EF4-FFF2-40B4-BE49-F238E27FC236}">
-                <a16:creationId xmlns:a16="http://schemas.microsoft.com/office/drawing/2014/main" id="{8DEE6FEA-B197-C3EA-332E-D28CC8E55445}"/>
+                <a16:creationId xmlns:a16="http://schemas.microsoft.com/office/drawing/2014/main" id="{62320745-FD4E-9823-A75D-4096273C7EA9}"/>
               </a:ext>
             </a:extLst>
           </p:cNvPr>
@@ -18871,7 +23246,7 @@
           <p:cNvPr id="6" name="Foliennummernplatzhalter 5">
             <a:extLst>
               <a:ext uri="{FF2B5EF4-FFF2-40B4-BE49-F238E27FC236}">
-                <a16:creationId xmlns:a16="http://schemas.microsoft.com/office/drawing/2014/main" id="{BC6F1351-0B72-C095-0865-C27ABAB63AF3}"/>
+                <a16:creationId xmlns:a16="http://schemas.microsoft.com/office/drawing/2014/main" id="{BE336AF7-CD20-C710-B2B7-50E97AD2093F}"/>
               </a:ext>
             </a:extLst>
           </p:cNvPr>
@@ -18887,7 +23262,7 @@
           <a:bodyPr/>
           <a:lstStyle/>
           <a:p>
-            <a:fld id="{AF2925FD-2DD3-43DD-8B59-4A314B41F5B3}" type="slidenum">
+            <a:fld id="{FFBDEC81-508D-44D4-90FD-13C7042BF947}" type="slidenum">
               <a:rPr lang="de-DE" smtClean="0"/>
               <a:t>‹Nr.›</a:t>
             </a:fld>
@@ -18898,7 +23273,7 @@
     </p:spTree>
     <p:extLst>
       <p:ext uri="{BB962C8B-B14F-4D97-AF65-F5344CB8AC3E}">
-        <p14:creationId xmlns:p14="http://schemas.microsoft.com/office/powerpoint/2010/main" val="2616702236"/>
+        <p14:creationId xmlns:p14="http://schemas.microsoft.com/office/powerpoint/2010/main" val="3815283975"/>
       </p:ext>
     </p:extLst>
   </p:cSld>
@@ -18930,7 +23305,7 @@
           <p:cNvPr id="2" name="Titel 1">
             <a:extLst>
               <a:ext uri="{FF2B5EF4-FFF2-40B4-BE49-F238E27FC236}">
-                <a16:creationId xmlns:a16="http://schemas.microsoft.com/office/drawing/2014/main" id="{B7292512-7B48-CAEA-2FD5-9A1A99DA936B}"/>
+                <a16:creationId xmlns:a16="http://schemas.microsoft.com/office/drawing/2014/main" id="{993696EE-F81F-7156-782F-1BAFA09450B4}"/>
               </a:ext>
             </a:extLst>
           </p:cNvPr>
@@ -18958,7 +23333,7 @@
           <p:cNvPr id="3" name="Inhaltsplatzhalter 2">
             <a:extLst>
               <a:ext uri="{FF2B5EF4-FFF2-40B4-BE49-F238E27FC236}">
-                <a16:creationId xmlns:a16="http://schemas.microsoft.com/office/drawing/2014/main" id="{CCA5F656-1D9F-8E49-B9B9-F055A788FBE1}"/>
+                <a16:creationId xmlns:a16="http://schemas.microsoft.com/office/drawing/2014/main" id="{F961C2DD-1C49-1211-5AC3-EA0D4A5FE4AE}"/>
               </a:ext>
             </a:extLst>
           </p:cNvPr>
@@ -19015,7 +23390,7 @@
           <p:cNvPr id="4" name="Datumsplatzhalter 3">
             <a:extLst>
               <a:ext uri="{FF2B5EF4-FFF2-40B4-BE49-F238E27FC236}">
-                <a16:creationId xmlns:a16="http://schemas.microsoft.com/office/drawing/2014/main" id="{07C5983F-00FC-F022-4BC3-38655E53AFAD}"/>
+                <a16:creationId xmlns:a16="http://schemas.microsoft.com/office/drawing/2014/main" id="{450F1C38-0E1A-3D1D-DF72-80D659273008}"/>
               </a:ext>
             </a:extLst>
           </p:cNvPr>
@@ -19031,9 +23406,9 @@
           <a:bodyPr/>
           <a:lstStyle/>
           <a:p>
-            <a:fld id="{261859EB-D23C-4616-B420-B67BCB3819AC}" type="datetimeFigureOut">
+            <a:fld id="{A936448D-79D5-487E-97B9-44F7185C8186}" type="datetimeFigureOut">
               <a:rPr lang="de-DE" smtClean="0"/>
-              <a:t>08.10.2026</a:t>
+              <a:t>09.10.2026</a:t>
             </a:fld>
             <a:endParaRPr lang="de-DE"/>
           </a:p>
@@ -19044,7 +23419,7 @@
           <p:cNvPr id="5" name="Fußzeilenplatzhalter 4">
             <a:extLst>
               <a:ext uri="{FF2B5EF4-FFF2-40B4-BE49-F238E27FC236}">
-                <a16:creationId xmlns:a16="http://schemas.microsoft.com/office/drawing/2014/main" id="{F777FB92-332B-ED18-9481-F21A571CEAEB}"/>
+                <a16:creationId xmlns:a16="http://schemas.microsoft.com/office/drawing/2014/main" id="{C2229DD7-EE7E-2A17-16A8-ED70BA3348EE}"/>
               </a:ext>
             </a:extLst>
           </p:cNvPr>
@@ -19069,7 +23444,7 @@
           <p:cNvPr id="6" name="Foliennummernplatzhalter 5">
             <a:extLst>
               <a:ext uri="{FF2B5EF4-FFF2-40B4-BE49-F238E27FC236}">
-                <a16:creationId xmlns:a16="http://schemas.microsoft.com/office/drawing/2014/main" id="{61F8C255-B0C2-8437-DD67-78EFD5249557}"/>
+                <a16:creationId xmlns:a16="http://schemas.microsoft.com/office/drawing/2014/main" id="{C791DF17-1573-0FFB-459B-32DEF49445F3}"/>
               </a:ext>
             </a:extLst>
           </p:cNvPr>
@@ -19085,7 +23460,7 @@
           <a:bodyPr/>
           <a:lstStyle/>
           <a:p>
-            <a:fld id="{AF2925FD-2DD3-43DD-8B59-4A314B41F5B3}" type="slidenum">
+            <a:fld id="{FFBDEC81-508D-44D4-90FD-13C7042BF947}" type="slidenum">
               <a:rPr lang="de-DE" smtClean="0"/>
               <a:t>‹Nr.›</a:t>
             </a:fld>
@@ -19096,7 +23471,7 @@
     </p:spTree>
     <p:extLst>
       <p:ext uri="{BB962C8B-B14F-4D97-AF65-F5344CB8AC3E}">
-        <p14:creationId xmlns:p14="http://schemas.microsoft.com/office/powerpoint/2010/main" val="3075614013"/>
+        <p14:creationId xmlns:p14="http://schemas.microsoft.com/office/powerpoint/2010/main" val="364873669"/>
       </p:ext>
     </p:extLst>
   </p:cSld>
@@ -19128,7 +23503,7 @@
           <p:cNvPr id="2" name="Titel 1">
             <a:extLst>
               <a:ext uri="{FF2B5EF4-FFF2-40B4-BE49-F238E27FC236}">
-                <a16:creationId xmlns:a16="http://schemas.microsoft.com/office/drawing/2014/main" id="{55F3636A-3C9C-7CC2-C707-E4BC8366AFAD}"/>
+                <a16:creationId xmlns:a16="http://schemas.microsoft.com/office/drawing/2014/main" id="{22AC82C5-7803-79D7-6DFD-22BE41994665}"/>
               </a:ext>
             </a:extLst>
           </p:cNvPr>
@@ -19165,7 +23540,7 @@
           <p:cNvPr id="3" name="Textplatzhalter 2">
             <a:extLst>
               <a:ext uri="{FF2B5EF4-FFF2-40B4-BE49-F238E27FC236}">
-                <a16:creationId xmlns:a16="http://schemas.microsoft.com/office/drawing/2014/main" id="{9478C1E8-4748-98FC-537C-E3D6B28AA453}"/>
+                <a16:creationId xmlns:a16="http://schemas.microsoft.com/office/drawing/2014/main" id="{8039CF02-5979-2C43-3037-0000A81E8CE0}"/>
               </a:ext>
             </a:extLst>
           </p:cNvPr>
@@ -19290,7 +23665,7 @@
           <p:cNvPr id="4" name="Datumsplatzhalter 3">
             <a:extLst>
               <a:ext uri="{FF2B5EF4-FFF2-40B4-BE49-F238E27FC236}">
-                <a16:creationId xmlns:a16="http://schemas.microsoft.com/office/drawing/2014/main" id="{68077214-4D65-71F5-2E86-619B1819501C}"/>
+                <a16:creationId xmlns:a16="http://schemas.microsoft.com/office/drawing/2014/main" id="{0C61E043-AF3E-1E9D-A49A-E70F0DE3EADB}"/>
               </a:ext>
             </a:extLst>
           </p:cNvPr>
@@ -19306,9 +23681,9 @@
           <a:bodyPr/>
           <a:lstStyle/>
           <a:p>
-            <a:fld id="{261859EB-D23C-4616-B420-B67BCB3819AC}" type="datetimeFigureOut">
+            <a:fld id="{A936448D-79D5-487E-97B9-44F7185C8186}" type="datetimeFigureOut">
               <a:rPr lang="de-DE" smtClean="0"/>
-              <a:t>08.10.2026</a:t>
+              <a:t>09.10.2026</a:t>
             </a:fld>
             <a:endParaRPr lang="de-DE"/>
           </a:p>
@@ -19319,7 +23694,7 @@
           <p:cNvPr id="5" name="Fußzeilenplatzhalter 4">
             <a:extLst>
               <a:ext uri="{FF2B5EF4-FFF2-40B4-BE49-F238E27FC236}">
-                <a16:creationId xmlns:a16="http://schemas.microsoft.com/office/drawing/2014/main" id="{18C3610A-4423-5EF7-D9D9-0D07AF8A397C}"/>
+                <a16:creationId xmlns:a16="http://schemas.microsoft.com/office/drawing/2014/main" id="{230643BF-78D9-AE62-B4D4-B66F8C849401}"/>
               </a:ext>
             </a:extLst>
           </p:cNvPr>
@@ -19344,7 +23719,7 @@
           <p:cNvPr id="6" name="Foliennummernplatzhalter 5">
             <a:extLst>
               <a:ext uri="{FF2B5EF4-FFF2-40B4-BE49-F238E27FC236}">
-                <a16:creationId xmlns:a16="http://schemas.microsoft.com/office/drawing/2014/main" id="{64B4D66A-E939-6980-0D13-34FCF10B0483}"/>
+                <a16:creationId xmlns:a16="http://schemas.microsoft.com/office/drawing/2014/main" id="{A9A7B09A-B97D-7D42-BB92-FBD2949C9AEF}"/>
               </a:ext>
             </a:extLst>
           </p:cNvPr>
@@ -19360,7 +23735,7 @@
           <a:bodyPr/>
           <a:lstStyle/>
           <a:p>
-            <a:fld id="{AF2925FD-2DD3-43DD-8B59-4A314B41F5B3}" type="slidenum">
+            <a:fld id="{FFBDEC81-508D-44D4-90FD-13C7042BF947}" type="slidenum">
               <a:rPr lang="de-DE" smtClean="0"/>
               <a:t>‹Nr.›</a:t>
             </a:fld>
@@ -19371,7 +23746,7 @@
     </p:spTree>
     <p:extLst>
       <p:ext uri="{BB962C8B-B14F-4D97-AF65-F5344CB8AC3E}">
-        <p14:creationId xmlns:p14="http://schemas.microsoft.com/office/powerpoint/2010/main" val="3996977413"/>
+        <p14:creationId xmlns:p14="http://schemas.microsoft.com/office/powerpoint/2010/main" val="2839364619"/>
       </p:ext>
     </p:extLst>
   </p:cSld>
@@ -19403,7 +23778,7 @@
           <p:cNvPr id="2" name="Titel 1">
             <a:extLst>
               <a:ext uri="{FF2B5EF4-FFF2-40B4-BE49-F238E27FC236}">
-                <a16:creationId xmlns:a16="http://schemas.microsoft.com/office/drawing/2014/main" id="{A1EF5974-8FA2-E430-9E02-BCB37232F622}"/>
+                <a16:creationId xmlns:a16="http://schemas.microsoft.com/office/drawing/2014/main" id="{B2ABCAAA-FFE0-F85E-D148-3F9522315170}"/>
               </a:ext>
             </a:extLst>
           </p:cNvPr>
@@ -19431,7 +23806,7 @@
           <p:cNvPr id="3" name="Inhaltsplatzhalter 2">
             <a:extLst>
               <a:ext uri="{FF2B5EF4-FFF2-40B4-BE49-F238E27FC236}">
-                <a16:creationId xmlns:a16="http://schemas.microsoft.com/office/drawing/2014/main" id="{5B77DA1C-4F67-10C6-3854-CB5F9518EC0B}"/>
+                <a16:creationId xmlns:a16="http://schemas.microsoft.com/office/drawing/2014/main" id="{1D3A40C3-CD18-7B3F-0319-F56BA8241D78}"/>
               </a:ext>
             </a:extLst>
           </p:cNvPr>
@@ -19493,7 +23868,7 @@
           <p:cNvPr id="4" name="Inhaltsplatzhalter 3">
             <a:extLst>
               <a:ext uri="{FF2B5EF4-FFF2-40B4-BE49-F238E27FC236}">
-                <a16:creationId xmlns:a16="http://schemas.microsoft.com/office/drawing/2014/main" id="{8AFD60E0-EEA1-6CCC-49C0-F9A42ACFE02B}"/>
+                <a16:creationId xmlns:a16="http://schemas.microsoft.com/office/drawing/2014/main" id="{950E5A99-C166-4B65-6008-5758181FDDBD}"/>
               </a:ext>
             </a:extLst>
           </p:cNvPr>
@@ -19555,7 +23930,7 @@
           <p:cNvPr id="5" name="Datumsplatzhalter 4">
             <a:extLst>
               <a:ext uri="{FF2B5EF4-FFF2-40B4-BE49-F238E27FC236}">
-                <a16:creationId xmlns:a16="http://schemas.microsoft.com/office/drawing/2014/main" id="{4198E8D5-F582-3B59-CD93-4E1CB9167C6B}"/>
+                <a16:creationId xmlns:a16="http://schemas.microsoft.com/office/drawing/2014/main" id="{72F27CE1-534A-955A-E7FB-4F1BC6F50D9C}"/>
               </a:ext>
             </a:extLst>
           </p:cNvPr>
@@ -19571,9 +23946,9 @@
           <a:bodyPr/>
           <a:lstStyle/>
           <a:p>
-            <a:fld id="{261859EB-D23C-4616-B420-B67BCB3819AC}" type="datetimeFigureOut">
+            <a:fld id="{A936448D-79D5-487E-97B9-44F7185C8186}" type="datetimeFigureOut">
               <a:rPr lang="de-DE" smtClean="0"/>
-              <a:t>08.10.2026</a:t>
+              <a:t>09.10.2026</a:t>
             </a:fld>
             <a:endParaRPr lang="de-DE"/>
           </a:p>
@@ -19584,7 +23959,7 @@
           <p:cNvPr id="6" name="Fußzeilenplatzhalter 5">
             <a:extLst>
               <a:ext uri="{FF2B5EF4-FFF2-40B4-BE49-F238E27FC236}">
-                <a16:creationId xmlns:a16="http://schemas.microsoft.com/office/drawing/2014/main" id="{980920F2-5981-6837-F845-5A583B77CFE7}"/>
+                <a16:creationId xmlns:a16="http://schemas.microsoft.com/office/drawing/2014/main" id="{49CBF8ED-C105-90E1-27DB-6597DAF43BCD}"/>
               </a:ext>
             </a:extLst>
           </p:cNvPr>
@@ -19609,7 +23984,7 @@
           <p:cNvPr id="7" name="Foliennummernplatzhalter 6">
             <a:extLst>
               <a:ext uri="{FF2B5EF4-FFF2-40B4-BE49-F238E27FC236}">
-                <a16:creationId xmlns:a16="http://schemas.microsoft.com/office/drawing/2014/main" id="{65F94DFD-5595-1EDA-0529-651EACB5C812}"/>
+                <a16:creationId xmlns:a16="http://schemas.microsoft.com/office/drawing/2014/main" id="{B3C31134-0420-A2C0-F151-2D06F49D3223}"/>
               </a:ext>
             </a:extLst>
           </p:cNvPr>
@@ -19625,7 +24000,7 @@
           <a:bodyPr/>
           <a:lstStyle/>
           <a:p>
-            <a:fld id="{AF2925FD-2DD3-43DD-8B59-4A314B41F5B3}" type="slidenum">
+            <a:fld id="{FFBDEC81-508D-44D4-90FD-13C7042BF947}" type="slidenum">
               <a:rPr lang="de-DE" smtClean="0"/>
               <a:t>‹Nr.›</a:t>
             </a:fld>
@@ -19636,7 +24011,7 @@
     </p:spTree>
     <p:extLst>
       <p:ext uri="{BB962C8B-B14F-4D97-AF65-F5344CB8AC3E}">
-        <p14:creationId xmlns:p14="http://schemas.microsoft.com/office/powerpoint/2010/main" val="1748867873"/>
+        <p14:creationId xmlns:p14="http://schemas.microsoft.com/office/powerpoint/2010/main" val="1616344293"/>
       </p:ext>
     </p:extLst>
   </p:cSld>
@@ -19668,7 +24043,7 @@
           <p:cNvPr id="2" name="Titel 1">
             <a:extLst>
               <a:ext uri="{FF2B5EF4-FFF2-40B4-BE49-F238E27FC236}">
-                <a16:creationId xmlns:a16="http://schemas.microsoft.com/office/drawing/2014/main" id="{8F2538D1-A9C2-504C-0FA1-B871BEBDBBF5}"/>
+                <a16:creationId xmlns:a16="http://schemas.microsoft.com/office/drawing/2014/main" id="{8A802A5C-04B8-A6BD-4568-E6F83111742C}"/>
               </a:ext>
             </a:extLst>
           </p:cNvPr>
@@ -19701,7 +24076,7 @@
           <p:cNvPr id="3" name="Textplatzhalter 2">
             <a:extLst>
               <a:ext uri="{FF2B5EF4-FFF2-40B4-BE49-F238E27FC236}">
-                <a16:creationId xmlns:a16="http://schemas.microsoft.com/office/drawing/2014/main" id="{2A08DAF0-A51B-F10F-F2B7-02789FAFCFC5}"/>
+                <a16:creationId xmlns:a16="http://schemas.microsoft.com/office/drawing/2014/main" id="{BB57766C-40E0-6CEC-5348-5545831C690C}"/>
               </a:ext>
             </a:extLst>
           </p:cNvPr>
@@ -19772,7 +24147,7 @@
           <p:cNvPr id="4" name="Inhaltsplatzhalter 3">
             <a:extLst>
               <a:ext uri="{FF2B5EF4-FFF2-40B4-BE49-F238E27FC236}">
-                <a16:creationId xmlns:a16="http://schemas.microsoft.com/office/drawing/2014/main" id="{8847C886-8663-6007-C8A1-F1E6B4E7FD64}"/>
+                <a16:creationId xmlns:a16="http://schemas.microsoft.com/office/drawing/2014/main" id="{984639F9-F457-FF6C-6A46-648F4443D38C}"/>
               </a:ext>
             </a:extLst>
           </p:cNvPr>
@@ -19834,7 +24209,7 @@
           <p:cNvPr id="5" name="Textplatzhalter 4">
             <a:extLst>
               <a:ext uri="{FF2B5EF4-FFF2-40B4-BE49-F238E27FC236}">
-                <a16:creationId xmlns:a16="http://schemas.microsoft.com/office/drawing/2014/main" id="{29EBEDC3-E54F-567C-7FF1-A1796E565AE6}"/>
+                <a16:creationId xmlns:a16="http://schemas.microsoft.com/office/drawing/2014/main" id="{074C5398-0E03-9335-F35D-6AA69ABE4714}"/>
               </a:ext>
             </a:extLst>
           </p:cNvPr>
@@ -19905,7 +24280,7 @@
           <p:cNvPr id="6" name="Inhaltsplatzhalter 5">
             <a:extLst>
               <a:ext uri="{FF2B5EF4-FFF2-40B4-BE49-F238E27FC236}">
-                <a16:creationId xmlns:a16="http://schemas.microsoft.com/office/drawing/2014/main" id="{79B9F571-16E8-226D-8103-F6A2E2A23D26}"/>
+                <a16:creationId xmlns:a16="http://schemas.microsoft.com/office/drawing/2014/main" id="{69840887-33AA-3B68-0F5B-27E26E02FF66}"/>
               </a:ext>
             </a:extLst>
           </p:cNvPr>
@@ -19967,7 +24342,7 @@
           <p:cNvPr id="7" name="Datumsplatzhalter 6">
             <a:extLst>
               <a:ext uri="{FF2B5EF4-FFF2-40B4-BE49-F238E27FC236}">
-                <a16:creationId xmlns:a16="http://schemas.microsoft.com/office/drawing/2014/main" id="{93296EA0-C28A-A9C7-6741-54B12F96104C}"/>
+                <a16:creationId xmlns:a16="http://schemas.microsoft.com/office/drawing/2014/main" id="{2F9A689E-58BC-24F3-E246-4B072EDE8304}"/>
               </a:ext>
             </a:extLst>
           </p:cNvPr>
@@ -19983,9 +24358,9 @@
           <a:bodyPr/>
           <a:lstStyle/>
           <a:p>
-            <a:fld id="{261859EB-D23C-4616-B420-B67BCB3819AC}" type="datetimeFigureOut">
+            <a:fld id="{A936448D-79D5-487E-97B9-44F7185C8186}" type="datetimeFigureOut">
               <a:rPr lang="de-DE" smtClean="0"/>
-              <a:t>08.10.2026</a:t>
+              <a:t>09.10.2026</a:t>
             </a:fld>
             <a:endParaRPr lang="de-DE"/>
           </a:p>
@@ -19996,7 +24371,7 @@
           <p:cNvPr id="8" name="Fußzeilenplatzhalter 7">
             <a:extLst>
               <a:ext uri="{FF2B5EF4-FFF2-40B4-BE49-F238E27FC236}">
-                <a16:creationId xmlns:a16="http://schemas.microsoft.com/office/drawing/2014/main" id="{0C78CC54-19E7-D7B5-D789-D9F4E6B978DA}"/>
+                <a16:creationId xmlns:a16="http://schemas.microsoft.com/office/drawing/2014/main" id="{AC5841D0-662A-4E1C-5583-F52C9958DBD9}"/>
               </a:ext>
             </a:extLst>
           </p:cNvPr>
@@ -20021,7 +24396,7 @@
           <p:cNvPr id="9" name="Foliennummernplatzhalter 8">
             <a:extLst>
               <a:ext uri="{FF2B5EF4-FFF2-40B4-BE49-F238E27FC236}">
-                <a16:creationId xmlns:a16="http://schemas.microsoft.com/office/drawing/2014/main" id="{F029535B-EA1B-DA5A-5436-22948FB0B161}"/>
+                <a16:creationId xmlns:a16="http://schemas.microsoft.com/office/drawing/2014/main" id="{7DB48256-8048-7150-D593-E053F17DEEBF}"/>
               </a:ext>
             </a:extLst>
           </p:cNvPr>
@@ -20037,7 +24412,7 @@
           <a:bodyPr/>
           <a:lstStyle/>
           <a:p>
-            <a:fld id="{AF2925FD-2DD3-43DD-8B59-4A314B41F5B3}" type="slidenum">
+            <a:fld id="{FFBDEC81-508D-44D4-90FD-13C7042BF947}" type="slidenum">
               <a:rPr lang="de-DE" smtClean="0"/>
               <a:t>‹Nr.›</a:t>
             </a:fld>
@@ -20048,7 +24423,7 @@
     </p:spTree>
     <p:extLst>
       <p:ext uri="{BB962C8B-B14F-4D97-AF65-F5344CB8AC3E}">
-        <p14:creationId xmlns:p14="http://schemas.microsoft.com/office/powerpoint/2010/main" val="681700683"/>
+        <p14:creationId xmlns:p14="http://schemas.microsoft.com/office/powerpoint/2010/main" val="860536650"/>
       </p:ext>
     </p:extLst>
   </p:cSld>
@@ -20080,7 +24455,7 @@
           <p:cNvPr id="2" name="Titel 1">
             <a:extLst>
               <a:ext uri="{FF2B5EF4-FFF2-40B4-BE49-F238E27FC236}">
-                <a16:creationId xmlns:a16="http://schemas.microsoft.com/office/drawing/2014/main" id="{C736CE27-38CB-06DC-54E7-D804126CBF3B}"/>
+                <a16:creationId xmlns:a16="http://schemas.microsoft.com/office/drawing/2014/main" id="{ADEEE38B-D8B1-C3A2-8FB9-084674EF8BF1}"/>
               </a:ext>
             </a:extLst>
           </p:cNvPr>
@@ -20108,7 +24483,7 @@
           <p:cNvPr id="3" name="Datumsplatzhalter 2">
             <a:extLst>
               <a:ext uri="{FF2B5EF4-FFF2-40B4-BE49-F238E27FC236}">
-                <a16:creationId xmlns:a16="http://schemas.microsoft.com/office/drawing/2014/main" id="{A48B9634-1D66-191B-10EA-40CC92841714}"/>
+                <a16:creationId xmlns:a16="http://schemas.microsoft.com/office/drawing/2014/main" id="{579836B1-527F-E7E0-EDBF-D747B6C98603}"/>
               </a:ext>
             </a:extLst>
           </p:cNvPr>
@@ -20124,9 +24499,9 @@
           <a:bodyPr/>
           <a:lstStyle/>
           <a:p>
-            <a:fld id="{261859EB-D23C-4616-B420-B67BCB3819AC}" type="datetimeFigureOut">
+            <a:fld id="{A936448D-79D5-487E-97B9-44F7185C8186}" type="datetimeFigureOut">
               <a:rPr lang="de-DE" smtClean="0"/>
-              <a:t>08.10.2026</a:t>
+              <a:t>09.10.2026</a:t>
             </a:fld>
             <a:endParaRPr lang="de-DE"/>
           </a:p>
@@ -20137,7 +24512,7 @@
           <p:cNvPr id="4" name="Fußzeilenplatzhalter 3">
             <a:extLst>
               <a:ext uri="{FF2B5EF4-FFF2-40B4-BE49-F238E27FC236}">
-                <a16:creationId xmlns:a16="http://schemas.microsoft.com/office/drawing/2014/main" id="{405FB890-7864-0057-05A9-6196EA77512B}"/>
+                <a16:creationId xmlns:a16="http://schemas.microsoft.com/office/drawing/2014/main" id="{E2D17137-E224-31CC-C3DE-FB27A2EA0D46}"/>
               </a:ext>
             </a:extLst>
           </p:cNvPr>
@@ -20162,7 +24537,7 @@
           <p:cNvPr id="5" name="Foliennummernplatzhalter 4">
             <a:extLst>
               <a:ext uri="{FF2B5EF4-FFF2-40B4-BE49-F238E27FC236}">
-                <a16:creationId xmlns:a16="http://schemas.microsoft.com/office/drawing/2014/main" id="{719D1DF6-B5B6-693F-0F65-1CEAA93F7C78}"/>
+                <a16:creationId xmlns:a16="http://schemas.microsoft.com/office/drawing/2014/main" id="{4771B396-ECD8-44D6-3B84-F1F75A865FD5}"/>
               </a:ext>
             </a:extLst>
           </p:cNvPr>
@@ -20178,7 +24553,7 @@
           <a:bodyPr/>
           <a:lstStyle/>
           <a:p>
-            <a:fld id="{AF2925FD-2DD3-43DD-8B59-4A314B41F5B3}" type="slidenum">
+            <a:fld id="{FFBDEC81-508D-44D4-90FD-13C7042BF947}" type="slidenum">
               <a:rPr lang="de-DE" smtClean="0"/>
               <a:t>‹Nr.›</a:t>
             </a:fld>
@@ -20189,7 +24564,7 @@
     </p:spTree>
     <p:extLst>
       <p:ext uri="{BB962C8B-B14F-4D97-AF65-F5344CB8AC3E}">
-        <p14:creationId xmlns:p14="http://schemas.microsoft.com/office/powerpoint/2010/main" val="564198621"/>
+        <p14:creationId xmlns:p14="http://schemas.microsoft.com/office/powerpoint/2010/main" val="2263402835"/>
       </p:ext>
     </p:extLst>
   </p:cSld>
@@ -20221,7 +24596,7 @@
           <p:cNvPr id="2" name="Datumsplatzhalter 1">
             <a:extLst>
               <a:ext uri="{FF2B5EF4-FFF2-40B4-BE49-F238E27FC236}">
-                <a16:creationId xmlns:a16="http://schemas.microsoft.com/office/drawing/2014/main" id="{F67C852F-BEFA-24F4-4EDA-4E26819FC0B9}"/>
+                <a16:creationId xmlns:a16="http://schemas.microsoft.com/office/drawing/2014/main" id="{B59C904A-13B0-CB24-A082-3B16516098C2}"/>
               </a:ext>
             </a:extLst>
           </p:cNvPr>
@@ -20237,9 +24612,9 @@
           <a:bodyPr/>
           <a:lstStyle/>
           <a:p>
-            <a:fld id="{261859EB-D23C-4616-B420-B67BCB3819AC}" type="datetimeFigureOut">
+            <a:fld id="{A936448D-79D5-487E-97B9-44F7185C8186}" type="datetimeFigureOut">
               <a:rPr lang="de-DE" smtClean="0"/>
-              <a:t>08.10.2026</a:t>
+              <a:t>09.10.2026</a:t>
             </a:fld>
             <a:endParaRPr lang="de-DE"/>
           </a:p>
@@ -20250,7 +24625,7 @@
           <p:cNvPr id="3" name="Fußzeilenplatzhalter 2">
             <a:extLst>
               <a:ext uri="{FF2B5EF4-FFF2-40B4-BE49-F238E27FC236}">
-                <a16:creationId xmlns:a16="http://schemas.microsoft.com/office/drawing/2014/main" id="{E3FC517E-D7AC-7400-21E3-F7522B0EE532}"/>
+                <a16:creationId xmlns:a16="http://schemas.microsoft.com/office/drawing/2014/main" id="{6C125BD4-C8A8-8396-D5F7-3F425D3529EF}"/>
               </a:ext>
             </a:extLst>
           </p:cNvPr>
@@ -20275,7 +24650,7 @@
           <p:cNvPr id="4" name="Foliennummernplatzhalter 3">
             <a:extLst>
               <a:ext uri="{FF2B5EF4-FFF2-40B4-BE49-F238E27FC236}">
-                <a16:creationId xmlns:a16="http://schemas.microsoft.com/office/drawing/2014/main" id="{8CDA67B5-64CD-33BB-E7A1-5BE3C593E55A}"/>
+                <a16:creationId xmlns:a16="http://schemas.microsoft.com/office/drawing/2014/main" id="{AA8BD9B5-C948-E4A1-B2B5-459B86C291E1}"/>
               </a:ext>
             </a:extLst>
           </p:cNvPr>
@@ -20291,7 +24666,7 @@
           <a:bodyPr/>
           <a:lstStyle/>
           <a:p>
-            <a:fld id="{AF2925FD-2DD3-43DD-8B59-4A314B41F5B3}" type="slidenum">
+            <a:fld id="{FFBDEC81-508D-44D4-90FD-13C7042BF947}" type="slidenum">
               <a:rPr lang="de-DE" smtClean="0"/>
               <a:t>‹Nr.›</a:t>
             </a:fld>
@@ -20302,7 +24677,7 @@
     </p:spTree>
     <p:extLst>
       <p:ext uri="{BB962C8B-B14F-4D97-AF65-F5344CB8AC3E}">
-        <p14:creationId xmlns:p14="http://schemas.microsoft.com/office/powerpoint/2010/main" val="2301408669"/>
+        <p14:creationId xmlns:p14="http://schemas.microsoft.com/office/powerpoint/2010/main" val="3386121002"/>
       </p:ext>
     </p:extLst>
   </p:cSld>
@@ -20334,7 +24709,7 @@
           <p:cNvPr id="2" name="Titel 1">
             <a:extLst>
               <a:ext uri="{FF2B5EF4-FFF2-40B4-BE49-F238E27FC236}">
-                <a16:creationId xmlns:a16="http://schemas.microsoft.com/office/drawing/2014/main" id="{29E1930B-5E80-5407-1DCF-85A5BDCD1536}"/>
+                <a16:creationId xmlns:a16="http://schemas.microsoft.com/office/drawing/2014/main" id="{166C402B-E295-2BC1-462A-7C23635E42DE}"/>
               </a:ext>
             </a:extLst>
           </p:cNvPr>
@@ -20371,7 +24746,7 @@
           <p:cNvPr id="3" name="Inhaltsplatzhalter 2">
             <a:extLst>
               <a:ext uri="{FF2B5EF4-FFF2-40B4-BE49-F238E27FC236}">
-                <a16:creationId xmlns:a16="http://schemas.microsoft.com/office/drawing/2014/main" id="{CAF2EFB7-3E90-1514-DCD6-770B2DC96125}"/>
+                <a16:creationId xmlns:a16="http://schemas.microsoft.com/office/drawing/2014/main" id="{5AAD696D-774C-4B94-7044-6689B7B3F5B7}"/>
               </a:ext>
             </a:extLst>
           </p:cNvPr>
@@ -20461,7 +24836,7 @@
           <p:cNvPr id="4" name="Textplatzhalter 3">
             <a:extLst>
               <a:ext uri="{FF2B5EF4-FFF2-40B4-BE49-F238E27FC236}">
-                <a16:creationId xmlns:a16="http://schemas.microsoft.com/office/drawing/2014/main" id="{152D9C3A-BB4E-DE37-5A69-FF09697E4C0D}"/>
+                <a16:creationId xmlns:a16="http://schemas.microsoft.com/office/drawing/2014/main" id="{B42D1AE2-9DC1-FA91-5EB6-CF3346DDBEC2}"/>
               </a:ext>
             </a:extLst>
           </p:cNvPr>
@@ -20532,7 +24907,7 @@
           <p:cNvPr id="5" name="Datumsplatzhalter 4">
             <a:extLst>
               <a:ext uri="{FF2B5EF4-FFF2-40B4-BE49-F238E27FC236}">
-                <a16:creationId xmlns:a16="http://schemas.microsoft.com/office/drawing/2014/main" id="{34CA6A38-175B-6B7C-7E99-BE7BF2C91BA9}"/>
+                <a16:creationId xmlns:a16="http://schemas.microsoft.com/office/drawing/2014/main" id="{1A048B47-09E6-2860-A908-F77CCAE8F96D}"/>
               </a:ext>
             </a:extLst>
           </p:cNvPr>
@@ -20548,9 +24923,9 @@
           <a:bodyPr/>
           <a:lstStyle/>
           <a:p>
-            <a:fld id="{261859EB-D23C-4616-B420-B67BCB3819AC}" type="datetimeFigureOut">
+            <a:fld id="{A936448D-79D5-487E-97B9-44F7185C8186}" type="datetimeFigureOut">
               <a:rPr lang="de-DE" smtClean="0"/>
-              <a:t>08.10.2026</a:t>
+              <a:t>09.10.2026</a:t>
             </a:fld>
             <a:endParaRPr lang="de-DE"/>
           </a:p>
@@ -20561,7 +24936,7 @@
           <p:cNvPr id="6" name="Fußzeilenplatzhalter 5">
             <a:extLst>
               <a:ext uri="{FF2B5EF4-FFF2-40B4-BE49-F238E27FC236}">
-                <a16:creationId xmlns:a16="http://schemas.microsoft.com/office/drawing/2014/main" id="{3BF35862-19F5-00B6-F629-4AF9A6DACD1E}"/>
+                <a16:creationId xmlns:a16="http://schemas.microsoft.com/office/drawing/2014/main" id="{9B5D7A24-6F21-F296-E3FA-2342CC49C4AB}"/>
               </a:ext>
             </a:extLst>
           </p:cNvPr>
@@ -20586,7 +24961,7 @@
           <p:cNvPr id="7" name="Foliennummernplatzhalter 6">
             <a:extLst>
               <a:ext uri="{FF2B5EF4-FFF2-40B4-BE49-F238E27FC236}">
-                <a16:creationId xmlns:a16="http://schemas.microsoft.com/office/drawing/2014/main" id="{DABDF6CC-7D24-7B75-ABA3-B5CB9D6C0491}"/>
+                <a16:creationId xmlns:a16="http://schemas.microsoft.com/office/drawing/2014/main" id="{B9689960-0969-D6ED-6510-3B662FAC54BD}"/>
               </a:ext>
             </a:extLst>
           </p:cNvPr>
@@ -20602,7 +24977,7 @@
           <a:bodyPr/>
           <a:lstStyle/>
           <a:p>
-            <a:fld id="{AF2925FD-2DD3-43DD-8B59-4A314B41F5B3}" type="slidenum">
+            <a:fld id="{FFBDEC81-508D-44D4-90FD-13C7042BF947}" type="slidenum">
               <a:rPr lang="de-DE" smtClean="0"/>
               <a:t>‹Nr.›</a:t>
             </a:fld>
@@ -20613,7 +24988,7 @@
     </p:spTree>
     <p:extLst>
       <p:ext uri="{BB962C8B-B14F-4D97-AF65-F5344CB8AC3E}">
-        <p14:creationId xmlns:p14="http://schemas.microsoft.com/office/powerpoint/2010/main" val="86839411"/>
+        <p14:creationId xmlns:p14="http://schemas.microsoft.com/office/powerpoint/2010/main" val="3361400431"/>
       </p:ext>
     </p:extLst>
   </p:cSld>
@@ -20645,7 +25020,7 @@
           <p:cNvPr id="2" name="Titel 1">
             <a:extLst>
               <a:ext uri="{FF2B5EF4-FFF2-40B4-BE49-F238E27FC236}">
-                <a16:creationId xmlns:a16="http://schemas.microsoft.com/office/drawing/2014/main" id="{3866BDEB-3F6E-A58C-8847-62BB5DCD7F60}"/>
+                <a16:creationId xmlns:a16="http://schemas.microsoft.com/office/drawing/2014/main" id="{7172AF41-5E8E-BEF0-6393-5BF3D679A450}"/>
               </a:ext>
             </a:extLst>
           </p:cNvPr>
@@ -20682,7 +25057,7 @@
           <p:cNvPr id="3" name="Bildplatzhalter 2">
             <a:extLst>
               <a:ext uri="{FF2B5EF4-FFF2-40B4-BE49-F238E27FC236}">
-                <a16:creationId xmlns:a16="http://schemas.microsoft.com/office/drawing/2014/main" id="{FF398D54-27AD-40F3-B5F4-868CEE968188}"/>
+                <a16:creationId xmlns:a16="http://schemas.microsoft.com/office/drawing/2014/main" id="{7A770D63-FB0A-A8AC-8C2A-C195C5542418}"/>
               </a:ext>
             </a:extLst>
           </p:cNvPr>
@@ -20749,7 +25124,7 @@
           <p:cNvPr id="4" name="Textplatzhalter 3">
             <a:extLst>
               <a:ext uri="{FF2B5EF4-FFF2-40B4-BE49-F238E27FC236}">
-                <a16:creationId xmlns:a16="http://schemas.microsoft.com/office/drawing/2014/main" id="{A1946ED2-FCB4-FE13-E9F9-EC576F1418F5}"/>
+                <a16:creationId xmlns:a16="http://schemas.microsoft.com/office/drawing/2014/main" id="{122EC0D1-575B-EACA-1104-E907B419644D}"/>
               </a:ext>
             </a:extLst>
           </p:cNvPr>
@@ -20820,7 +25195,7 @@
           <p:cNvPr id="5" name="Datumsplatzhalter 4">
             <a:extLst>
               <a:ext uri="{FF2B5EF4-FFF2-40B4-BE49-F238E27FC236}">
-                <a16:creationId xmlns:a16="http://schemas.microsoft.com/office/drawing/2014/main" id="{75C3B0E0-EE83-E54E-BD0E-56998A624648}"/>
+                <a16:creationId xmlns:a16="http://schemas.microsoft.com/office/drawing/2014/main" id="{192079EE-FF0B-0352-0F60-96CD452B8A2F}"/>
               </a:ext>
             </a:extLst>
           </p:cNvPr>
@@ -20836,9 +25211,9 @@
           <a:bodyPr/>
           <a:lstStyle/>
           <a:p>
-            <a:fld id="{261859EB-D23C-4616-B420-B67BCB3819AC}" type="datetimeFigureOut">
+            <a:fld id="{A936448D-79D5-487E-97B9-44F7185C8186}" type="datetimeFigureOut">
               <a:rPr lang="de-DE" smtClean="0"/>
-              <a:t>08.10.2026</a:t>
+              <a:t>09.10.2026</a:t>
             </a:fld>
             <a:endParaRPr lang="de-DE"/>
           </a:p>
@@ -20849,7 +25224,7 @@
           <p:cNvPr id="6" name="Fußzeilenplatzhalter 5">
             <a:extLst>
               <a:ext uri="{FF2B5EF4-FFF2-40B4-BE49-F238E27FC236}">
-                <a16:creationId xmlns:a16="http://schemas.microsoft.com/office/drawing/2014/main" id="{575D048F-8C33-5F72-2A30-251C8D9A4548}"/>
+                <a16:creationId xmlns:a16="http://schemas.microsoft.com/office/drawing/2014/main" id="{EF7720FE-6E92-EA64-3829-D8F6AA250B49}"/>
               </a:ext>
             </a:extLst>
           </p:cNvPr>
@@ -20874,7 +25249,7 @@
           <p:cNvPr id="7" name="Foliennummernplatzhalter 6">
             <a:extLst>
               <a:ext uri="{FF2B5EF4-FFF2-40B4-BE49-F238E27FC236}">
-                <a16:creationId xmlns:a16="http://schemas.microsoft.com/office/drawing/2014/main" id="{83BEBB6A-C2A5-9CA1-C7A0-2DDBE2D1AB6D}"/>
+                <a16:creationId xmlns:a16="http://schemas.microsoft.com/office/drawing/2014/main" id="{8F0A045B-EBC9-7440-4E25-F052D0CE237C}"/>
               </a:ext>
             </a:extLst>
           </p:cNvPr>
@@ -20890,7 +25265,7 @@
           <a:bodyPr/>
           <a:lstStyle/>
           <a:p>
-            <a:fld id="{AF2925FD-2DD3-43DD-8B59-4A314B41F5B3}" type="slidenum">
+            <a:fld id="{FFBDEC81-508D-44D4-90FD-13C7042BF947}" type="slidenum">
               <a:rPr lang="de-DE" smtClean="0"/>
               <a:t>‹Nr.›</a:t>
             </a:fld>
@@ -20901,7 +25276,7 @@
     </p:spTree>
     <p:extLst>
       <p:ext uri="{BB962C8B-B14F-4D97-AF65-F5344CB8AC3E}">
-        <p14:creationId xmlns:p14="http://schemas.microsoft.com/office/powerpoint/2010/main" val="2406186963"/>
+        <p14:creationId xmlns:p14="http://schemas.microsoft.com/office/powerpoint/2010/main" val="631555843"/>
       </p:ext>
     </p:extLst>
   </p:cSld>
@@ -20938,7 +25313,7 @@
           <p:cNvPr id="2" name="Titelplatzhalter 1">
             <a:extLst>
               <a:ext uri="{FF2B5EF4-FFF2-40B4-BE49-F238E27FC236}">
-                <a16:creationId xmlns:a16="http://schemas.microsoft.com/office/drawing/2014/main" id="{D53A055C-2C43-2E66-9D37-A813C3A394A2}"/>
+                <a16:creationId xmlns:a16="http://schemas.microsoft.com/office/drawing/2014/main" id="{DD1D50A9-FBC3-67C7-25E5-4D747F68C698}"/>
               </a:ext>
             </a:extLst>
           </p:cNvPr>
@@ -20976,7 +25351,7 @@
           <p:cNvPr id="3" name="Textplatzhalter 2">
             <a:extLst>
               <a:ext uri="{FF2B5EF4-FFF2-40B4-BE49-F238E27FC236}">
-                <a16:creationId xmlns:a16="http://schemas.microsoft.com/office/drawing/2014/main" id="{37CF5306-55C2-04BA-6C12-091E420A6E8B}"/>
+                <a16:creationId xmlns:a16="http://schemas.microsoft.com/office/drawing/2014/main" id="{2EB4B362-E552-B91D-3D9E-CE3208345DA0}"/>
               </a:ext>
             </a:extLst>
           </p:cNvPr>
@@ -21043,7 +25418,7 @@
           <p:cNvPr id="4" name="Datumsplatzhalter 3">
             <a:extLst>
               <a:ext uri="{FF2B5EF4-FFF2-40B4-BE49-F238E27FC236}">
-                <a16:creationId xmlns:a16="http://schemas.microsoft.com/office/drawing/2014/main" id="{C0E59024-A6C1-F170-3027-15F0FBAD2BA5}"/>
+                <a16:creationId xmlns:a16="http://schemas.microsoft.com/office/drawing/2014/main" id="{EAB8DEF7-AE42-C400-95DA-7A82A3CD1240}"/>
               </a:ext>
             </a:extLst>
           </p:cNvPr>
@@ -21077,9 +25452,9 @@
             </a:lvl1pPr>
           </a:lstStyle>
           <a:p>
-            <a:fld id="{261859EB-D23C-4616-B420-B67BCB3819AC}" type="datetimeFigureOut">
+            <a:fld id="{A936448D-79D5-487E-97B9-44F7185C8186}" type="datetimeFigureOut">
               <a:rPr lang="de-DE" smtClean="0"/>
-              <a:t>08.10.2026</a:t>
+              <a:t>09.10.2026</a:t>
             </a:fld>
             <a:endParaRPr lang="de-DE"/>
           </a:p>
@@ -21090,7 +25465,7 @@
           <p:cNvPr id="5" name="Fußzeilenplatzhalter 4">
             <a:extLst>
               <a:ext uri="{FF2B5EF4-FFF2-40B4-BE49-F238E27FC236}">
-                <a16:creationId xmlns:a16="http://schemas.microsoft.com/office/drawing/2014/main" id="{38E2D79A-E053-A04C-B64C-D7C7C96861B7}"/>
+                <a16:creationId xmlns:a16="http://schemas.microsoft.com/office/drawing/2014/main" id="{17256779-79E4-5409-AD19-88D009B2AB9C}"/>
               </a:ext>
             </a:extLst>
           </p:cNvPr>
@@ -21133,7 +25508,7 @@
           <p:cNvPr id="6" name="Foliennummernplatzhalter 5">
             <a:extLst>
               <a:ext uri="{FF2B5EF4-FFF2-40B4-BE49-F238E27FC236}">
-                <a16:creationId xmlns:a16="http://schemas.microsoft.com/office/drawing/2014/main" id="{581FA1B0-31DB-5D89-9F79-10D714E0AF16}"/>
+                <a16:creationId xmlns:a16="http://schemas.microsoft.com/office/drawing/2014/main" id="{F7BBC4C8-9636-1717-359D-B8BB1C502574}"/>
               </a:ext>
             </a:extLst>
           </p:cNvPr>
@@ -21167,7 +25542,7 @@
             </a:lvl1pPr>
           </a:lstStyle>
           <a:p>
-            <a:fld id="{AF2925FD-2DD3-43DD-8B59-4A314B41F5B3}" type="slidenum">
+            <a:fld id="{FFBDEC81-508D-44D4-90FD-13C7042BF947}" type="slidenum">
               <a:rPr lang="de-DE" smtClean="0"/>
               <a:t>‹Nr.›</a:t>
             </a:fld>
@@ -21178,7 +25553,7 @@
     </p:spTree>
     <p:extLst>
       <p:ext uri="{BB962C8B-B14F-4D97-AF65-F5344CB8AC3E}">
-        <p14:creationId xmlns:p14="http://schemas.microsoft.com/office/powerpoint/2010/main" val="157151584"/>
+        <p14:creationId xmlns:p14="http://schemas.microsoft.com/office/powerpoint/2010/main" val="708028438"/>
       </p:ext>
     </p:extLst>
   </p:cSld>
@@ -21501,7 +25876,7 @@
           <p:cNvPr id="2" name="Titel 1">
             <a:extLst>
               <a:ext uri="{FF2B5EF4-FFF2-40B4-BE49-F238E27FC236}">
-                <a16:creationId xmlns:a16="http://schemas.microsoft.com/office/drawing/2014/main" id="{DF64042F-8E45-4463-983A-F5F60CB1A76B}"/>
+                <a16:creationId xmlns:a16="http://schemas.microsoft.com/office/drawing/2014/main" id="{4A93B1EC-9BE2-B21D-9D64-0AA70C88C2E2}"/>
               </a:ext>
             </a:extLst>
           </p:cNvPr>
@@ -21529,7 +25904,7 @@
           <p:cNvPr id="3" name="Diagramm 2">
             <a:extLst>
               <a:ext uri="{FF2B5EF4-FFF2-40B4-BE49-F238E27FC236}">
-                <a16:creationId xmlns:a16="http://schemas.microsoft.com/office/drawing/2014/main" id="{C39CBEB3-E1B8-7A5B-36FC-D0C4ACF9753E}"/>
+                <a16:creationId xmlns:a16="http://schemas.microsoft.com/office/drawing/2014/main" id="{44BBF4E3-411C-0F8D-9373-70D0A56B4FE7}"/>
               </a:ext>
             </a:extLst>
           </p:cNvPr>
@@ -21537,7 +25912,7 @@
           <p:nvPr>
             <p:extLst>
               <p:ext uri="{D42A27DB-BD31-4B8C-83A1-F6EECF244321}">
-                <p14:modId xmlns:p14="http://schemas.microsoft.com/office/powerpoint/2010/main" val="2046094727"/>
+                <p14:modId xmlns:p14="http://schemas.microsoft.com/office/powerpoint/2010/main" val="458247186"/>
               </p:ext>
             </p:extLst>
           </p:nvPr>
@@ -21555,7 +25930,7 @@
     </p:spTree>
     <p:extLst>
       <p:ext uri="{BB962C8B-B14F-4D97-AF65-F5344CB8AC3E}">
-        <p14:creationId xmlns:p14="http://schemas.microsoft.com/office/powerpoint/2010/main" val="1422955890"/>
+        <p14:creationId xmlns:p14="http://schemas.microsoft.com/office/powerpoint/2010/main" val="1970473284"/>
       </p:ext>
     </p:extLst>
   </p:cSld>
@@ -21587,7 +25962,7 @@
           <p:cNvPr id="2" name="Titel 1">
             <a:extLst>
               <a:ext uri="{FF2B5EF4-FFF2-40B4-BE49-F238E27FC236}">
-                <a16:creationId xmlns:a16="http://schemas.microsoft.com/office/drawing/2014/main" id="{440CCEAD-D13F-B513-E05A-8DDFB1BCB613}"/>
+                <a16:creationId xmlns:a16="http://schemas.microsoft.com/office/drawing/2014/main" id="{E7672628-2894-4847-5DD9-2829096CAFD6}"/>
               </a:ext>
             </a:extLst>
           </p:cNvPr>
@@ -21615,7 +25990,7 @@
           <p:cNvPr id="3" name="Diagramm 2">
             <a:extLst>
               <a:ext uri="{FF2B5EF4-FFF2-40B4-BE49-F238E27FC236}">
-                <a16:creationId xmlns:a16="http://schemas.microsoft.com/office/drawing/2014/main" id="{CA777DBF-D5BA-F711-C44C-B2DA1F9B4A21}"/>
+                <a16:creationId xmlns:a16="http://schemas.microsoft.com/office/drawing/2014/main" id="{DB8DBC51-C5D8-2BE9-9C53-18DE592F9F69}"/>
               </a:ext>
             </a:extLst>
           </p:cNvPr>
@@ -21623,7 +25998,7 @@
           <p:nvPr>
             <p:extLst>
               <p:ext uri="{D42A27DB-BD31-4B8C-83A1-F6EECF244321}">
-                <p14:modId xmlns:p14="http://schemas.microsoft.com/office/powerpoint/2010/main" val="2269451071"/>
+                <p14:modId xmlns:p14="http://schemas.microsoft.com/office/powerpoint/2010/main" val="2272419366"/>
               </p:ext>
             </p:extLst>
           </p:nvPr>
@@ -21641,7 +26016,7 @@
     </p:spTree>
     <p:extLst>
       <p:ext uri="{BB962C8B-B14F-4D97-AF65-F5344CB8AC3E}">
-        <p14:creationId xmlns:p14="http://schemas.microsoft.com/office/powerpoint/2010/main" val="2790536160"/>
+        <p14:creationId xmlns:p14="http://schemas.microsoft.com/office/powerpoint/2010/main" val="3833951391"/>
       </p:ext>
     </p:extLst>
   </p:cSld>
@@ -21673,7 +26048,7 @@
           <p:cNvPr id="2" name="Titel 1">
             <a:extLst>
               <a:ext uri="{FF2B5EF4-FFF2-40B4-BE49-F238E27FC236}">
-                <a16:creationId xmlns:a16="http://schemas.microsoft.com/office/drawing/2014/main" id="{67C70487-1FB5-E2F4-3686-B5277E2AA0D2}"/>
+                <a16:creationId xmlns:a16="http://schemas.microsoft.com/office/drawing/2014/main" id="{528068D0-8988-BFCD-AE02-E26CCF27AA57}"/>
               </a:ext>
             </a:extLst>
           </p:cNvPr>
@@ -21701,7 +26076,7 @@
           <p:cNvPr id="3" name="Diagramm 2">
             <a:extLst>
               <a:ext uri="{FF2B5EF4-FFF2-40B4-BE49-F238E27FC236}">
-                <a16:creationId xmlns:a16="http://schemas.microsoft.com/office/drawing/2014/main" id="{63EC1C92-4186-F429-78FA-136FD143696B}"/>
+                <a16:creationId xmlns:a16="http://schemas.microsoft.com/office/drawing/2014/main" id="{D784B409-95EC-1D28-4CA2-C6C7E5E9944F}"/>
               </a:ext>
             </a:extLst>
           </p:cNvPr>
@@ -21709,7 +26084,7 @@
           <p:nvPr>
             <p:extLst>
               <p:ext uri="{D42A27DB-BD31-4B8C-83A1-F6EECF244321}">
-                <p14:modId xmlns:p14="http://schemas.microsoft.com/office/powerpoint/2010/main" val="1356611954"/>
+                <p14:modId xmlns:p14="http://schemas.microsoft.com/office/powerpoint/2010/main" val="3594308255"/>
               </p:ext>
             </p:extLst>
           </p:nvPr>
@@ -21727,7 +26102,7 @@
     </p:spTree>
     <p:extLst>
       <p:ext uri="{BB962C8B-B14F-4D97-AF65-F5344CB8AC3E}">
-        <p14:creationId xmlns:p14="http://schemas.microsoft.com/office/powerpoint/2010/main" val="3824554807"/>
+        <p14:creationId xmlns:p14="http://schemas.microsoft.com/office/powerpoint/2010/main" val="2405999837"/>
       </p:ext>
     </p:extLst>
   </p:cSld>
@@ -21759,7 +26134,7 @@
           <p:cNvPr id="2" name="Titel 1">
             <a:extLst>
               <a:ext uri="{FF2B5EF4-FFF2-40B4-BE49-F238E27FC236}">
-                <a16:creationId xmlns:a16="http://schemas.microsoft.com/office/drawing/2014/main" id="{64884CA8-8811-CAD1-C48B-85A82B47E33F}"/>
+                <a16:creationId xmlns:a16="http://schemas.microsoft.com/office/drawing/2014/main" id="{2F019971-AD88-E4DA-0B7C-65785AE5D074}"/>
               </a:ext>
             </a:extLst>
           </p:cNvPr>
@@ -21787,7 +26162,7 @@
           <p:cNvPr id="3" name="Diagramm 2">
             <a:extLst>
               <a:ext uri="{FF2B5EF4-FFF2-40B4-BE49-F238E27FC236}">
-                <a16:creationId xmlns:a16="http://schemas.microsoft.com/office/drawing/2014/main" id="{17859F25-A49A-8F68-C192-F0FA117CA385}"/>
+                <a16:creationId xmlns:a16="http://schemas.microsoft.com/office/drawing/2014/main" id="{35C06089-7308-6CCC-B7AA-D453C087DF73}"/>
               </a:ext>
             </a:extLst>
           </p:cNvPr>
@@ -21795,7 +26170,7 @@
           <p:nvPr>
             <p:extLst>
               <p:ext uri="{D42A27DB-BD31-4B8C-83A1-F6EECF244321}">
-                <p14:modId xmlns:p14="http://schemas.microsoft.com/office/powerpoint/2010/main" val="3520643548"/>
+                <p14:modId xmlns:p14="http://schemas.microsoft.com/office/powerpoint/2010/main" val="2334714179"/>
               </p:ext>
             </p:extLst>
           </p:nvPr>
@@ -21813,7 +26188,7 @@
     </p:spTree>
     <p:extLst>
       <p:ext uri="{BB962C8B-B14F-4D97-AF65-F5344CB8AC3E}">
-        <p14:creationId xmlns:p14="http://schemas.microsoft.com/office/powerpoint/2010/main" val="3740432338"/>
+        <p14:creationId xmlns:p14="http://schemas.microsoft.com/office/powerpoint/2010/main" val="2624185572"/>
       </p:ext>
     </p:extLst>
   </p:cSld>
@@ -21845,7 +26220,7 @@
           <p:cNvPr id="2" name="Titel 1">
             <a:extLst>
               <a:ext uri="{FF2B5EF4-FFF2-40B4-BE49-F238E27FC236}">
-                <a16:creationId xmlns:a16="http://schemas.microsoft.com/office/drawing/2014/main" id="{5B47665C-55B0-5A13-9F98-66B1D0CDFAE7}"/>
+                <a16:creationId xmlns:a16="http://schemas.microsoft.com/office/drawing/2014/main" id="{2259AE8C-6F95-09B9-063E-B36146D83B27}"/>
               </a:ext>
             </a:extLst>
           </p:cNvPr>
@@ -21873,7 +26248,7 @@
           <p:cNvPr id="3" name="Diagramm 2">
             <a:extLst>
               <a:ext uri="{FF2B5EF4-FFF2-40B4-BE49-F238E27FC236}">
-                <a16:creationId xmlns:a16="http://schemas.microsoft.com/office/drawing/2014/main" id="{2A1F8E97-5D36-AFC6-7D2E-04C8932D077F}"/>
+                <a16:creationId xmlns:a16="http://schemas.microsoft.com/office/drawing/2014/main" id="{46567652-6AF3-7624-3BE3-E95AA4FB7AE8}"/>
               </a:ext>
             </a:extLst>
           </p:cNvPr>
@@ -21881,7 +26256,7 @@
           <p:nvPr>
             <p:extLst>
               <p:ext uri="{D42A27DB-BD31-4B8C-83A1-F6EECF244321}">
-                <p14:modId xmlns:p14="http://schemas.microsoft.com/office/powerpoint/2010/main" val="3392728440"/>
+                <p14:modId xmlns:p14="http://schemas.microsoft.com/office/powerpoint/2010/main" val="262429557"/>
               </p:ext>
             </p:extLst>
           </p:nvPr>
@@ -21899,7 +26274,7 @@
     </p:spTree>
     <p:extLst>
       <p:ext uri="{BB962C8B-B14F-4D97-AF65-F5344CB8AC3E}">
-        <p14:creationId xmlns:p14="http://schemas.microsoft.com/office/powerpoint/2010/main" val="3590526212"/>
+        <p14:creationId xmlns:p14="http://schemas.microsoft.com/office/powerpoint/2010/main" val="3485452502"/>
       </p:ext>
     </p:extLst>
   </p:cSld>
@@ -21931,7 +26306,7 @@
           <p:cNvPr id="2" name="Titel 1">
             <a:extLst>
               <a:ext uri="{FF2B5EF4-FFF2-40B4-BE49-F238E27FC236}">
-                <a16:creationId xmlns:a16="http://schemas.microsoft.com/office/drawing/2014/main" id="{D509FD29-D234-08A6-8A17-FE495AF4FD68}"/>
+                <a16:creationId xmlns:a16="http://schemas.microsoft.com/office/drawing/2014/main" id="{623A89E5-4E85-0C02-3DFF-D876EFA3F5BE}"/>
               </a:ext>
             </a:extLst>
           </p:cNvPr>
@@ -21959,7 +26334,7 @@
           <p:cNvPr id="3" name="Diagramm 2">
             <a:extLst>
               <a:ext uri="{FF2B5EF4-FFF2-40B4-BE49-F238E27FC236}">
-                <a16:creationId xmlns:a16="http://schemas.microsoft.com/office/drawing/2014/main" id="{AEDA1E38-4DA8-D408-1FB5-8C5235AE232B}"/>
+                <a16:creationId xmlns:a16="http://schemas.microsoft.com/office/drawing/2014/main" id="{BBC22DFD-2A3A-76DF-0BBE-E8E74B362CCD}"/>
               </a:ext>
             </a:extLst>
           </p:cNvPr>
@@ -21967,7 +26342,7 @@
           <p:nvPr>
             <p:extLst>
               <p:ext uri="{D42A27DB-BD31-4B8C-83A1-F6EECF244321}">
-                <p14:modId xmlns:p14="http://schemas.microsoft.com/office/powerpoint/2010/main" val="672945424"/>
+                <p14:modId xmlns:p14="http://schemas.microsoft.com/office/powerpoint/2010/main" val="4085362330"/>
               </p:ext>
             </p:extLst>
           </p:nvPr>
@@ -21987,7 +26362,7 @@
           <p:cNvPr id="4" name="Diagramm 3">
             <a:extLst>
               <a:ext uri="{FF2B5EF4-FFF2-40B4-BE49-F238E27FC236}">
-                <a16:creationId xmlns:a16="http://schemas.microsoft.com/office/drawing/2014/main" id="{57527DA6-E258-EBAD-AD2A-ED7B79DF3576}"/>
+                <a16:creationId xmlns:a16="http://schemas.microsoft.com/office/drawing/2014/main" id="{76C5B0F5-4987-C623-1094-9482B922634C}"/>
               </a:ext>
             </a:extLst>
           </p:cNvPr>
@@ -21995,7 +26370,7 @@
           <p:nvPr>
             <p:extLst>
               <p:ext uri="{D42A27DB-BD31-4B8C-83A1-F6EECF244321}">
-                <p14:modId xmlns:p14="http://schemas.microsoft.com/office/powerpoint/2010/main" val="1847299660"/>
+                <p14:modId xmlns:p14="http://schemas.microsoft.com/office/powerpoint/2010/main" val="1557730106"/>
               </p:ext>
             </p:extLst>
           </p:nvPr>
@@ -22015,7 +26390,7 @@
           <p:cNvPr id="5" name="Diagramm 4">
             <a:extLst>
               <a:ext uri="{FF2B5EF4-FFF2-40B4-BE49-F238E27FC236}">
-                <a16:creationId xmlns:a16="http://schemas.microsoft.com/office/drawing/2014/main" id="{16F6B3F0-A98B-BD8F-1B56-39BC1DEB97A7}"/>
+                <a16:creationId xmlns:a16="http://schemas.microsoft.com/office/drawing/2014/main" id="{64DC757E-CE14-0F25-FC69-82CD27D8DA33}"/>
               </a:ext>
             </a:extLst>
           </p:cNvPr>
@@ -22023,7 +26398,7 @@
           <p:nvPr>
             <p:extLst>
               <p:ext uri="{D42A27DB-BD31-4B8C-83A1-F6EECF244321}">
-                <p14:modId xmlns:p14="http://schemas.microsoft.com/office/powerpoint/2010/main" val="336760325"/>
+                <p14:modId xmlns:p14="http://schemas.microsoft.com/office/powerpoint/2010/main" val="2890425477"/>
               </p:ext>
             </p:extLst>
           </p:nvPr>
@@ -22041,7 +26416,7 @@
     </p:spTree>
     <p:extLst>
       <p:ext uri="{BB962C8B-B14F-4D97-AF65-F5344CB8AC3E}">
-        <p14:creationId xmlns:p14="http://schemas.microsoft.com/office/powerpoint/2010/main" val="1930232888"/>
+        <p14:creationId xmlns:p14="http://schemas.microsoft.com/office/powerpoint/2010/main" val="2426498467"/>
       </p:ext>
     </p:extLst>
   </p:cSld>
@@ -22073,7 +26448,7 @@
           <p:cNvPr id="2" name="Titel 1">
             <a:extLst>
               <a:ext uri="{FF2B5EF4-FFF2-40B4-BE49-F238E27FC236}">
-                <a16:creationId xmlns:a16="http://schemas.microsoft.com/office/drawing/2014/main" id="{0CF38EC1-DC88-C126-17E0-7E79237496E9}"/>
+                <a16:creationId xmlns:a16="http://schemas.microsoft.com/office/drawing/2014/main" id="{743CD2FA-3B5B-BF77-405E-E4E22EAA221D}"/>
               </a:ext>
             </a:extLst>
           </p:cNvPr>
@@ -22101,7 +26476,7 @@
           <p:cNvPr id="3" name="Diagramm 2">
             <a:extLst>
               <a:ext uri="{FF2B5EF4-FFF2-40B4-BE49-F238E27FC236}">
-                <a16:creationId xmlns:a16="http://schemas.microsoft.com/office/drawing/2014/main" id="{558167FB-7017-BD96-D73C-FA44DB830232}"/>
+                <a16:creationId xmlns:a16="http://schemas.microsoft.com/office/drawing/2014/main" id="{7A3E4082-86DE-D5F7-E9E0-56B49E70B720}"/>
               </a:ext>
             </a:extLst>
           </p:cNvPr>
@@ -22109,7 +26484,7 @@
           <p:nvPr>
             <p:extLst>
               <p:ext uri="{D42A27DB-BD31-4B8C-83A1-F6EECF244321}">
-                <p14:modId xmlns:p14="http://schemas.microsoft.com/office/powerpoint/2010/main" val="3826034490"/>
+                <p14:modId xmlns:p14="http://schemas.microsoft.com/office/powerpoint/2010/main" val="3253692792"/>
               </p:ext>
             </p:extLst>
           </p:nvPr>
@@ -22127,7 +26502,7 @@
     </p:spTree>
     <p:extLst>
       <p:ext uri="{BB962C8B-B14F-4D97-AF65-F5344CB8AC3E}">
-        <p14:creationId xmlns:p14="http://schemas.microsoft.com/office/powerpoint/2010/main" val="1698666119"/>
+        <p14:creationId xmlns:p14="http://schemas.microsoft.com/office/powerpoint/2010/main" val="3014169642"/>
       </p:ext>
     </p:extLst>
   </p:cSld>
@@ -22159,7 +26534,7 @@
           <p:cNvPr id="2" name="Titel 1">
             <a:extLst>
               <a:ext uri="{FF2B5EF4-FFF2-40B4-BE49-F238E27FC236}">
-                <a16:creationId xmlns:a16="http://schemas.microsoft.com/office/drawing/2014/main" id="{F610C436-692B-E07E-BD58-95AC0ADF8C50}"/>
+                <a16:creationId xmlns:a16="http://schemas.microsoft.com/office/drawing/2014/main" id="{C39F137A-9078-A70B-685B-3344F9E5618F}"/>
               </a:ext>
             </a:extLst>
           </p:cNvPr>
@@ -22187,7 +26562,7 @@
           <p:cNvPr id="3" name="Diagramm 2">
             <a:extLst>
               <a:ext uri="{FF2B5EF4-FFF2-40B4-BE49-F238E27FC236}">
-                <a16:creationId xmlns:a16="http://schemas.microsoft.com/office/drawing/2014/main" id="{7363CBB5-C4A2-4EC7-CB23-29F6B5ECC768}"/>
+                <a16:creationId xmlns:a16="http://schemas.microsoft.com/office/drawing/2014/main" id="{8FFF3AAC-D48F-3D26-2700-6CEE15B2C930}"/>
               </a:ext>
             </a:extLst>
           </p:cNvPr>
@@ -22195,7 +26570,7 @@
           <p:nvPr>
             <p:extLst>
               <p:ext uri="{D42A27DB-BD31-4B8C-83A1-F6EECF244321}">
-                <p14:modId xmlns:p14="http://schemas.microsoft.com/office/powerpoint/2010/main" val="2072467864"/>
+                <p14:modId xmlns:p14="http://schemas.microsoft.com/office/powerpoint/2010/main" val="245859469"/>
               </p:ext>
             </p:extLst>
           </p:nvPr>
@@ -22213,7 +26588,7 @@
     </p:spTree>
     <p:extLst>
       <p:ext uri="{BB962C8B-B14F-4D97-AF65-F5344CB8AC3E}">
-        <p14:creationId xmlns:p14="http://schemas.microsoft.com/office/powerpoint/2010/main" val="1845572295"/>
+        <p14:creationId xmlns:p14="http://schemas.microsoft.com/office/powerpoint/2010/main" val="1813535119"/>
       </p:ext>
     </p:extLst>
   </p:cSld>
@@ -22245,7 +26620,7 @@
           <p:cNvPr id="2" name="Titel 1">
             <a:extLst>
               <a:ext uri="{FF2B5EF4-FFF2-40B4-BE49-F238E27FC236}">
-                <a16:creationId xmlns:a16="http://schemas.microsoft.com/office/drawing/2014/main" id="{8475C205-D57F-0241-B4D5-CECBB5E1C7B9}"/>
+                <a16:creationId xmlns:a16="http://schemas.microsoft.com/office/drawing/2014/main" id="{0FE82FE6-AB93-4643-DD30-55A96B246762}"/>
               </a:ext>
             </a:extLst>
           </p:cNvPr>
@@ -22273,7 +26648,7 @@
           <p:cNvPr id="3" name="Diagramm 2">
             <a:extLst>
               <a:ext uri="{FF2B5EF4-FFF2-40B4-BE49-F238E27FC236}">
-                <a16:creationId xmlns:a16="http://schemas.microsoft.com/office/drawing/2014/main" id="{E52F6B13-E122-2616-27C0-81C645471288}"/>
+                <a16:creationId xmlns:a16="http://schemas.microsoft.com/office/drawing/2014/main" id="{593B0E00-3371-A4D2-D52A-E0E7D8CF650C}"/>
               </a:ext>
             </a:extLst>
           </p:cNvPr>
@@ -22281,7 +26656,7 @@
           <p:nvPr>
             <p:extLst>
               <p:ext uri="{D42A27DB-BD31-4B8C-83A1-F6EECF244321}">
-                <p14:modId xmlns:p14="http://schemas.microsoft.com/office/powerpoint/2010/main" val="1429163901"/>
+                <p14:modId xmlns:p14="http://schemas.microsoft.com/office/powerpoint/2010/main" val="1681657198"/>
               </p:ext>
             </p:extLst>
           </p:nvPr>
@@ -22299,7 +26674,177 @@
     </p:spTree>
     <p:extLst>
       <p:ext uri="{BB962C8B-B14F-4D97-AF65-F5344CB8AC3E}">
-        <p14:creationId xmlns:p14="http://schemas.microsoft.com/office/powerpoint/2010/main" val="3931341936"/>
+        <p14:creationId xmlns:p14="http://schemas.microsoft.com/office/powerpoint/2010/main" val="2959227643"/>
+      </p:ext>
+    </p:extLst>
+  </p:cSld>
+  <p:clrMapOvr>
+    <a:masterClrMapping/>
+  </p:clrMapOvr>
+</p:sld>
+</file>
+
+<file path=ppt/slides/slide18.xml><?xml version="1.0" encoding="utf-8"?>
+<p:sld xmlns:a="http://schemas.openxmlformats.org/drawingml/2006/main" xmlns:r="http://schemas.openxmlformats.org/officeDocument/2006/relationships" xmlns:p="http://schemas.openxmlformats.org/presentationml/2006/main">
+  <p:cSld>
+    <p:spTree>
+      <p:nvGrpSpPr>
+        <p:cNvPr id="1" name=""/>
+        <p:cNvGrpSpPr/>
+        <p:nvPr/>
+      </p:nvGrpSpPr>
+      <p:grpSpPr>
+        <a:xfrm>
+          <a:off x="0" y="0"/>
+          <a:ext cx="0" cy="0"/>
+          <a:chOff x="0" y="0"/>
+          <a:chExt cx="0" cy="0"/>
+        </a:xfrm>
+      </p:grpSpPr>
+      <p:sp>
+        <p:nvSpPr>
+          <p:cNvPr id="2" name="Titel 1">
+            <a:extLst>
+              <a:ext uri="{FF2B5EF4-FFF2-40B4-BE49-F238E27FC236}">
+                <a16:creationId xmlns:a16="http://schemas.microsoft.com/office/drawing/2014/main" id="{A045EFD0-45B6-8BBA-0557-486437282426}"/>
+              </a:ext>
+            </a:extLst>
+          </p:cNvPr>
+          <p:cNvSpPr>
+            <a:spLocks noGrp="1"/>
+          </p:cNvSpPr>
+          <p:nvPr>
+            <p:ph type="title"/>
+          </p:nvPr>
+        </p:nvSpPr>
+        <p:spPr/>
+        <p:txBody>
+          <a:bodyPr/>
+          <a:lstStyle/>
+          <a:p>
+            <a:r>
+              <a:rPr lang="de-DE"/>
+              <a:t>Data labels</a:t>
+            </a:r>
+          </a:p>
+        </p:txBody>
+      </p:sp>
+      <p:graphicFrame>
+        <p:nvGraphicFramePr>
+          <p:cNvPr id="3" name="Diagramm 2">
+            <a:extLst>
+              <a:ext uri="{FF2B5EF4-FFF2-40B4-BE49-F238E27FC236}">
+                <a16:creationId xmlns:a16="http://schemas.microsoft.com/office/drawing/2014/main" id="{0171D305-9B5B-44E3-1960-AC63E8C4FC9D}"/>
+              </a:ext>
+            </a:extLst>
+          </p:cNvPr>
+          <p:cNvGraphicFramePr/>
+          <p:nvPr>
+            <p:extLst>
+              <p:ext uri="{D42A27DB-BD31-4B8C-83A1-F6EECF244321}">
+                <p14:modId xmlns:p14="http://schemas.microsoft.com/office/powerpoint/2010/main" val="360425540"/>
+              </p:ext>
+            </p:extLst>
+          </p:nvPr>
+        </p:nvGraphicFramePr>
+        <p:xfrm>
+          <a:off x="254000" y="1524000"/>
+          <a:ext cx="5715000" cy="2540000"/>
+        </p:xfrm>
+        <a:graphic>
+          <a:graphicData uri="http://schemas.openxmlformats.org/drawingml/2006/chart">
+            <c:chart xmlns:c="http://schemas.openxmlformats.org/drawingml/2006/chart" xmlns:r="http://schemas.openxmlformats.org/officeDocument/2006/relationships" r:id="rId2"/>
+          </a:graphicData>
+        </a:graphic>
+      </p:graphicFrame>
+      <p:graphicFrame>
+        <p:nvGraphicFramePr>
+          <p:cNvPr id="4" name="Diagramm 3">
+            <a:extLst>
+              <a:ext uri="{FF2B5EF4-FFF2-40B4-BE49-F238E27FC236}">
+                <a16:creationId xmlns:a16="http://schemas.microsoft.com/office/drawing/2014/main" id="{EC8B8226-B7D7-46F8-73CD-5D40BD4C947B}"/>
+              </a:ext>
+            </a:extLst>
+          </p:cNvPr>
+          <p:cNvGraphicFramePr/>
+          <p:nvPr>
+            <p:extLst>
+              <p:ext uri="{D42A27DB-BD31-4B8C-83A1-F6EECF244321}">
+                <p14:modId xmlns:p14="http://schemas.microsoft.com/office/powerpoint/2010/main" val="636205527"/>
+              </p:ext>
+            </p:extLst>
+          </p:nvPr>
+        </p:nvGraphicFramePr>
+        <p:xfrm>
+          <a:off x="6223000" y="1524000"/>
+          <a:ext cx="5715000" cy="2540000"/>
+        </p:xfrm>
+        <a:graphic>
+          <a:graphicData uri="http://schemas.openxmlformats.org/drawingml/2006/chart">
+            <c:chart xmlns:c="http://schemas.openxmlformats.org/drawingml/2006/chart" xmlns:r="http://schemas.openxmlformats.org/officeDocument/2006/relationships" r:id="rId3"/>
+          </a:graphicData>
+        </a:graphic>
+      </p:graphicFrame>
+      <p:graphicFrame>
+        <p:nvGraphicFramePr>
+          <p:cNvPr id="5" name="Diagramm 4">
+            <a:extLst>
+              <a:ext uri="{FF2B5EF4-FFF2-40B4-BE49-F238E27FC236}">
+                <a16:creationId xmlns:a16="http://schemas.microsoft.com/office/drawing/2014/main" id="{4D1152D8-31CD-7D65-0CB0-C87BD9CD98EA}"/>
+              </a:ext>
+            </a:extLst>
+          </p:cNvPr>
+          <p:cNvGraphicFramePr/>
+          <p:nvPr>
+            <p:extLst>
+              <p:ext uri="{D42A27DB-BD31-4B8C-83A1-F6EECF244321}">
+                <p14:modId xmlns:p14="http://schemas.microsoft.com/office/powerpoint/2010/main" val="1825263612"/>
+              </p:ext>
+            </p:extLst>
+          </p:nvPr>
+        </p:nvGraphicFramePr>
+        <p:xfrm>
+          <a:off x="254000" y="4191000"/>
+          <a:ext cx="5715000" cy="2540000"/>
+        </p:xfrm>
+        <a:graphic>
+          <a:graphicData uri="http://schemas.openxmlformats.org/drawingml/2006/chart">
+            <c:chart xmlns:c="http://schemas.openxmlformats.org/drawingml/2006/chart" xmlns:r="http://schemas.openxmlformats.org/officeDocument/2006/relationships" r:id="rId4"/>
+          </a:graphicData>
+        </a:graphic>
+      </p:graphicFrame>
+      <p:graphicFrame>
+        <p:nvGraphicFramePr>
+          <p:cNvPr id="6" name="Diagramm 5">
+            <a:extLst>
+              <a:ext uri="{FF2B5EF4-FFF2-40B4-BE49-F238E27FC236}">
+                <a16:creationId xmlns:a16="http://schemas.microsoft.com/office/drawing/2014/main" id="{714D4488-5FD8-F741-8C74-2423D01AFAE3}"/>
+              </a:ext>
+            </a:extLst>
+          </p:cNvPr>
+          <p:cNvGraphicFramePr/>
+          <p:nvPr>
+            <p:extLst>
+              <p:ext uri="{D42A27DB-BD31-4B8C-83A1-F6EECF244321}">
+                <p14:modId xmlns:p14="http://schemas.microsoft.com/office/powerpoint/2010/main" val="3923681206"/>
+              </p:ext>
+            </p:extLst>
+          </p:nvPr>
+        </p:nvGraphicFramePr>
+        <p:xfrm>
+          <a:off x="6223000" y="4191000"/>
+          <a:ext cx="5715000" cy="2540000"/>
+        </p:xfrm>
+        <a:graphic>
+          <a:graphicData uri="http://schemas.openxmlformats.org/drawingml/2006/chart">
+            <c:chart xmlns:c="http://schemas.openxmlformats.org/drawingml/2006/chart" xmlns:r="http://schemas.openxmlformats.org/officeDocument/2006/relationships" r:id="rId5"/>
+          </a:graphicData>
+        </a:graphic>
+      </p:graphicFrame>
+    </p:spTree>
+    <p:extLst>
+      <p:ext uri="{BB962C8B-B14F-4D97-AF65-F5344CB8AC3E}">
+        <p14:creationId xmlns:p14="http://schemas.microsoft.com/office/powerpoint/2010/main" val="618327061"/>
       </p:ext>
     </p:extLst>
   </p:cSld>
@@ -22331,7 +26876,7 @@
           <p:cNvPr id="2" name="Titel 1">
             <a:extLst>
               <a:ext uri="{FF2B5EF4-FFF2-40B4-BE49-F238E27FC236}">
-                <a16:creationId xmlns:a16="http://schemas.microsoft.com/office/drawing/2014/main" id="{2E349F9C-E758-9283-5407-FBD5D26D08B1}"/>
+                <a16:creationId xmlns:a16="http://schemas.microsoft.com/office/drawing/2014/main" id="{ED4ABAAD-DA22-EB86-455B-03764FA87532}"/>
               </a:ext>
             </a:extLst>
           </p:cNvPr>
@@ -22359,7 +26904,7 @@
           <p:cNvPr id="3" name="Diagramm 2">
             <a:extLst>
               <a:ext uri="{FF2B5EF4-FFF2-40B4-BE49-F238E27FC236}">
-                <a16:creationId xmlns:a16="http://schemas.microsoft.com/office/drawing/2014/main" id="{7425FA0D-92E1-7711-1B76-BFE7FAD7ED42}"/>
+                <a16:creationId xmlns:a16="http://schemas.microsoft.com/office/drawing/2014/main" id="{3EB80222-B645-7B50-9970-439480460BB2}"/>
               </a:ext>
             </a:extLst>
           </p:cNvPr>
@@ -22367,7 +26912,7 @@
           <p:nvPr>
             <p:extLst>
               <p:ext uri="{D42A27DB-BD31-4B8C-83A1-F6EECF244321}">
-                <p14:modId xmlns:p14="http://schemas.microsoft.com/office/powerpoint/2010/main" val="3013055309"/>
+                <p14:modId xmlns:p14="http://schemas.microsoft.com/office/powerpoint/2010/main" val="1379840240"/>
               </p:ext>
             </p:extLst>
           </p:nvPr>
@@ -22385,7 +26930,7 @@
     </p:spTree>
     <p:extLst>
       <p:ext uri="{BB962C8B-B14F-4D97-AF65-F5344CB8AC3E}">
-        <p14:creationId xmlns:p14="http://schemas.microsoft.com/office/powerpoint/2010/main" val="2642979292"/>
+        <p14:creationId xmlns:p14="http://schemas.microsoft.com/office/powerpoint/2010/main" val="945563174"/>
       </p:ext>
     </p:extLst>
   </p:cSld>
@@ -22417,7 +26962,7 @@
           <p:cNvPr id="2" name="Titel 1">
             <a:extLst>
               <a:ext uri="{FF2B5EF4-FFF2-40B4-BE49-F238E27FC236}">
-                <a16:creationId xmlns:a16="http://schemas.microsoft.com/office/drawing/2014/main" id="{F3FA6994-1F80-AFD1-6F41-87B901CCB1A8}"/>
+                <a16:creationId xmlns:a16="http://schemas.microsoft.com/office/drawing/2014/main" id="{55CFF216-45E7-285F-8BC6-B65993CA5408}"/>
               </a:ext>
             </a:extLst>
           </p:cNvPr>
@@ -22445,7 +26990,7 @@
           <p:cNvPr id="3" name="Diagramm 2">
             <a:extLst>
               <a:ext uri="{FF2B5EF4-FFF2-40B4-BE49-F238E27FC236}">
-                <a16:creationId xmlns:a16="http://schemas.microsoft.com/office/drawing/2014/main" id="{35347334-3673-8A15-B144-6862842EBD5D}"/>
+                <a16:creationId xmlns:a16="http://schemas.microsoft.com/office/drawing/2014/main" id="{BAADF47E-0C7B-AEC2-7E23-2D1AD06CF1C6}"/>
               </a:ext>
             </a:extLst>
           </p:cNvPr>
@@ -22453,7 +26998,7 @@
           <p:nvPr>
             <p:extLst>
               <p:ext uri="{D42A27DB-BD31-4B8C-83A1-F6EECF244321}">
-                <p14:modId xmlns:p14="http://schemas.microsoft.com/office/powerpoint/2010/main" val="3685049093"/>
+                <p14:modId xmlns:p14="http://schemas.microsoft.com/office/powerpoint/2010/main" val="3109109267"/>
               </p:ext>
             </p:extLst>
           </p:nvPr>
@@ -22471,7 +27016,7 @@
     </p:spTree>
     <p:extLst>
       <p:ext uri="{BB962C8B-B14F-4D97-AF65-F5344CB8AC3E}">
-        <p14:creationId xmlns:p14="http://schemas.microsoft.com/office/powerpoint/2010/main" val="3077455273"/>
+        <p14:creationId xmlns:p14="http://schemas.microsoft.com/office/powerpoint/2010/main" val="2978718335"/>
       </p:ext>
     </p:extLst>
   </p:cSld>
@@ -22503,7 +27048,7 @@
           <p:cNvPr id="2" name="Titel 1">
             <a:extLst>
               <a:ext uri="{FF2B5EF4-FFF2-40B4-BE49-F238E27FC236}">
-                <a16:creationId xmlns:a16="http://schemas.microsoft.com/office/drawing/2014/main" id="{BD5A3CA7-D101-6B2E-AF0C-F11FB82E9E83}"/>
+                <a16:creationId xmlns:a16="http://schemas.microsoft.com/office/drawing/2014/main" id="{F4391E8F-F005-E7E1-E2B5-5A16467391E8}"/>
               </a:ext>
             </a:extLst>
           </p:cNvPr>
@@ -22531,7 +27076,7 @@
           <p:cNvPr id="3" name="Diagramm 2">
             <a:extLst>
               <a:ext uri="{FF2B5EF4-FFF2-40B4-BE49-F238E27FC236}">
-                <a16:creationId xmlns:a16="http://schemas.microsoft.com/office/drawing/2014/main" id="{2F5CE736-34E0-8AD8-37F1-20A4CBAED567}"/>
+                <a16:creationId xmlns:a16="http://schemas.microsoft.com/office/drawing/2014/main" id="{18008124-9BAA-D1D7-6203-7DD5A128D994}"/>
               </a:ext>
             </a:extLst>
           </p:cNvPr>
@@ -22539,7 +27084,7 @@
           <p:nvPr>
             <p:extLst>
               <p:ext uri="{D42A27DB-BD31-4B8C-83A1-F6EECF244321}">
-                <p14:modId xmlns:p14="http://schemas.microsoft.com/office/powerpoint/2010/main" val="1813549899"/>
+                <p14:modId xmlns:p14="http://schemas.microsoft.com/office/powerpoint/2010/main" val="1946188728"/>
               </p:ext>
             </p:extLst>
           </p:nvPr>
@@ -22557,7 +27102,7 @@
     </p:spTree>
     <p:extLst>
       <p:ext uri="{BB962C8B-B14F-4D97-AF65-F5344CB8AC3E}">
-        <p14:creationId xmlns:p14="http://schemas.microsoft.com/office/powerpoint/2010/main" val="1626844990"/>
+        <p14:creationId xmlns:p14="http://schemas.microsoft.com/office/powerpoint/2010/main" val="222107565"/>
       </p:ext>
     </p:extLst>
   </p:cSld>
@@ -22589,7 +27134,7 @@
           <p:cNvPr id="2" name="Titel 1">
             <a:extLst>
               <a:ext uri="{FF2B5EF4-FFF2-40B4-BE49-F238E27FC236}">
-                <a16:creationId xmlns:a16="http://schemas.microsoft.com/office/drawing/2014/main" id="{550F5381-69F6-2449-7850-815770C4C8C4}"/>
+                <a16:creationId xmlns:a16="http://schemas.microsoft.com/office/drawing/2014/main" id="{068667CE-F3F7-2267-5A0E-4579B8F10DB2}"/>
               </a:ext>
             </a:extLst>
           </p:cNvPr>
@@ -22617,7 +27162,7 @@
           <p:cNvPr id="3" name="Diagramm 2">
             <a:extLst>
               <a:ext uri="{FF2B5EF4-FFF2-40B4-BE49-F238E27FC236}">
-                <a16:creationId xmlns:a16="http://schemas.microsoft.com/office/drawing/2014/main" id="{BAA897E1-A150-EF57-C639-B23E8A9B00B7}"/>
+                <a16:creationId xmlns:a16="http://schemas.microsoft.com/office/drawing/2014/main" id="{F32586B0-F5C2-E1AC-A9ED-C005E3683A89}"/>
               </a:ext>
             </a:extLst>
           </p:cNvPr>
@@ -22625,7 +27170,7 @@
           <p:nvPr>
             <p:extLst>
               <p:ext uri="{D42A27DB-BD31-4B8C-83A1-F6EECF244321}">
-                <p14:modId xmlns:p14="http://schemas.microsoft.com/office/powerpoint/2010/main" val="1838138582"/>
+                <p14:modId xmlns:p14="http://schemas.microsoft.com/office/powerpoint/2010/main" val="1878187773"/>
               </p:ext>
             </p:extLst>
           </p:nvPr>
@@ -22643,7 +27188,7 @@
     </p:spTree>
     <p:extLst>
       <p:ext uri="{BB962C8B-B14F-4D97-AF65-F5344CB8AC3E}">
-        <p14:creationId xmlns:p14="http://schemas.microsoft.com/office/powerpoint/2010/main" val="774704313"/>
+        <p14:creationId xmlns:p14="http://schemas.microsoft.com/office/powerpoint/2010/main" val="3458049860"/>
       </p:ext>
     </p:extLst>
   </p:cSld>
@@ -22675,7 +27220,7 @@
           <p:cNvPr id="2" name="Titel 1">
             <a:extLst>
               <a:ext uri="{FF2B5EF4-FFF2-40B4-BE49-F238E27FC236}">
-                <a16:creationId xmlns:a16="http://schemas.microsoft.com/office/drawing/2014/main" id="{EFB0231D-EC22-A643-0E87-FF0A2B42EB25}"/>
+                <a16:creationId xmlns:a16="http://schemas.microsoft.com/office/drawing/2014/main" id="{4CB6DCC4-1741-C7E8-5422-882AB0597D32}"/>
               </a:ext>
             </a:extLst>
           </p:cNvPr>
@@ -22703,7 +27248,7 @@
           <p:cNvPr id="3" name="Diagramm 2">
             <a:extLst>
               <a:ext uri="{FF2B5EF4-FFF2-40B4-BE49-F238E27FC236}">
-                <a16:creationId xmlns:a16="http://schemas.microsoft.com/office/drawing/2014/main" id="{7375F800-388D-95F9-CF0F-5C58F1B1CB03}"/>
+                <a16:creationId xmlns:a16="http://schemas.microsoft.com/office/drawing/2014/main" id="{4A8FF872-6D40-E4B8-D8AB-D1B0F220EEBE}"/>
               </a:ext>
             </a:extLst>
           </p:cNvPr>
@@ -22711,7 +27256,7 @@
           <p:nvPr>
             <p:extLst>
               <p:ext uri="{D42A27DB-BD31-4B8C-83A1-F6EECF244321}">
-                <p14:modId xmlns:p14="http://schemas.microsoft.com/office/powerpoint/2010/main" val="1932885793"/>
+                <p14:modId xmlns:p14="http://schemas.microsoft.com/office/powerpoint/2010/main" val="3053622404"/>
               </p:ext>
             </p:extLst>
           </p:nvPr>
@@ -22729,7 +27274,7 @@
     </p:spTree>
     <p:extLst>
       <p:ext uri="{BB962C8B-B14F-4D97-AF65-F5344CB8AC3E}">
-        <p14:creationId xmlns:p14="http://schemas.microsoft.com/office/powerpoint/2010/main" val="2630931024"/>
+        <p14:creationId xmlns:p14="http://schemas.microsoft.com/office/powerpoint/2010/main" val="1504745208"/>
       </p:ext>
     </p:extLst>
   </p:cSld>
@@ -22761,7 +27306,7 @@
           <p:cNvPr id="2" name="Titel 1">
             <a:extLst>
               <a:ext uri="{FF2B5EF4-FFF2-40B4-BE49-F238E27FC236}">
-                <a16:creationId xmlns:a16="http://schemas.microsoft.com/office/drawing/2014/main" id="{30503B2C-5551-DD52-1C14-628E6AD101DE}"/>
+                <a16:creationId xmlns:a16="http://schemas.microsoft.com/office/drawing/2014/main" id="{77D1DB16-97F1-E7FD-F89F-9A98972DDDDD}"/>
               </a:ext>
             </a:extLst>
           </p:cNvPr>
@@ -22789,7 +27334,7 @@
           <p:cNvPr id="3" name="Diagramm 2">
             <a:extLst>
               <a:ext uri="{FF2B5EF4-FFF2-40B4-BE49-F238E27FC236}">
-                <a16:creationId xmlns:a16="http://schemas.microsoft.com/office/drawing/2014/main" id="{EFD305C2-EE8A-8385-6E05-3000A13D57A3}"/>
+                <a16:creationId xmlns:a16="http://schemas.microsoft.com/office/drawing/2014/main" id="{36AA38A7-068F-8944-36F4-BE969F07DCB2}"/>
               </a:ext>
             </a:extLst>
           </p:cNvPr>
@@ -22797,7 +27342,7 @@
           <p:nvPr>
             <p:extLst>
               <p:ext uri="{D42A27DB-BD31-4B8C-83A1-F6EECF244321}">
-                <p14:modId xmlns:p14="http://schemas.microsoft.com/office/powerpoint/2010/main" val="3949798119"/>
+                <p14:modId xmlns:p14="http://schemas.microsoft.com/office/powerpoint/2010/main" val="978855733"/>
               </p:ext>
             </p:extLst>
           </p:nvPr>
@@ -22815,7 +27360,7 @@
     </p:spTree>
     <p:extLst>
       <p:ext uri="{BB962C8B-B14F-4D97-AF65-F5344CB8AC3E}">
-        <p14:creationId xmlns:p14="http://schemas.microsoft.com/office/powerpoint/2010/main" val="2809152263"/>
+        <p14:creationId xmlns:p14="http://schemas.microsoft.com/office/powerpoint/2010/main" val="1737708727"/>
       </p:ext>
     </p:extLst>
   </p:cSld>
@@ -22847,7 +27392,7 @@
           <p:cNvPr id="2" name="Titel 1">
             <a:extLst>
               <a:ext uri="{FF2B5EF4-FFF2-40B4-BE49-F238E27FC236}">
-                <a16:creationId xmlns:a16="http://schemas.microsoft.com/office/drawing/2014/main" id="{C2B2D51A-53E3-7462-F889-1FA0D1452E38}"/>
+                <a16:creationId xmlns:a16="http://schemas.microsoft.com/office/drawing/2014/main" id="{EC0F6BE2-5862-C3FE-6D3D-785E1B1D1484}"/>
               </a:ext>
             </a:extLst>
           </p:cNvPr>
@@ -22875,7 +27420,7 @@
           <p:cNvPr id="3" name="Diagramm 2">
             <a:extLst>
               <a:ext uri="{FF2B5EF4-FFF2-40B4-BE49-F238E27FC236}">
-                <a16:creationId xmlns:a16="http://schemas.microsoft.com/office/drawing/2014/main" id="{7323A509-63B8-3296-359B-782F402A5176}"/>
+                <a16:creationId xmlns:a16="http://schemas.microsoft.com/office/drawing/2014/main" id="{2ECAD85B-EEAC-DBEA-DAC9-B91319FC0701}"/>
               </a:ext>
             </a:extLst>
           </p:cNvPr>
@@ -22883,7 +27428,7 @@
           <p:nvPr>
             <p:extLst>
               <p:ext uri="{D42A27DB-BD31-4B8C-83A1-F6EECF244321}">
-                <p14:modId xmlns:p14="http://schemas.microsoft.com/office/powerpoint/2010/main" val="1914825952"/>
+                <p14:modId xmlns:p14="http://schemas.microsoft.com/office/powerpoint/2010/main" val="1692560305"/>
               </p:ext>
             </p:extLst>
           </p:nvPr>
@@ -22901,7 +27446,7 @@
     </p:spTree>
     <p:extLst>
       <p:ext uri="{BB962C8B-B14F-4D97-AF65-F5344CB8AC3E}">
-        <p14:creationId xmlns:p14="http://schemas.microsoft.com/office/powerpoint/2010/main" val="1929776223"/>
+        <p14:creationId xmlns:p14="http://schemas.microsoft.com/office/powerpoint/2010/main" val="870103266"/>
       </p:ext>
     </p:extLst>
   </p:cSld>
@@ -22933,7 +27478,7 @@
           <p:cNvPr id="2" name="Titel 1">
             <a:extLst>
               <a:ext uri="{FF2B5EF4-FFF2-40B4-BE49-F238E27FC236}">
-                <a16:creationId xmlns:a16="http://schemas.microsoft.com/office/drawing/2014/main" id="{769A144A-0F3D-C99D-6FCA-CFD44D5F1747}"/>
+                <a16:creationId xmlns:a16="http://schemas.microsoft.com/office/drawing/2014/main" id="{AB5CF76F-5A63-FF61-5451-DC76BC647CAB}"/>
               </a:ext>
             </a:extLst>
           </p:cNvPr>
@@ -22961,7 +27506,7 @@
           <p:cNvPr id="3" name="Diagramm 2">
             <a:extLst>
               <a:ext uri="{FF2B5EF4-FFF2-40B4-BE49-F238E27FC236}">
-                <a16:creationId xmlns:a16="http://schemas.microsoft.com/office/drawing/2014/main" id="{26B389B4-56A1-03AC-E38A-3468C1E580C0}"/>
+                <a16:creationId xmlns:a16="http://schemas.microsoft.com/office/drawing/2014/main" id="{FF8EFB00-3BF4-0E74-DAF4-FE16FE808CA5}"/>
               </a:ext>
             </a:extLst>
           </p:cNvPr>
@@ -22969,7 +27514,7 @@
           <p:nvPr>
             <p:extLst>
               <p:ext uri="{D42A27DB-BD31-4B8C-83A1-F6EECF244321}">
-                <p14:modId xmlns:p14="http://schemas.microsoft.com/office/powerpoint/2010/main" val="441108456"/>
+                <p14:modId xmlns:p14="http://schemas.microsoft.com/office/powerpoint/2010/main" val="3962515068"/>
               </p:ext>
             </p:extLst>
           </p:nvPr>
@@ -22987,7 +27532,7 @@
     </p:spTree>
     <p:extLst>
       <p:ext uri="{BB962C8B-B14F-4D97-AF65-F5344CB8AC3E}">
-        <p14:creationId xmlns:p14="http://schemas.microsoft.com/office/powerpoint/2010/main" val="2359296016"/>
+        <p14:creationId xmlns:p14="http://schemas.microsoft.com/office/powerpoint/2010/main" val="1017449566"/>
       </p:ext>
     </p:extLst>
   </p:cSld>
